--- a/6th Semester/Level-3, Semester-II/CCE 323  Optical Fiber Communication/Muradul Boshir/Example 3.4-3.2 15-1-26.pptx
+++ b/6th Semester/Level-3, Semester-II/CCE 323  Optical Fiber Communication/Muradul Boshir/Example 3.4-3.2 15-1-26.pptx
@@ -1,16 +1,19 @@
 
 <file path=ppt/presentation.xml><?xml version="1.0" encoding="utf-8"?>
-<p:presentation xmlns:a="http://schemas.openxmlformats.org/drawingml/2006/main" xmlns:r="http://schemas.openxmlformats.org/officeDocument/2006/relationships" xmlns:p="http://schemas.openxmlformats.org/presentationml/2006/main" saveSubsetFonts="1">
+<p:presentation xmlns:a="http://schemas.openxmlformats.org/drawingml/2006/main" xmlns:r="http://schemas.openxmlformats.org/officeDocument/2006/relationships" xmlns:p="http://schemas.openxmlformats.org/presentationml/2006/main" xmlns:m="http://schemas.openxmlformats.org/officeDocument/2006/math" xmlns:w="http://schemas.openxmlformats.org/wordprocessingml/2006/main" saveSubsetFonts="1">
   <p:sldMasterIdLst>
     <p:sldMasterId id="2147483648" r:id="rId1"/>
   </p:sldMasterIdLst>
+  <p:notesMasterIdLst>
+    <p:notesMasterId r:id="rId10"/>
+  </p:notesMasterIdLst>
   <p:sldIdLst>
-    <p:sldId id="256" r:id="rId2"/>
-    <p:sldId id="259" r:id="rId3"/>
-    <p:sldId id="257" r:id="rId4"/>
-    <p:sldId id="258" r:id="rId5"/>
-    <p:sldId id="260" r:id="rId6"/>
-    <p:sldId id="261" r:id="rId7"/>
+    <p:sldId id="256" r:id="rId4"/>
+    <p:sldId id="257" r:id="rId5"/>
+    <p:sldId id="258" r:id="rId6"/>
+    <p:sldId id="259" r:id="rId7"/>
+    <p:sldId id="260" r:id="rId8"/>
+    <p:sldId id="261" r:id="rId9"/>
   </p:sldIdLst>
   <p:sldSz cx="12192000" cy="6858000"/>
   <p:notesSz cx="6858000" cy="9144000"/>
@@ -18,8 +21,8 @@
     <a:defPPr>
       <a:defRPr lang="en-US"/>
     </a:defPPr>
-    <a:lvl1pPr marL="0" algn="l" defTabSz="914400" rtl="0" eaLnBrk="1" latinLnBrk="0" hangingPunct="1">
-      <a:defRPr sz="1800" kern="1200">
+    <a:lvl1pPr marL="0" algn="l" defTabSz="914400" rtl="0">
+      <a:defRPr sz="1800">
         <a:solidFill>
           <a:schemeClr val="tx1"/>
         </a:solidFill>
@@ -28,8 +31,8 @@
         <a:cs typeface="+mn-cs"/>
       </a:defRPr>
     </a:lvl1pPr>
-    <a:lvl2pPr marL="457200" algn="l" defTabSz="914400" rtl="0" eaLnBrk="1" latinLnBrk="0" hangingPunct="1">
-      <a:defRPr sz="1800" kern="1200">
+    <a:lvl2pPr marL="457200" algn="l" defTabSz="914400" rtl="0">
+      <a:defRPr sz="1800">
         <a:solidFill>
           <a:schemeClr val="tx1"/>
         </a:solidFill>
@@ -38,8 +41,8 @@
         <a:cs typeface="+mn-cs"/>
       </a:defRPr>
     </a:lvl2pPr>
-    <a:lvl3pPr marL="914400" algn="l" defTabSz="914400" rtl="0" eaLnBrk="1" latinLnBrk="0" hangingPunct="1">
-      <a:defRPr sz="1800" kern="1200">
+    <a:lvl3pPr marL="914400" algn="l" defTabSz="914400" rtl="0">
+      <a:defRPr sz="1800">
         <a:solidFill>
           <a:schemeClr val="tx1"/>
         </a:solidFill>
@@ -48,8 +51,8 @@
         <a:cs typeface="+mn-cs"/>
       </a:defRPr>
     </a:lvl3pPr>
-    <a:lvl4pPr marL="1371600" algn="l" defTabSz="914400" rtl="0" eaLnBrk="1" latinLnBrk="0" hangingPunct="1">
-      <a:defRPr sz="1800" kern="1200">
+    <a:lvl4pPr marL="1371600" algn="l" defTabSz="914400" rtl="0">
+      <a:defRPr sz="1800">
         <a:solidFill>
           <a:schemeClr val="tx1"/>
         </a:solidFill>
@@ -58,8 +61,8 @@
         <a:cs typeface="+mn-cs"/>
       </a:defRPr>
     </a:lvl4pPr>
-    <a:lvl5pPr marL="1828800" algn="l" defTabSz="914400" rtl="0" eaLnBrk="1" latinLnBrk="0" hangingPunct="1">
-      <a:defRPr sz="1800" kern="1200">
+    <a:lvl5pPr marL="1828800" algn="l" defTabSz="914400" rtl="0">
+      <a:defRPr sz="1800">
         <a:solidFill>
           <a:schemeClr val="tx1"/>
         </a:solidFill>
@@ -68,8 +71,8 @@
         <a:cs typeface="+mn-cs"/>
       </a:defRPr>
     </a:lvl5pPr>
-    <a:lvl6pPr marL="2286000" algn="l" defTabSz="914400" rtl="0" eaLnBrk="1" latinLnBrk="0" hangingPunct="1">
-      <a:defRPr sz="1800" kern="1200">
+    <a:lvl6pPr marL="2286000" algn="l" defTabSz="914400" rtl="0">
+      <a:defRPr sz="1800">
         <a:solidFill>
           <a:schemeClr val="tx1"/>
         </a:solidFill>
@@ -78,8 +81,8 @@
         <a:cs typeface="+mn-cs"/>
       </a:defRPr>
     </a:lvl6pPr>
-    <a:lvl7pPr marL="2743200" algn="l" defTabSz="914400" rtl="0" eaLnBrk="1" latinLnBrk="0" hangingPunct="1">
-      <a:defRPr sz="1800" kern="1200">
+    <a:lvl7pPr marL="2743200" algn="l" defTabSz="914400" rtl="0">
+      <a:defRPr sz="1800">
         <a:solidFill>
           <a:schemeClr val="tx1"/>
         </a:solidFill>
@@ -88,8 +91,8 @@
         <a:cs typeface="+mn-cs"/>
       </a:defRPr>
     </a:lvl7pPr>
-    <a:lvl8pPr marL="3200400" algn="l" defTabSz="914400" rtl="0" eaLnBrk="1" latinLnBrk="0" hangingPunct="1">
-      <a:defRPr sz="1800" kern="1200">
+    <a:lvl8pPr marL="3200400" algn="l" defTabSz="914400" rtl="0">
+      <a:defRPr sz="1800">
         <a:solidFill>
           <a:schemeClr val="tx1"/>
         </a:solidFill>
@@ -98,8 +101,8 @@
         <a:cs typeface="+mn-cs"/>
       </a:defRPr>
     </a:lvl8pPr>
-    <a:lvl9pPr marL="3657600" algn="l" defTabSz="914400" rtl="0" eaLnBrk="1" latinLnBrk="0" hangingPunct="1">
-      <a:defRPr sz="1800" kern="1200">
+    <a:lvl9pPr marL="3657600" algn="l" defTabSz="914400" rtl="0">
+      <a:defRPr sz="1800">
         <a:solidFill>
           <a:schemeClr val="tx1"/>
         </a:solidFill>
@@ -112,8 +115,838 @@
 </p:presentation>
 </file>
 
+<file path=ppt/notesMasters/notesMaster1.xml><?xml version="1.0" encoding="utf-8"?>
+<p:notesMaster xmlns:a="http://schemas.openxmlformats.org/drawingml/2006/main" xmlns:r="http://schemas.openxmlformats.org/officeDocument/2006/relationships" xmlns:p="http://schemas.openxmlformats.org/presentationml/2006/main">
+  <p:cSld name="">
+    <p:bg>
+      <p:bgRef idx="1001">
+        <a:schemeClr val="bg1"/>
+      </p:bgRef>
+    </p:bg>
+    <p:spTree>
+      <p:nvGrpSpPr>
+        <p:cNvPr id="1" name=""/>
+        <p:cNvGrpSpPr/>
+        <p:nvPr/>
+      </p:nvGrpSpPr>
+      <p:grpSpPr bwMode="auto">
+        <a:xfrm>
+          <a:off x="0" y="0"/>
+          <a:ext cx="0" cy="0"/>
+          <a:chOff x="0" y="0"/>
+          <a:chExt cx="0" cy="0"/>
+        </a:xfrm>
+      </p:grpSpPr>
+      <p:sp>
+        <p:nvSpPr>
+          <p:cNvPr id="2" name="Header Placeholder 1"/>
+          <p:cNvSpPr>
+            <a:spLocks noGrp="1"/>
+          </p:cNvSpPr>
+          <p:nvPr>
+            <p:ph type="hdr" sz="quarter"/>
+          </p:nvPr>
+        </p:nvSpPr>
+        <p:spPr bwMode="auto">
+          <a:xfrm>
+            <a:off x="0" y="0"/>
+            <a:ext cx="2971800" cy="458788"/>
+          </a:xfrm>
+          <a:prstGeom prst="rect">
+            <a:avLst/>
+          </a:prstGeom>
+        </p:spPr>
+        <p:txBody>
+          <a:bodyPr vert="horz" lIns="91440" tIns="45720" rIns="91440" bIns="45720" rtlCol="0" anchor="ctr"/>
+          <a:lstStyle>
+            <a:lvl1pPr algn="l">
+              <a:defRPr sz="1200"/>
+            </a:lvl1pPr>
+          </a:lstStyle>
+          <a:p>
+            <a:pPr>
+              <a:defRPr/>
+            </a:pPr>
+            <a:endParaRPr/>
+          </a:p>
+        </p:txBody>
+      </p:sp>
+      <p:sp>
+        <p:nvSpPr>
+          <p:cNvPr id="3" name="Date Placeholder 2"/>
+          <p:cNvSpPr>
+            <a:spLocks noGrp="1"/>
+          </p:cNvSpPr>
+          <p:nvPr>
+            <p:ph type="dt" idx="2"/>
+          </p:nvPr>
+        </p:nvSpPr>
+        <p:spPr bwMode="auto">
+          <a:xfrm>
+            <a:off x="3884613" y="0"/>
+            <a:ext cx="2971800" cy="458788"/>
+          </a:xfrm>
+          <a:prstGeom prst="rect">
+            <a:avLst/>
+          </a:prstGeom>
+        </p:spPr>
+        <p:txBody>
+          <a:bodyPr vert="horz" lIns="91440" tIns="45720" rIns="91440" bIns="45720" rtlCol="0" anchor="ctr"/>
+          <a:lstStyle>
+            <a:lvl1pPr algn="r">
+              <a:defRPr sz="1200"/>
+            </a:lvl1pPr>
+          </a:lstStyle>
+          <a:p>
+            <a:pPr>
+              <a:defRPr/>
+            </a:pPr>
+            <a:endParaRPr/>
+          </a:p>
+        </p:txBody>
+      </p:sp>
+      <p:sp>
+        <p:nvSpPr>
+          <p:cNvPr id="3" name="Date Placeholder 2"/>
+          <p:cNvSpPr>
+            <a:spLocks noGrp="1"/>
+          </p:cNvSpPr>
+          <p:nvPr>
+            <p:ph type="dt" idx="3"/>
+          </p:nvPr>
+        </p:nvSpPr>
+        <p:spPr bwMode="auto">
+          <a:xfrm>
+            <a:off x="3884613" y="0"/>
+            <a:ext cx="2971800" cy="458788"/>
+          </a:xfrm>
+          <a:prstGeom prst="rect">
+            <a:avLst/>
+          </a:prstGeom>
+        </p:spPr>
+        <p:txBody>
+          <a:bodyPr vert="horz" lIns="91440" tIns="45720" rIns="91440" bIns="45720" rtlCol="0" anchor="ctr"/>
+          <a:lstStyle>
+            <a:lvl1pPr algn="r">
+              <a:defRPr sz="1200"/>
+            </a:lvl1pPr>
+          </a:lstStyle>
+          <a:p>
+            <a:pPr>
+              <a:defRPr/>
+            </a:pPr>
+            <a:endParaRPr/>
+          </a:p>
+        </p:txBody>
+      </p:sp>
+      <p:sp>
+        <p:nvSpPr>
+          <p:cNvPr id="5" name="Notes Placeholder 4"/>
+          <p:cNvSpPr>
+            <a:spLocks noGrp="1"/>
+          </p:cNvSpPr>
+          <p:nvPr>
+            <p:ph type="body" sz="quarter" idx="1"/>
+          </p:nvPr>
+        </p:nvSpPr>
+        <p:spPr bwMode="auto">
+          <a:xfrm>
+            <a:off x="685800" y="4400550"/>
+            <a:ext cx="5486400" cy="3600450"/>
+          </a:xfrm>
+          <a:prstGeom prst="rect">
+            <a:avLst/>
+          </a:prstGeom>
+        </p:spPr>
+        <p:txBody>
+          <a:bodyPr vert="horz" lIns="91440" tIns="45720" rIns="91440" bIns="45720" rtlCol="0" anchor="ctr"/>
+          <a:lstStyle/>
+          <a:p>
+            <a:pPr>
+              <a:defRPr/>
+            </a:pPr>
+            <a:endParaRPr/>
+          </a:p>
+        </p:txBody>
+      </p:sp>
+      <p:sp>
+        <p:nvSpPr>
+          <p:cNvPr id="6" name="Footer Placeholder 5"/>
+          <p:cNvSpPr>
+            <a:spLocks noGrp="1"/>
+          </p:cNvSpPr>
+          <p:nvPr>
+            <p:ph type="ftr" sz="quarter" idx="4"/>
+          </p:nvPr>
+        </p:nvSpPr>
+        <p:spPr bwMode="auto">
+          <a:xfrm>
+            <a:off x="0" y="8685213"/>
+            <a:ext cx="2971800" cy="458787"/>
+          </a:xfrm>
+          <a:prstGeom prst="rect">
+            <a:avLst/>
+          </a:prstGeom>
+        </p:spPr>
+        <p:txBody>
+          <a:bodyPr vert="horz" lIns="91440" tIns="45720" rIns="91440" bIns="45720" rtlCol="0" anchor="b"/>
+          <a:lstStyle>
+            <a:lvl1pPr algn="l">
+              <a:defRPr sz="1200"/>
+            </a:lvl1pPr>
+          </a:lstStyle>
+          <a:p>
+            <a:pPr>
+              <a:defRPr/>
+            </a:pPr>
+            <a:endParaRPr/>
+          </a:p>
+        </p:txBody>
+      </p:sp>
+      <p:sp>
+        <p:nvSpPr>
+          <p:cNvPr id="7" name="Slide Number Placeholder 6"/>
+          <p:cNvSpPr>
+            <a:spLocks noGrp="1"/>
+          </p:cNvSpPr>
+          <p:nvPr>
+            <p:ph type="sldNum" sz="quarter" idx="10"/>
+          </p:nvPr>
+        </p:nvSpPr>
+        <p:spPr bwMode="auto">
+          <a:xfrm>
+            <a:off x="3884613" y="8685213"/>
+            <a:ext cx="2971800" cy="458787"/>
+          </a:xfrm>
+          <a:prstGeom prst="rect">
+            <a:avLst/>
+          </a:prstGeom>
+        </p:spPr>
+        <p:txBody>
+          <a:bodyPr vert="horz" lIns="91440" tIns="45720" rIns="91440" bIns="45720" rtlCol="0" anchor="b"/>
+          <a:lstStyle>
+            <a:lvl1pPr algn="r">
+              <a:defRPr sz="1200"/>
+            </a:lvl1pPr>
+          </a:lstStyle>
+          <a:p>
+            <a:pPr>
+              <a:defRPr/>
+            </a:pPr>
+            <a:endParaRPr/>
+          </a:p>
+        </p:txBody>
+      </p:sp>
+    </p:spTree>
+  </p:cSld>
+  <p:clrMap bg1="lt1" tx1="dk1" bg2="lt2" tx2="dk2" accent1="accent1" accent2="accent2" accent3="accent3" accent4="accent4" accent5="accent5" accent6="accent6" hlink="hlink" folHlink="folHlink"/>
+  <p:notesStyle>
+    <a:lvl1pPr marL="0" algn="l" defTabSz="914400">
+      <a:defRPr sz="1200">
+        <a:solidFill>
+          <a:schemeClr val="tx1"/>
+        </a:solidFill>
+        <a:latin typeface="+mn-lt"/>
+        <a:ea typeface="+mn-ea"/>
+        <a:cs typeface="+mn-cs"/>
+      </a:defRPr>
+    </a:lvl1pPr>
+    <a:lvl2pPr marL="457200" algn="l" defTabSz="914400">
+      <a:defRPr sz="1200">
+        <a:solidFill>
+          <a:schemeClr val="tx1"/>
+        </a:solidFill>
+        <a:latin typeface="+mn-lt"/>
+        <a:ea typeface="+mn-ea"/>
+        <a:cs typeface="+mn-cs"/>
+      </a:defRPr>
+    </a:lvl2pPr>
+    <a:lvl3pPr marL="914400" algn="l" defTabSz="914400">
+      <a:defRPr sz="1200">
+        <a:solidFill>
+          <a:schemeClr val="tx1"/>
+        </a:solidFill>
+        <a:latin typeface="+mn-lt"/>
+        <a:ea typeface="+mn-ea"/>
+        <a:cs typeface="+mn-cs"/>
+      </a:defRPr>
+    </a:lvl3pPr>
+    <a:lvl4pPr marL="1371600" algn="l" defTabSz="914400">
+      <a:defRPr sz="1200">
+        <a:solidFill>
+          <a:schemeClr val="tx1"/>
+        </a:solidFill>
+        <a:latin typeface="+mn-lt"/>
+        <a:ea typeface="+mn-ea"/>
+        <a:cs typeface="+mn-cs"/>
+      </a:defRPr>
+    </a:lvl4pPr>
+    <a:lvl5pPr marL="1828800" algn="l" defTabSz="914400">
+      <a:defRPr sz="1200">
+        <a:solidFill>
+          <a:schemeClr val="tx1"/>
+        </a:solidFill>
+        <a:latin typeface="+mn-lt"/>
+        <a:ea typeface="+mn-ea"/>
+        <a:cs typeface="+mn-cs"/>
+      </a:defRPr>
+    </a:lvl5pPr>
+    <a:lvl6pPr marL="2286000" algn="l" defTabSz="914400">
+      <a:defRPr sz="1200">
+        <a:solidFill>
+          <a:schemeClr val="tx1"/>
+        </a:solidFill>
+        <a:latin typeface="+mn-lt"/>
+        <a:ea typeface="+mn-ea"/>
+        <a:cs typeface="+mn-cs"/>
+      </a:defRPr>
+    </a:lvl6pPr>
+    <a:lvl7pPr marL="2743200" algn="l" defTabSz="914400">
+      <a:defRPr sz="1200">
+        <a:solidFill>
+          <a:schemeClr val="tx1"/>
+        </a:solidFill>
+        <a:latin typeface="+mn-lt"/>
+        <a:ea typeface="+mn-ea"/>
+        <a:cs typeface="+mn-cs"/>
+      </a:defRPr>
+    </a:lvl7pPr>
+    <a:lvl8pPr marL="3200400" algn="l" defTabSz="914400">
+      <a:defRPr sz="1200">
+        <a:solidFill>
+          <a:schemeClr val="tx1"/>
+        </a:solidFill>
+        <a:latin typeface="+mn-lt"/>
+        <a:ea typeface="+mn-ea"/>
+        <a:cs typeface="+mn-cs"/>
+      </a:defRPr>
+    </a:lvl8pPr>
+    <a:lvl9pPr marL="3657600" algn="l" defTabSz="914400">
+      <a:defRPr sz="1200">
+        <a:solidFill>
+          <a:schemeClr val="tx1"/>
+        </a:solidFill>
+        <a:latin typeface="+mn-lt"/>
+        <a:ea typeface="+mn-ea"/>
+        <a:cs typeface="+mn-cs"/>
+      </a:defRPr>
+    </a:lvl9pPr>
+  </p:notesStyle>
+</p:notesMaster>
+</file>
+
+<file path=ppt/notesSlides/notesSlide1.xml><?xml version="1.0" encoding="utf-8"?>
+<p:notes xmlns:a="http://schemas.openxmlformats.org/drawingml/2006/main" xmlns:r="http://schemas.openxmlformats.org/officeDocument/2006/relationships" xmlns:p="http://schemas.openxmlformats.org/presentationml/2006/main" xmlns:m="http://schemas.openxmlformats.org/officeDocument/2006/math" xmlns:w="http://schemas.openxmlformats.org/wordprocessingml/2006/main">
+  <p:cSld name="">
+    <p:spTree>
+      <p:nvGrpSpPr>
+        <p:cNvPr id="1" name=""/>
+        <p:cNvGrpSpPr/>
+        <p:nvPr/>
+      </p:nvGrpSpPr>
+      <p:grpSpPr bwMode="auto">
+        <a:xfrm>
+          <a:off x="0" y="0"/>
+          <a:ext cx="0" cy="0"/>
+          <a:chOff x="0" y="0"/>
+          <a:chExt cx="0" cy="0"/>
+        </a:xfrm>
+      </p:grpSpPr>
+      <p:sp>
+        <p:nvSpPr>
+          <p:cNvPr id="2" name="Slide Image Placeholder 1"/>
+          <p:cNvSpPr>
+            <a:spLocks noChangeAspect="1" noGrp="1" noRot="1"/>
+          </p:cNvSpPr>
+          <p:nvPr>
+            <p:ph type="sldImg"/>
+          </p:nvPr>
+        </p:nvSpPr>
+        <p:spPr bwMode="auto"/>
+      </p:sp>
+      <p:sp>
+        <p:nvSpPr>
+          <p:cNvPr id="3" name="Notes Placeholder 2"/>
+          <p:cNvSpPr>
+            <a:spLocks noGrp="1"/>
+          </p:cNvSpPr>
+          <p:nvPr>
+            <p:ph type="body" idx="1"/>
+          </p:nvPr>
+        </p:nvSpPr>
+        <p:spPr bwMode="auto"/>
+        <p:txBody>
+          <a:bodyPr/>
+          <a:lstStyle/>
+          <a:p>
+            <a:pPr>
+              <a:defRPr/>
+            </a:pPr>
+            <a:endParaRPr/>
+          </a:p>
+        </p:txBody>
+      </p:sp>
+      <p:sp>
+        <p:nvSpPr>
+          <p:cNvPr id="4" name="Slide Number Placeholder 3"/>
+          <p:cNvSpPr>
+            <a:spLocks noGrp="1"/>
+          </p:cNvSpPr>
+          <p:nvPr>
+            <p:ph type="sldNum" sz="quarter" idx="10"/>
+          </p:nvPr>
+        </p:nvSpPr>
+        <p:spPr bwMode="auto"/>
+        <p:txBody>
+          <a:bodyPr/>
+          <a:lstStyle/>
+          <a:p>
+            <a:pPr>
+              <a:defRPr/>
+            </a:pPr>
+            <a:fld id="{4555A523-573C-62BF-42C6-F492195CE2FE}" type="slidenum">
+              <a:rPr/>
+              <a:t/>
+            </a:fld>
+            <a:endParaRPr/>
+          </a:p>
+        </p:txBody>
+      </p:sp>
+    </p:spTree>
+  </p:cSld>
+  <p:clrMapOvr>
+    <a:masterClrMapping/>
+  </p:clrMapOvr>
+</p:notes>
+</file>
+
+<file path=ppt/notesSlides/notesSlide2.xml><?xml version="1.0" encoding="utf-8"?>
+<p:notes xmlns:a="http://schemas.openxmlformats.org/drawingml/2006/main" xmlns:r="http://schemas.openxmlformats.org/officeDocument/2006/relationships" xmlns:p="http://schemas.openxmlformats.org/presentationml/2006/main" xmlns:m="http://schemas.openxmlformats.org/officeDocument/2006/math" xmlns:w="http://schemas.openxmlformats.org/wordprocessingml/2006/main">
+  <p:cSld name="">
+    <p:spTree>
+      <p:nvGrpSpPr>
+        <p:cNvPr id="1" name=""/>
+        <p:cNvGrpSpPr/>
+        <p:nvPr/>
+      </p:nvGrpSpPr>
+      <p:grpSpPr bwMode="auto">
+        <a:xfrm>
+          <a:off x="0" y="0"/>
+          <a:ext cx="0" cy="0"/>
+          <a:chOff x="0" y="0"/>
+          <a:chExt cx="0" cy="0"/>
+        </a:xfrm>
+      </p:grpSpPr>
+      <p:sp>
+        <p:nvSpPr>
+          <p:cNvPr id="2" name="Slide Image Placeholder 1"/>
+          <p:cNvSpPr>
+            <a:spLocks noChangeAspect="1" noGrp="1" noRot="1"/>
+          </p:cNvSpPr>
+          <p:nvPr>
+            <p:ph type="sldImg"/>
+          </p:nvPr>
+        </p:nvSpPr>
+        <p:spPr bwMode="auto"/>
+      </p:sp>
+      <p:sp>
+        <p:nvSpPr>
+          <p:cNvPr id="3" name="Notes Placeholder 2"/>
+          <p:cNvSpPr>
+            <a:spLocks noGrp="1"/>
+          </p:cNvSpPr>
+          <p:nvPr>
+            <p:ph type="body" idx="1"/>
+          </p:nvPr>
+        </p:nvSpPr>
+        <p:spPr bwMode="auto"/>
+        <p:txBody>
+          <a:bodyPr/>
+          <a:lstStyle/>
+          <a:p>
+            <a:pPr>
+              <a:defRPr/>
+            </a:pPr>
+            <a:endParaRPr/>
+          </a:p>
+        </p:txBody>
+      </p:sp>
+      <p:sp>
+        <p:nvSpPr>
+          <p:cNvPr id="4" name="Slide Number Placeholder 3"/>
+          <p:cNvSpPr>
+            <a:spLocks noGrp="1"/>
+          </p:cNvSpPr>
+          <p:nvPr>
+            <p:ph type="sldNum" sz="quarter" idx="10"/>
+          </p:nvPr>
+        </p:nvSpPr>
+        <p:spPr bwMode="auto"/>
+        <p:txBody>
+          <a:bodyPr/>
+          <a:lstStyle/>
+          <a:p>
+            <a:pPr>
+              <a:defRPr/>
+            </a:pPr>
+            <a:fld id="{7AFDD43E-5FC3-3B3B-72CD-2E76FB3929EF}" type="slidenum">
+              <a:rPr/>
+              <a:t/>
+            </a:fld>
+            <a:endParaRPr/>
+          </a:p>
+        </p:txBody>
+      </p:sp>
+    </p:spTree>
+  </p:cSld>
+  <p:clrMapOvr>
+    <a:masterClrMapping/>
+  </p:clrMapOvr>
+</p:notes>
+</file>
+
+<file path=ppt/notesSlides/notesSlide3.xml><?xml version="1.0" encoding="utf-8"?>
+<p:notes xmlns:a="http://schemas.openxmlformats.org/drawingml/2006/main" xmlns:r="http://schemas.openxmlformats.org/officeDocument/2006/relationships" xmlns:p="http://schemas.openxmlformats.org/presentationml/2006/main" xmlns:m="http://schemas.openxmlformats.org/officeDocument/2006/math" xmlns:w="http://schemas.openxmlformats.org/wordprocessingml/2006/main">
+  <p:cSld name="">
+    <p:spTree>
+      <p:nvGrpSpPr>
+        <p:cNvPr id="1" name=""/>
+        <p:cNvGrpSpPr/>
+        <p:nvPr/>
+      </p:nvGrpSpPr>
+      <p:grpSpPr bwMode="auto">
+        <a:xfrm>
+          <a:off x="0" y="0"/>
+          <a:ext cx="0" cy="0"/>
+          <a:chOff x="0" y="0"/>
+          <a:chExt cx="0" cy="0"/>
+        </a:xfrm>
+      </p:grpSpPr>
+      <p:sp>
+        <p:nvSpPr>
+          <p:cNvPr id="2" name="Slide Image Placeholder 1"/>
+          <p:cNvSpPr>
+            <a:spLocks noChangeAspect="1" noGrp="1" noRot="1"/>
+          </p:cNvSpPr>
+          <p:nvPr>
+            <p:ph type="sldImg"/>
+          </p:nvPr>
+        </p:nvSpPr>
+        <p:spPr bwMode="auto"/>
+      </p:sp>
+      <p:sp>
+        <p:nvSpPr>
+          <p:cNvPr id="3" name="Notes Placeholder 2"/>
+          <p:cNvSpPr>
+            <a:spLocks noGrp="1"/>
+          </p:cNvSpPr>
+          <p:nvPr>
+            <p:ph type="body" idx="1"/>
+          </p:nvPr>
+        </p:nvSpPr>
+        <p:spPr bwMode="auto"/>
+        <p:txBody>
+          <a:bodyPr/>
+          <a:lstStyle/>
+          <a:p>
+            <a:pPr>
+              <a:defRPr/>
+            </a:pPr>
+            <a:endParaRPr/>
+          </a:p>
+        </p:txBody>
+      </p:sp>
+      <p:sp>
+        <p:nvSpPr>
+          <p:cNvPr id="4" name="Slide Number Placeholder 3"/>
+          <p:cNvSpPr>
+            <a:spLocks noGrp="1"/>
+          </p:cNvSpPr>
+          <p:nvPr>
+            <p:ph type="sldNum" sz="quarter" idx="10"/>
+          </p:nvPr>
+        </p:nvSpPr>
+        <p:spPr bwMode="auto"/>
+        <p:txBody>
+          <a:bodyPr/>
+          <a:lstStyle/>
+          <a:p>
+            <a:pPr>
+              <a:defRPr/>
+            </a:pPr>
+            <a:fld id="{C22A8DED-398A-E57E-0DD1-C00D0C35F24C}" type="slidenum">
+              <a:rPr/>
+              <a:t/>
+            </a:fld>
+            <a:endParaRPr/>
+          </a:p>
+        </p:txBody>
+      </p:sp>
+    </p:spTree>
+  </p:cSld>
+  <p:clrMapOvr>
+    <a:masterClrMapping/>
+  </p:clrMapOvr>
+</p:notes>
+</file>
+
+<file path=ppt/notesSlides/notesSlide4.xml><?xml version="1.0" encoding="utf-8"?>
+<p:notes xmlns:a="http://schemas.openxmlformats.org/drawingml/2006/main" xmlns:r="http://schemas.openxmlformats.org/officeDocument/2006/relationships" xmlns:p="http://schemas.openxmlformats.org/presentationml/2006/main" xmlns:m="http://schemas.openxmlformats.org/officeDocument/2006/math" xmlns:w="http://schemas.openxmlformats.org/wordprocessingml/2006/main">
+  <p:cSld name="">
+    <p:spTree>
+      <p:nvGrpSpPr>
+        <p:cNvPr id="1" name=""/>
+        <p:cNvGrpSpPr/>
+        <p:nvPr/>
+      </p:nvGrpSpPr>
+      <p:grpSpPr bwMode="auto">
+        <a:xfrm>
+          <a:off x="0" y="0"/>
+          <a:ext cx="0" cy="0"/>
+          <a:chOff x="0" y="0"/>
+          <a:chExt cx="0" cy="0"/>
+        </a:xfrm>
+      </p:grpSpPr>
+      <p:sp>
+        <p:nvSpPr>
+          <p:cNvPr id="2" name="Slide Image Placeholder 1"/>
+          <p:cNvSpPr>
+            <a:spLocks noChangeAspect="1" noGrp="1" noRot="1"/>
+          </p:cNvSpPr>
+          <p:nvPr>
+            <p:ph type="sldImg"/>
+          </p:nvPr>
+        </p:nvSpPr>
+        <p:spPr bwMode="auto"/>
+      </p:sp>
+      <p:sp>
+        <p:nvSpPr>
+          <p:cNvPr id="3" name="Notes Placeholder 2"/>
+          <p:cNvSpPr>
+            <a:spLocks noGrp="1"/>
+          </p:cNvSpPr>
+          <p:nvPr>
+            <p:ph type="body" idx="1"/>
+          </p:nvPr>
+        </p:nvSpPr>
+        <p:spPr bwMode="auto"/>
+        <p:txBody>
+          <a:bodyPr/>
+          <a:lstStyle/>
+          <a:p>
+            <a:pPr>
+              <a:defRPr/>
+            </a:pPr>
+            <a:endParaRPr/>
+          </a:p>
+        </p:txBody>
+      </p:sp>
+      <p:sp>
+        <p:nvSpPr>
+          <p:cNvPr id="4" name="Slide Number Placeholder 3"/>
+          <p:cNvSpPr>
+            <a:spLocks noGrp="1"/>
+          </p:cNvSpPr>
+          <p:nvPr>
+            <p:ph type="sldNum" sz="quarter" idx="10"/>
+          </p:nvPr>
+        </p:nvSpPr>
+        <p:spPr bwMode="auto"/>
+        <p:txBody>
+          <a:bodyPr/>
+          <a:lstStyle/>
+          <a:p>
+            <a:pPr>
+              <a:defRPr/>
+            </a:pPr>
+            <a:fld id="{3F9210D6-52FF-2782-CD36-58B6DB3CE254}" type="slidenum">
+              <a:rPr/>
+              <a:t/>
+            </a:fld>
+            <a:endParaRPr/>
+          </a:p>
+        </p:txBody>
+      </p:sp>
+    </p:spTree>
+  </p:cSld>
+  <p:clrMapOvr>
+    <a:masterClrMapping/>
+  </p:clrMapOvr>
+</p:notes>
+</file>
+
+<file path=ppt/notesSlides/notesSlide5.xml><?xml version="1.0" encoding="utf-8"?>
+<p:notes xmlns:a="http://schemas.openxmlformats.org/drawingml/2006/main" xmlns:r="http://schemas.openxmlformats.org/officeDocument/2006/relationships" xmlns:p="http://schemas.openxmlformats.org/presentationml/2006/main" xmlns:m="http://schemas.openxmlformats.org/officeDocument/2006/math" xmlns:w="http://schemas.openxmlformats.org/wordprocessingml/2006/main">
+  <p:cSld name="">
+    <p:spTree>
+      <p:nvGrpSpPr>
+        <p:cNvPr id="1" name=""/>
+        <p:cNvGrpSpPr/>
+        <p:nvPr/>
+      </p:nvGrpSpPr>
+      <p:grpSpPr bwMode="auto">
+        <a:xfrm>
+          <a:off x="0" y="0"/>
+          <a:ext cx="0" cy="0"/>
+          <a:chOff x="0" y="0"/>
+          <a:chExt cx="0" cy="0"/>
+        </a:xfrm>
+      </p:grpSpPr>
+      <p:sp>
+        <p:nvSpPr>
+          <p:cNvPr id="2" name="Slide Image Placeholder 1"/>
+          <p:cNvSpPr>
+            <a:spLocks noChangeAspect="1" noGrp="1" noRot="1"/>
+          </p:cNvSpPr>
+          <p:nvPr>
+            <p:ph type="sldImg"/>
+          </p:nvPr>
+        </p:nvSpPr>
+        <p:spPr bwMode="auto"/>
+      </p:sp>
+      <p:sp>
+        <p:nvSpPr>
+          <p:cNvPr id="3" name="Notes Placeholder 2"/>
+          <p:cNvSpPr>
+            <a:spLocks noGrp="1"/>
+          </p:cNvSpPr>
+          <p:nvPr>
+            <p:ph type="body" idx="1"/>
+          </p:nvPr>
+        </p:nvSpPr>
+        <p:spPr bwMode="auto"/>
+        <p:txBody>
+          <a:bodyPr/>
+          <a:lstStyle/>
+          <a:p>
+            <a:pPr>
+              <a:defRPr/>
+            </a:pPr>
+            <a:endParaRPr/>
+          </a:p>
+        </p:txBody>
+      </p:sp>
+      <p:sp>
+        <p:nvSpPr>
+          <p:cNvPr id="4" name="Slide Number Placeholder 3"/>
+          <p:cNvSpPr>
+            <a:spLocks noGrp="1"/>
+          </p:cNvSpPr>
+          <p:nvPr>
+            <p:ph type="sldNum" sz="quarter" idx="10"/>
+          </p:nvPr>
+        </p:nvSpPr>
+        <p:spPr bwMode="auto"/>
+        <p:txBody>
+          <a:bodyPr/>
+          <a:lstStyle/>
+          <a:p>
+            <a:pPr>
+              <a:defRPr/>
+            </a:pPr>
+            <a:fld id="{C7DE6B3D-C06C-251C-9490-076566C0BB0D}" type="slidenum">
+              <a:rPr/>
+              <a:t/>
+            </a:fld>
+            <a:endParaRPr/>
+          </a:p>
+        </p:txBody>
+      </p:sp>
+    </p:spTree>
+  </p:cSld>
+  <p:clrMapOvr>
+    <a:masterClrMapping/>
+  </p:clrMapOvr>
+</p:notes>
+</file>
+
+<file path=ppt/notesSlides/notesSlide6.xml><?xml version="1.0" encoding="utf-8"?>
+<p:notes xmlns:a="http://schemas.openxmlformats.org/drawingml/2006/main" xmlns:r="http://schemas.openxmlformats.org/officeDocument/2006/relationships" xmlns:p="http://schemas.openxmlformats.org/presentationml/2006/main" xmlns:m="http://schemas.openxmlformats.org/officeDocument/2006/math" xmlns:w="http://schemas.openxmlformats.org/wordprocessingml/2006/main">
+  <p:cSld name="">
+    <p:spTree>
+      <p:nvGrpSpPr>
+        <p:cNvPr id="1" name=""/>
+        <p:cNvGrpSpPr/>
+        <p:nvPr/>
+      </p:nvGrpSpPr>
+      <p:grpSpPr bwMode="auto">
+        <a:xfrm>
+          <a:off x="0" y="0"/>
+          <a:ext cx="0" cy="0"/>
+          <a:chOff x="0" y="0"/>
+          <a:chExt cx="0" cy="0"/>
+        </a:xfrm>
+      </p:grpSpPr>
+      <p:sp>
+        <p:nvSpPr>
+          <p:cNvPr id="2" name="Slide Image Placeholder 1"/>
+          <p:cNvSpPr>
+            <a:spLocks noChangeAspect="1" noGrp="1" noRot="1"/>
+          </p:cNvSpPr>
+          <p:nvPr>
+            <p:ph type="sldImg"/>
+          </p:nvPr>
+        </p:nvSpPr>
+        <p:spPr bwMode="auto"/>
+      </p:sp>
+      <p:sp>
+        <p:nvSpPr>
+          <p:cNvPr id="3" name="Notes Placeholder 2"/>
+          <p:cNvSpPr>
+            <a:spLocks noGrp="1"/>
+          </p:cNvSpPr>
+          <p:nvPr>
+            <p:ph type="body" idx="1"/>
+          </p:nvPr>
+        </p:nvSpPr>
+        <p:spPr bwMode="auto"/>
+        <p:txBody>
+          <a:bodyPr/>
+          <a:lstStyle/>
+          <a:p>
+            <a:pPr>
+              <a:defRPr/>
+            </a:pPr>
+            <a:endParaRPr/>
+          </a:p>
+        </p:txBody>
+      </p:sp>
+      <p:sp>
+        <p:nvSpPr>
+          <p:cNvPr id="4" name="Slide Number Placeholder 3"/>
+          <p:cNvSpPr>
+            <a:spLocks noGrp="1"/>
+          </p:cNvSpPr>
+          <p:nvPr>
+            <p:ph type="sldNum" sz="quarter" idx="10"/>
+          </p:nvPr>
+        </p:nvSpPr>
+        <p:spPr bwMode="auto"/>
+        <p:txBody>
+          <a:bodyPr/>
+          <a:lstStyle/>
+          <a:p>
+            <a:pPr>
+              <a:defRPr/>
+            </a:pPr>
+            <a:fld id="{D1036E0A-2E4C-765D-39FD-A2213D82B86D}" type="slidenum">
+              <a:rPr/>
+              <a:t/>
+            </a:fld>
+            <a:endParaRPr/>
+          </a:p>
+        </p:txBody>
+      </p:sp>
+    </p:spTree>
+  </p:cSld>
+  <p:clrMapOvr>
+    <a:masterClrMapping/>
+  </p:clrMapOvr>
+</p:notes>
+</file>
+
 <file path=ppt/slideLayouts/slideLayout1.xml><?xml version="1.0" encoding="utf-8"?>
-<p:sldLayout xmlns:a="http://schemas.openxmlformats.org/drawingml/2006/main" xmlns:r="http://schemas.openxmlformats.org/officeDocument/2006/relationships" xmlns:p="http://schemas.openxmlformats.org/presentationml/2006/main" type="title" preserve="1">
+<p:sldLayout xmlns:a="http://schemas.openxmlformats.org/drawingml/2006/main" xmlns:r="http://schemas.openxmlformats.org/officeDocument/2006/relationships" xmlns:p="http://schemas.openxmlformats.org/presentationml/2006/main" xmlns:m="http://schemas.openxmlformats.org/officeDocument/2006/math" xmlns:w="http://schemas.openxmlformats.org/wordprocessingml/2006/main" matchingName="" preserve="1" showMasterPhAnim="0" showMasterSp="1" type="title" userDrawn="1">
   <p:cSld name="Title Slide">
     <p:spTree>
       <p:nvGrpSpPr>
@@ -121,7 +954,7 @@
         <p:cNvGrpSpPr/>
         <p:nvPr/>
       </p:nvGrpSpPr>
-      <p:grpSpPr>
+      <p:grpSpPr bwMode="auto">
         <a:xfrm>
           <a:off x="0" y="0"/>
           <a:ext cx="0" cy="0"/>
@@ -131,7 +964,7 @@
       </p:grpSpPr>
       <p:sp>
         <p:nvSpPr>
-          <p:cNvPr id="2" name="Title 1"/>
+          <p:cNvPr id="110230502" name="Title 1"/>
           <p:cNvSpPr>
             <a:spLocks noGrp="1"/>
           </p:cNvSpPr>
@@ -139,7 +972,7 @@
             <p:ph type="ctrTitle"/>
           </p:nvPr>
         </p:nvSpPr>
-        <p:spPr>
+        <p:spPr bwMode="auto">
           <a:xfrm>
             <a:off x="1524000" y="1122363"/>
             <a:ext cx="9144000" cy="2387600"/>
@@ -153,8 +986,11 @@
             </a:lvl1pPr>
           </a:lstStyle>
           <a:p>
-            <a:r>
-              <a:rPr lang="en-US" smtClean="0"/>
+            <a:pPr>
+              <a:defRPr/>
+            </a:pPr>
+            <a:r>
+              <a:rPr lang="en-US"/>
               <a:t>Click to edit Master title style</a:t>
             </a:r>
             <a:endParaRPr lang="en-US"/>
@@ -163,7 +999,7 @@
       </p:sp>
       <p:sp>
         <p:nvSpPr>
-          <p:cNvPr id="3" name="Subtitle 2"/>
+          <p:cNvPr id="2041135023" name="Subtitle 2"/>
           <p:cNvSpPr>
             <a:spLocks noGrp="1"/>
           </p:cNvSpPr>
@@ -171,7 +1007,7 @@
             <p:ph type="subTitle" idx="1"/>
           </p:nvPr>
         </p:nvSpPr>
-        <p:spPr>
+        <p:spPr bwMode="auto">
           <a:xfrm>
             <a:off x="1524000" y="3602038"/>
             <a:ext cx="9144000" cy="1655762"/>
@@ -218,8 +1054,11 @@
             </a:lvl9pPr>
           </a:lstStyle>
           <a:p>
-            <a:r>
-              <a:rPr lang="en-US" smtClean="0"/>
+            <a:pPr>
+              <a:defRPr/>
+            </a:pPr>
+            <a:r>
+              <a:rPr lang="en-US"/>
               <a:t>Click to edit Master subtitle style</a:t>
             </a:r>
             <a:endParaRPr lang="en-US"/>
@@ -228,7 +1067,7 @@
       </p:sp>
       <p:sp>
         <p:nvSpPr>
-          <p:cNvPr id="4" name="Date Placeholder 3"/>
+          <p:cNvPr id="1109795996" name="Date Placeholder 3"/>
           <p:cNvSpPr>
             <a:spLocks noGrp="1"/>
           </p:cNvSpPr>
@@ -236,13 +1075,16 @@
             <p:ph type="dt" sz="half" idx="10"/>
           </p:nvPr>
         </p:nvSpPr>
-        <p:spPr/>
-        <p:txBody>
-          <a:bodyPr/>
-          <a:lstStyle/>
-          <a:p>
+        <p:spPr bwMode="auto"/>
+        <p:txBody>
+          <a:bodyPr/>
+          <a:lstStyle/>
+          <a:p>
+            <a:pPr>
+              <a:defRPr/>
+            </a:pPr>
             <a:fld id="{C1A0CB4C-5559-475B-830B-093C2DBE2538}" type="datetimeFigureOut">
-              <a:rPr lang="en-US" smtClean="0"/>
+              <a:rPr lang="en-US"/>
               <a:t>1/15/2026</a:t>
             </a:fld>
             <a:endParaRPr lang="en-US"/>
@@ -251,7 +1093,7 @@
       </p:sp>
       <p:sp>
         <p:nvSpPr>
-          <p:cNvPr id="5" name="Footer Placeholder 4"/>
+          <p:cNvPr id="195314173" name="Footer Placeholder 4"/>
           <p:cNvSpPr>
             <a:spLocks noGrp="1"/>
           </p:cNvSpPr>
@@ -259,18 +1101,21 @@
             <p:ph type="ftr" sz="quarter" idx="11"/>
           </p:nvPr>
         </p:nvSpPr>
-        <p:spPr/>
-        <p:txBody>
-          <a:bodyPr/>
-          <a:lstStyle/>
-          <a:p>
-            <a:endParaRPr lang="en-US"/>
-          </a:p>
-        </p:txBody>
-      </p:sp>
-      <p:sp>
-        <p:nvSpPr>
-          <p:cNvPr id="6" name="Slide Number Placeholder 5"/>
+        <p:spPr bwMode="auto"/>
+        <p:txBody>
+          <a:bodyPr/>
+          <a:lstStyle/>
+          <a:p>
+            <a:pPr>
+              <a:defRPr/>
+            </a:pPr>
+            <a:endParaRPr lang="en-US"/>
+          </a:p>
+        </p:txBody>
+      </p:sp>
+      <p:sp>
+        <p:nvSpPr>
+          <p:cNvPr id="1543265170" name="Slide Number Placeholder 5"/>
           <p:cNvSpPr>
             <a:spLocks noGrp="1"/>
           </p:cNvSpPr>
@@ -278,13 +1123,16 @@
             <p:ph type="sldNum" sz="quarter" idx="12"/>
           </p:nvPr>
         </p:nvSpPr>
-        <p:spPr/>
-        <p:txBody>
-          <a:bodyPr/>
-          <a:lstStyle/>
-          <a:p>
+        <p:spPr bwMode="auto"/>
+        <p:txBody>
+          <a:bodyPr/>
+          <a:lstStyle/>
+          <a:p>
+            <a:pPr>
+              <a:defRPr/>
+            </a:pPr>
             <a:fld id="{16EEFF7F-0A2A-489A-9962-FBDAE4758270}" type="slidenum">
-              <a:rPr lang="en-US" smtClean="0"/>
+              <a:rPr lang="en-US"/>
               <a:t>‹#›</a:t>
             </a:fld>
             <a:endParaRPr lang="en-US"/>
@@ -292,11 +1140,6 @@
         </p:txBody>
       </p:sp>
     </p:spTree>
-    <p:extLst>
-      <p:ext uri="{BB962C8B-B14F-4D97-AF65-F5344CB8AC3E}">
-        <p14:creationId xmlns:p14="http://schemas.microsoft.com/office/powerpoint/2010/main" val="4154414118"/>
-      </p:ext>
-    </p:extLst>
   </p:cSld>
   <p:clrMapOvr>
     <a:masterClrMapping/>
@@ -305,7 +1148,7 @@
 </file>
 
 <file path=ppt/slideLayouts/slideLayout10.xml><?xml version="1.0" encoding="utf-8"?>
-<p:sldLayout xmlns:a="http://schemas.openxmlformats.org/drawingml/2006/main" xmlns:r="http://schemas.openxmlformats.org/officeDocument/2006/relationships" xmlns:p="http://schemas.openxmlformats.org/presentationml/2006/main" type="vertTx" preserve="1">
+<p:sldLayout xmlns:a="http://schemas.openxmlformats.org/drawingml/2006/main" xmlns:r="http://schemas.openxmlformats.org/officeDocument/2006/relationships" xmlns:p="http://schemas.openxmlformats.org/presentationml/2006/main" xmlns:m="http://schemas.openxmlformats.org/officeDocument/2006/math" xmlns:w="http://schemas.openxmlformats.org/wordprocessingml/2006/main" matchingName="" preserve="1" showMasterPhAnim="0" showMasterSp="1" type="vertTx" userDrawn="1">
   <p:cSld name="Title and Vertical Text">
     <p:spTree>
       <p:nvGrpSpPr>
@@ -313,7 +1156,7 @@
         <p:cNvGrpSpPr/>
         <p:nvPr/>
       </p:nvGrpSpPr>
-      <p:grpSpPr>
+      <p:grpSpPr bwMode="auto">
         <a:xfrm>
           <a:off x="0" y="0"/>
           <a:ext cx="0" cy="0"/>
@@ -323,7 +1166,7 @@
       </p:grpSpPr>
       <p:sp>
         <p:nvSpPr>
-          <p:cNvPr id="2" name="Title 1"/>
+          <p:cNvPr id="2147325496" name="Title 1"/>
           <p:cNvSpPr>
             <a:spLocks noGrp="1"/>
           </p:cNvSpPr>
@@ -331,13 +1174,16 @@
             <p:ph type="title"/>
           </p:nvPr>
         </p:nvSpPr>
-        <p:spPr/>
-        <p:txBody>
-          <a:bodyPr/>
-          <a:lstStyle/>
-          <a:p>
-            <a:r>
-              <a:rPr lang="en-US" smtClean="0"/>
+        <p:spPr bwMode="auto"/>
+        <p:txBody>
+          <a:bodyPr/>
+          <a:lstStyle/>
+          <a:p>
+            <a:pPr>
+              <a:defRPr/>
+            </a:pPr>
+            <a:r>
+              <a:rPr lang="en-US"/>
               <a:t>Click to edit Master title style</a:t>
             </a:r>
             <a:endParaRPr lang="en-US"/>
@@ -346,7 +1192,7 @@
       </p:sp>
       <p:sp>
         <p:nvSpPr>
-          <p:cNvPr id="3" name="Vertical Text Placeholder 2"/>
+          <p:cNvPr id="1830417746" name="Vertical Text Placeholder 2"/>
           <p:cNvSpPr>
             <a:spLocks noGrp="1"/>
           </p:cNvSpPr>
@@ -354,42 +1200,56 @@
             <p:ph type="body" orient="vert" idx="1"/>
           </p:nvPr>
         </p:nvSpPr>
-        <p:spPr/>
+        <p:spPr bwMode="auto"/>
         <p:txBody>
           <a:bodyPr vert="eaVert"/>
           <a:lstStyle/>
           <a:p>
-            <a:pPr lvl="0"/>
-            <a:r>
-              <a:rPr lang="en-US" smtClean="0"/>
+            <a:pPr lvl="0">
+              <a:defRPr/>
+            </a:pPr>
+            <a:r>
+              <a:rPr lang="en-US"/>
               <a:t>Edit Master text styles</a:t>
             </a:r>
-          </a:p>
-          <a:p>
-            <a:pPr lvl="1"/>
-            <a:r>
-              <a:rPr lang="en-US" smtClean="0"/>
+            <a:endParaRPr/>
+          </a:p>
+          <a:p>
+            <a:pPr lvl="1">
+              <a:defRPr/>
+            </a:pPr>
+            <a:r>
+              <a:rPr lang="en-US"/>
               <a:t>Second level</a:t>
             </a:r>
-          </a:p>
-          <a:p>
-            <a:pPr lvl="2"/>
-            <a:r>
-              <a:rPr lang="en-US" smtClean="0"/>
+            <a:endParaRPr/>
+          </a:p>
+          <a:p>
+            <a:pPr lvl="2">
+              <a:defRPr/>
+            </a:pPr>
+            <a:r>
+              <a:rPr lang="en-US"/>
               <a:t>Third level</a:t>
             </a:r>
-          </a:p>
-          <a:p>
-            <a:pPr lvl="3"/>
-            <a:r>
-              <a:rPr lang="en-US" smtClean="0"/>
+            <a:endParaRPr/>
+          </a:p>
+          <a:p>
+            <a:pPr lvl="3">
+              <a:defRPr/>
+            </a:pPr>
+            <a:r>
+              <a:rPr lang="en-US"/>
               <a:t>Fourth level</a:t>
             </a:r>
-          </a:p>
-          <a:p>
-            <a:pPr lvl="4"/>
-            <a:r>
-              <a:rPr lang="en-US" smtClean="0"/>
+            <a:endParaRPr/>
+          </a:p>
+          <a:p>
+            <a:pPr lvl="4">
+              <a:defRPr/>
+            </a:pPr>
+            <a:r>
+              <a:rPr lang="en-US"/>
               <a:t>Fifth level</a:t>
             </a:r>
             <a:endParaRPr lang="en-US"/>
@@ -398,7 +1258,7 @@
       </p:sp>
       <p:sp>
         <p:nvSpPr>
-          <p:cNvPr id="4" name="Date Placeholder 3"/>
+          <p:cNvPr id="1521387295" name="Date Placeholder 3"/>
           <p:cNvSpPr>
             <a:spLocks noGrp="1"/>
           </p:cNvSpPr>
@@ -406,13 +1266,16 @@
             <p:ph type="dt" sz="half" idx="10"/>
           </p:nvPr>
         </p:nvSpPr>
-        <p:spPr/>
-        <p:txBody>
-          <a:bodyPr/>
-          <a:lstStyle/>
-          <a:p>
+        <p:spPr bwMode="auto"/>
+        <p:txBody>
+          <a:bodyPr/>
+          <a:lstStyle/>
+          <a:p>
+            <a:pPr>
+              <a:defRPr/>
+            </a:pPr>
             <a:fld id="{C1A0CB4C-5559-475B-830B-093C2DBE2538}" type="datetimeFigureOut">
-              <a:rPr lang="en-US" smtClean="0"/>
+              <a:rPr lang="en-US"/>
               <a:t>1/15/2026</a:t>
             </a:fld>
             <a:endParaRPr lang="en-US"/>
@@ -421,7 +1284,7 @@
       </p:sp>
       <p:sp>
         <p:nvSpPr>
-          <p:cNvPr id="5" name="Footer Placeholder 4"/>
+          <p:cNvPr id="436014301" name="Footer Placeholder 4"/>
           <p:cNvSpPr>
             <a:spLocks noGrp="1"/>
           </p:cNvSpPr>
@@ -429,18 +1292,21 @@
             <p:ph type="ftr" sz="quarter" idx="11"/>
           </p:nvPr>
         </p:nvSpPr>
-        <p:spPr/>
-        <p:txBody>
-          <a:bodyPr/>
-          <a:lstStyle/>
-          <a:p>
-            <a:endParaRPr lang="en-US"/>
-          </a:p>
-        </p:txBody>
-      </p:sp>
-      <p:sp>
-        <p:nvSpPr>
-          <p:cNvPr id="6" name="Slide Number Placeholder 5"/>
+        <p:spPr bwMode="auto"/>
+        <p:txBody>
+          <a:bodyPr/>
+          <a:lstStyle/>
+          <a:p>
+            <a:pPr>
+              <a:defRPr/>
+            </a:pPr>
+            <a:endParaRPr lang="en-US"/>
+          </a:p>
+        </p:txBody>
+      </p:sp>
+      <p:sp>
+        <p:nvSpPr>
+          <p:cNvPr id="845193564" name="Slide Number Placeholder 5"/>
           <p:cNvSpPr>
             <a:spLocks noGrp="1"/>
           </p:cNvSpPr>
@@ -448,13 +1314,16 @@
             <p:ph type="sldNum" sz="quarter" idx="12"/>
           </p:nvPr>
         </p:nvSpPr>
-        <p:spPr/>
-        <p:txBody>
-          <a:bodyPr/>
-          <a:lstStyle/>
-          <a:p>
+        <p:spPr bwMode="auto"/>
+        <p:txBody>
+          <a:bodyPr/>
+          <a:lstStyle/>
+          <a:p>
+            <a:pPr>
+              <a:defRPr/>
+            </a:pPr>
             <a:fld id="{16EEFF7F-0A2A-489A-9962-FBDAE4758270}" type="slidenum">
-              <a:rPr lang="en-US" smtClean="0"/>
+              <a:rPr lang="en-US"/>
               <a:t>‹#›</a:t>
             </a:fld>
             <a:endParaRPr lang="en-US"/>
@@ -462,11 +1331,6 @@
         </p:txBody>
       </p:sp>
     </p:spTree>
-    <p:extLst>
-      <p:ext uri="{BB962C8B-B14F-4D97-AF65-F5344CB8AC3E}">
-        <p14:creationId xmlns:p14="http://schemas.microsoft.com/office/powerpoint/2010/main" val="1363024307"/>
-      </p:ext>
-    </p:extLst>
   </p:cSld>
   <p:clrMapOvr>
     <a:masterClrMapping/>
@@ -475,7 +1339,7 @@
 </file>
 
 <file path=ppt/slideLayouts/slideLayout11.xml><?xml version="1.0" encoding="utf-8"?>
-<p:sldLayout xmlns:a="http://schemas.openxmlformats.org/drawingml/2006/main" xmlns:r="http://schemas.openxmlformats.org/officeDocument/2006/relationships" xmlns:p="http://schemas.openxmlformats.org/presentationml/2006/main" type="vertTitleAndTx" preserve="1">
+<p:sldLayout xmlns:a="http://schemas.openxmlformats.org/drawingml/2006/main" xmlns:r="http://schemas.openxmlformats.org/officeDocument/2006/relationships" xmlns:p="http://schemas.openxmlformats.org/presentationml/2006/main" xmlns:m="http://schemas.openxmlformats.org/officeDocument/2006/math" xmlns:w="http://schemas.openxmlformats.org/wordprocessingml/2006/main" matchingName="" preserve="1" showMasterPhAnim="0" showMasterSp="1" type="vertTitleAndTx" userDrawn="1">
   <p:cSld name="Vertical Title and Text">
     <p:spTree>
       <p:nvGrpSpPr>
@@ -483,7 +1347,7 @@
         <p:cNvGrpSpPr/>
         <p:nvPr/>
       </p:nvGrpSpPr>
-      <p:grpSpPr>
+      <p:grpSpPr bwMode="auto">
         <a:xfrm>
           <a:off x="0" y="0"/>
           <a:ext cx="0" cy="0"/>
@@ -493,7 +1357,7 @@
       </p:grpSpPr>
       <p:sp>
         <p:nvSpPr>
-          <p:cNvPr id="2" name="Vertical Title 1"/>
+          <p:cNvPr id="1267658687" name="Vertical Title 1"/>
           <p:cNvSpPr>
             <a:spLocks noGrp="1"/>
           </p:cNvSpPr>
@@ -501,7 +1365,7 @@
             <p:ph type="title" orient="vert"/>
           </p:nvPr>
         </p:nvSpPr>
-        <p:spPr>
+        <p:spPr bwMode="auto">
           <a:xfrm>
             <a:off x="8724900" y="365125"/>
             <a:ext cx="2628900" cy="5811838"/>
@@ -511,8 +1375,11 @@
           <a:bodyPr vert="eaVert"/>
           <a:lstStyle/>
           <a:p>
-            <a:r>
-              <a:rPr lang="en-US" smtClean="0"/>
+            <a:pPr>
+              <a:defRPr/>
+            </a:pPr>
+            <a:r>
+              <a:rPr lang="en-US"/>
               <a:t>Click to edit Master title style</a:t>
             </a:r>
             <a:endParaRPr lang="en-US"/>
@@ -521,7 +1388,7 @@
       </p:sp>
       <p:sp>
         <p:nvSpPr>
-          <p:cNvPr id="3" name="Vertical Text Placeholder 2"/>
+          <p:cNvPr id="1150727392" name="Vertical Text Placeholder 2"/>
           <p:cNvSpPr>
             <a:spLocks noGrp="1"/>
           </p:cNvSpPr>
@@ -529,7 +1396,7 @@
             <p:ph type="body" orient="vert" idx="1"/>
           </p:nvPr>
         </p:nvSpPr>
-        <p:spPr>
+        <p:spPr bwMode="auto">
           <a:xfrm>
             <a:off x="838200" y="365125"/>
             <a:ext cx="7734300" cy="5811838"/>
@@ -539,37 +1406,51 @@
           <a:bodyPr vert="eaVert"/>
           <a:lstStyle/>
           <a:p>
-            <a:pPr lvl="0"/>
-            <a:r>
-              <a:rPr lang="en-US" smtClean="0"/>
+            <a:pPr lvl="0">
+              <a:defRPr/>
+            </a:pPr>
+            <a:r>
+              <a:rPr lang="en-US"/>
               <a:t>Edit Master text styles</a:t>
             </a:r>
-          </a:p>
-          <a:p>
-            <a:pPr lvl="1"/>
-            <a:r>
-              <a:rPr lang="en-US" smtClean="0"/>
+            <a:endParaRPr/>
+          </a:p>
+          <a:p>
+            <a:pPr lvl="1">
+              <a:defRPr/>
+            </a:pPr>
+            <a:r>
+              <a:rPr lang="en-US"/>
               <a:t>Second level</a:t>
             </a:r>
-          </a:p>
-          <a:p>
-            <a:pPr lvl="2"/>
-            <a:r>
-              <a:rPr lang="en-US" smtClean="0"/>
+            <a:endParaRPr/>
+          </a:p>
+          <a:p>
+            <a:pPr lvl="2">
+              <a:defRPr/>
+            </a:pPr>
+            <a:r>
+              <a:rPr lang="en-US"/>
               <a:t>Third level</a:t>
             </a:r>
-          </a:p>
-          <a:p>
-            <a:pPr lvl="3"/>
-            <a:r>
-              <a:rPr lang="en-US" smtClean="0"/>
+            <a:endParaRPr/>
+          </a:p>
+          <a:p>
+            <a:pPr lvl="3">
+              <a:defRPr/>
+            </a:pPr>
+            <a:r>
+              <a:rPr lang="en-US"/>
               <a:t>Fourth level</a:t>
             </a:r>
-          </a:p>
-          <a:p>
-            <a:pPr lvl="4"/>
-            <a:r>
-              <a:rPr lang="en-US" smtClean="0"/>
+            <a:endParaRPr/>
+          </a:p>
+          <a:p>
+            <a:pPr lvl="4">
+              <a:defRPr/>
+            </a:pPr>
+            <a:r>
+              <a:rPr lang="en-US"/>
               <a:t>Fifth level</a:t>
             </a:r>
             <a:endParaRPr lang="en-US"/>
@@ -578,7 +1459,7 @@
       </p:sp>
       <p:sp>
         <p:nvSpPr>
-          <p:cNvPr id="4" name="Date Placeholder 3"/>
+          <p:cNvPr id="713052372" name="Date Placeholder 3"/>
           <p:cNvSpPr>
             <a:spLocks noGrp="1"/>
           </p:cNvSpPr>
@@ -586,13 +1467,16 @@
             <p:ph type="dt" sz="half" idx="10"/>
           </p:nvPr>
         </p:nvSpPr>
-        <p:spPr/>
-        <p:txBody>
-          <a:bodyPr/>
-          <a:lstStyle/>
-          <a:p>
+        <p:spPr bwMode="auto"/>
+        <p:txBody>
+          <a:bodyPr/>
+          <a:lstStyle/>
+          <a:p>
+            <a:pPr>
+              <a:defRPr/>
+            </a:pPr>
             <a:fld id="{C1A0CB4C-5559-475B-830B-093C2DBE2538}" type="datetimeFigureOut">
-              <a:rPr lang="en-US" smtClean="0"/>
+              <a:rPr lang="en-US"/>
               <a:t>1/15/2026</a:t>
             </a:fld>
             <a:endParaRPr lang="en-US"/>
@@ -601,7 +1485,7 @@
       </p:sp>
       <p:sp>
         <p:nvSpPr>
-          <p:cNvPr id="5" name="Footer Placeholder 4"/>
+          <p:cNvPr id="665220203" name="Footer Placeholder 4"/>
           <p:cNvSpPr>
             <a:spLocks noGrp="1"/>
           </p:cNvSpPr>
@@ -609,18 +1493,21 @@
             <p:ph type="ftr" sz="quarter" idx="11"/>
           </p:nvPr>
         </p:nvSpPr>
-        <p:spPr/>
-        <p:txBody>
-          <a:bodyPr/>
-          <a:lstStyle/>
-          <a:p>
-            <a:endParaRPr lang="en-US"/>
-          </a:p>
-        </p:txBody>
-      </p:sp>
-      <p:sp>
-        <p:nvSpPr>
-          <p:cNvPr id="6" name="Slide Number Placeholder 5"/>
+        <p:spPr bwMode="auto"/>
+        <p:txBody>
+          <a:bodyPr/>
+          <a:lstStyle/>
+          <a:p>
+            <a:pPr>
+              <a:defRPr/>
+            </a:pPr>
+            <a:endParaRPr lang="en-US"/>
+          </a:p>
+        </p:txBody>
+      </p:sp>
+      <p:sp>
+        <p:nvSpPr>
+          <p:cNvPr id="1409785126" name="Slide Number Placeholder 5"/>
           <p:cNvSpPr>
             <a:spLocks noGrp="1"/>
           </p:cNvSpPr>
@@ -628,13 +1515,16 @@
             <p:ph type="sldNum" sz="quarter" idx="12"/>
           </p:nvPr>
         </p:nvSpPr>
-        <p:spPr/>
-        <p:txBody>
-          <a:bodyPr/>
-          <a:lstStyle/>
-          <a:p>
+        <p:spPr bwMode="auto"/>
+        <p:txBody>
+          <a:bodyPr/>
+          <a:lstStyle/>
+          <a:p>
+            <a:pPr>
+              <a:defRPr/>
+            </a:pPr>
             <a:fld id="{16EEFF7F-0A2A-489A-9962-FBDAE4758270}" type="slidenum">
-              <a:rPr lang="en-US" smtClean="0"/>
+              <a:rPr lang="en-US"/>
               <a:t>‹#›</a:t>
             </a:fld>
             <a:endParaRPr lang="en-US"/>
@@ -642,11 +1532,6 @@
         </p:txBody>
       </p:sp>
     </p:spTree>
-    <p:extLst>
-      <p:ext uri="{BB962C8B-B14F-4D97-AF65-F5344CB8AC3E}">
-        <p14:creationId xmlns:p14="http://schemas.microsoft.com/office/powerpoint/2010/main" val="1536227044"/>
-      </p:ext>
-    </p:extLst>
   </p:cSld>
   <p:clrMapOvr>
     <a:masterClrMapping/>
@@ -655,7 +1540,7 @@
 </file>
 
 <file path=ppt/slideLayouts/slideLayout2.xml><?xml version="1.0" encoding="utf-8"?>
-<p:sldLayout xmlns:a="http://schemas.openxmlformats.org/drawingml/2006/main" xmlns:r="http://schemas.openxmlformats.org/officeDocument/2006/relationships" xmlns:p="http://schemas.openxmlformats.org/presentationml/2006/main" type="obj" preserve="1">
+<p:sldLayout xmlns:a="http://schemas.openxmlformats.org/drawingml/2006/main" xmlns:r="http://schemas.openxmlformats.org/officeDocument/2006/relationships" xmlns:p="http://schemas.openxmlformats.org/presentationml/2006/main" xmlns:m="http://schemas.openxmlformats.org/officeDocument/2006/math" xmlns:w="http://schemas.openxmlformats.org/wordprocessingml/2006/main" matchingName="" preserve="1" showMasterPhAnim="0" showMasterSp="1" type="obj" userDrawn="1">
   <p:cSld name="Title and Content">
     <p:spTree>
       <p:nvGrpSpPr>
@@ -663,7 +1548,7 @@
         <p:cNvGrpSpPr/>
         <p:nvPr/>
       </p:nvGrpSpPr>
-      <p:grpSpPr>
+      <p:grpSpPr bwMode="auto">
         <a:xfrm>
           <a:off x="0" y="0"/>
           <a:ext cx="0" cy="0"/>
@@ -673,7 +1558,7 @@
       </p:grpSpPr>
       <p:sp>
         <p:nvSpPr>
-          <p:cNvPr id="2" name="Title 1"/>
+          <p:cNvPr id="943481690" name="Title 1"/>
           <p:cNvSpPr>
             <a:spLocks noGrp="1"/>
           </p:cNvSpPr>
@@ -681,13 +1566,16 @@
             <p:ph type="title"/>
           </p:nvPr>
         </p:nvSpPr>
-        <p:spPr/>
-        <p:txBody>
-          <a:bodyPr/>
-          <a:lstStyle/>
-          <a:p>
-            <a:r>
-              <a:rPr lang="en-US" smtClean="0"/>
+        <p:spPr bwMode="auto"/>
+        <p:txBody>
+          <a:bodyPr/>
+          <a:lstStyle/>
+          <a:p>
+            <a:pPr>
+              <a:defRPr/>
+            </a:pPr>
+            <a:r>
+              <a:rPr lang="en-US"/>
               <a:t>Click to edit Master title style</a:t>
             </a:r>
             <a:endParaRPr lang="en-US"/>
@@ -696,7 +1584,7 @@
       </p:sp>
       <p:sp>
         <p:nvSpPr>
-          <p:cNvPr id="3" name="Content Placeholder 2"/>
+          <p:cNvPr id="691046671" name="Content Placeholder 2"/>
           <p:cNvSpPr>
             <a:spLocks noGrp="1"/>
           </p:cNvSpPr>
@@ -704,42 +1592,56 @@
             <p:ph idx="1"/>
           </p:nvPr>
         </p:nvSpPr>
-        <p:spPr/>
-        <p:txBody>
-          <a:bodyPr/>
-          <a:lstStyle/>
-          <a:p>
-            <a:pPr lvl="0"/>
-            <a:r>
-              <a:rPr lang="en-US" smtClean="0"/>
+        <p:spPr bwMode="auto"/>
+        <p:txBody>
+          <a:bodyPr/>
+          <a:lstStyle/>
+          <a:p>
+            <a:pPr lvl="0">
+              <a:defRPr/>
+            </a:pPr>
+            <a:r>
+              <a:rPr lang="en-US"/>
               <a:t>Edit Master text styles</a:t>
             </a:r>
-          </a:p>
-          <a:p>
-            <a:pPr lvl="1"/>
-            <a:r>
-              <a:rPr lang="en-US" smtClean="0"/>
+            <a:endParaRPr/>
+          </a:p>
+          <a:p>
+            <a:pPr lvl="1">
+              <a:defRPr/>
+            </a:pPr>
+            <a:r>
+              <a:rPr lang="en-US"/>
               <a:t>Second level</a:t>
             </a:r>
-          </a:p>
-          <a:p>
-            <a:pPr lvl="2"/>
-            <a:r>
-              <a:rPr lang="en-US" smtClean="0"/>
+            <a:endParaRPr/>
+          </a:p>
+          <a:p>
+            <a:pPr lvl="2">
+              <a:defRPr/>
+            </a:pPr>
+            <a:r>
+              <a:rPr lang="en-US"/>
               <a:t>Third level</a:t>
             </a:r>
-          </a:p>
-          <a:p>
-            <a:pPr lvl="3"/>
-            <a:r>
-              <a:rPr lang="en-US" smtClean="0"/>
+            <a:endParaRPr/>
+          </a:p>
+          <a:p>
+            <a:pPr lvl="3">
+              <a:defRPr/>
+            </a:pPr>
+            <a:r>
+              <a:rPr lang="en-US"/>
               <a:t>Fourth level</a:t>
             </a:r>
-          </a:p>
-          <a:p>
-            <a:pPr lvl="4"/>
-            <a:r>
-              <a:rPr lang="en-US" smtClean="0"/>
+            <a:endParaRPr/>
+          </a:p>
+          <a:p>
+            <a:pPr lvl="4">
+              <a:defRPr/>
+            </a:pPr>
+            <a:r>
+              <a:rPr lang="en-US"/>
               <a:t>Fifth level</a:t>
             </a:r>
             <a:endParaRPr lang="en-US"/>
@@ -748,7 +1650,7 @@
       </p:sp>
       <p:sp>
         <p:nvSpPr>
-          <p:cNvPr id="4" name="Date Placeholder 3"/>
+          <p:cNvPr id="1919960827" name="Date Placeholder 3"/>
           <p:cNvSpPr>
             <a:spLocks noGrp="1"/>
           </p:cNvSpPr>
@@ -756,13 +1658,16 @@
             <p:ph type="dt" sz="half" idx="10"/>
           </p:nvPr>
         </p:nvSpPr>
-        <p:spPr/>
-        <p:txBody>
-          <a:bodyPr/>
-          <a:lstStyle/>
-          <a:p>
+        <p:spPr bwMode="auto"/>
+        <p:txBody>
+          <a:bodyPr/>
+          <a:lstStyle/>
+          <a:p>
+            <a:pPr>
+              <a:defRPr/>
+            </a:pPr>
             <a:fld id="{C1A0CB4C-5559-475B-830B-093C2DBE2538}" type="datetimeFigureOut">
-              <a:rPr lang="en-US" smtClean="0"/>
+              <a:rPr lang="en-US"/>
               <a:t>1/15/2026</a:t>
             </a:fld>
             <a:endParaRPr lang="en-US"/>
@@ -771,7 +1676,7 @@
       </p:sp>
       <p:sp>
         <p:nvSpPr>
-          <p:cNvPr id="5" name="Footer Placeholder 4"/>
+          <p:cNvPr id="2036752570" name="Footer Placeholder 4"/>
           <p:cNvSpPr>
             <a:spLocks noGrp="1"/>
           </p:cNvSpPr>
@@ -779,18 +1684,21 @@
             <p:ph type="ftr" sz="quarter" idx="11"/>
           </p:nvPr>
         </p:nvSpPr>
-        <p:spPr/>
-        <p:txBody>
-          <a:bodyPr/>
-          <a:lstStyle/>
-          <a:p>
-            <a:endParaRPr lang="en-US"/>
-          </a:p>
-        </p:txBody>
-      </p:sp>
-      <p:sp>
-        <p:nvSpPr>
-          <p:cNvPr id="6" name="Slide Number Placeholder 5"/>
+        <p:spPr bwMode="auto"/>
+        <p:txBody>
+          <a:bodyPr/>
+          <a:lstStyle/>
+          <a:p>
+            <a:pPr>
+              <a:defRPr/>
+            </a:pPr>
+            <a:endParaRPr lang="en-US"/>
+          </a:p>
+        </p:txBody>
+      </p:sp>
+      <p:sp>
+        <p:nvSpPr>
+          <p:cNvPr id="1123292778" name="Slide Number Placeholder 5"/>
           <p:cNvSpPr>
             <a:spLocks noGrp="1"/>
           </p:cNvSpPr>
@@ -798,13 +1706,16 @@
             <p:ph type="sldNum" sz="quarter" idx="12"/>
           </p:nvPr>
         </p:nvSpPr>
-        <p:spPr/>
-        <p:txBody>
-          <a:bodyPr/>
-          <a:lstStyle/>
-          <a:p>
+        <p:spPr bwMode="auto"/>
+        <p:txBody>
+          <a:bodyPr/>
+          <a:lstStyle/>
+          <a:p>
+            <a:pPr>
+              <a:defRPr/>
+            </a:pPr>
             <a:fld id="{16EEFF7F-0A2A-489A-9962-FBDAE4758270}" type="slidenum">
-              <a:rPr lang="en-US" smtClean="0"/>
+              <a:rPr lang="en-US"/>
               <a:t>‹#›</a:t>
             </a:fld>
             <a:endParaRPr lang="en-US"/>
@@ -812,11 +1723,6 @@
         </p:txBody>
       </p:sp>
     </p:spTree>
-    <p:extLst>
-      <p:ext uri="{BB962C8B-B14F-4D97-AF65-F5344CB8AC3E}">
-        <p14:creationId xmlns:p14="http://schemas.microsoft.com/office/powerpoint/2010/main" val="3783744625"/>
-      </p:ext>
-    </p:extLst>
   </p:cSld>
   <p:clrMapOvr>
     <a:masterClrMapping/>
@@ -825,7 +1731,7 @@
 </file>
 
 <file path=ppt/slideLayouts/slideLayout3.xml><?xml version="1.0" encoding="utf-8"?>
-<p:sldLayout xmlns:a="http://schemas.openxmlformats.org/drawingml/2006/main" xmlns:r="http://schemas.openxmlformats.org/officeDocument/2006/relationships" xmlns:p="http://schemas.openxmlformats.org/presentationml/2006/main" type="secHead" preserve="1">
+<p:sldLayout xmlns:a="http://schemas.openxmlformats.org/drawingml/2006/main" xmlns:r="http://schemas.openxmlformats.org/officeDocument/2006/relationships" xmlns:p="http://schemas.openxmlformats.org/presentationml/2006/main" xmlns:m="http://schemas.openxmlformats.org/officeDocument/2006/math" xmlns:w="http://schemas.openxmlformats.org/wordprocessingml/2006/main" matchingName="" preserve="1" showMasterPhAnim="0" showMasterSp="1" type="secHead" userDrawn="1">
   <p:cSld name="Section Header">
     <p:spTree>
       <p:nvGrpSpPr>
@@ -833,7 +1739,7 @@
         <p:cNvGrpSpPr/>
         <p:nvPr/>
       </p:nvGrpSpPr>
-      <p:grpSpPr>
+      <p:grpSpPr bwMode="auto">
         <a:xfrm>
           <a:off x="0" y="0"/>
           <a:ext cx="0" cy="0"/>
@@ -843,7 +1749,7 @@
       </p:grpSpPr>
       <p:sp>
         <p:nvSpPr>
-          <p:cNvPr id="2" name="Title 1"/>
+          <p:cNvPr id="1710367229" name="Title 1"/>
           <p:cNvSpPr>
             <a:spLocks noGrp="1"/>
           </p:cNvSpPr>
@@ -851,7 +1757,7 @@
             <p:ph type="title"/>
           </p:nvPr>
         </p:nvSpPr>
-        <p:spPr>
+        <p:spPr bwMode="auto">
           <a:xfrm>
             <a:off x="831850" y="1709738"/>
             <a:ext cx="10515600" cy="2852737"/>
@@ -865,8 +1771,11 @@
             </a:lvl1pPr>
           </a:lstStyle>
           <a:p>
-            <a:r>
-              <a:rPr lang="en-US" smtClean="0"/>
+            <a:pPr>
+              <a:defRPr/>
+            </a:pPr>
+            <a:r>
+              <a:rPr lang="en-US"/>
               <a:t>Click to edit Master title style</a:t>
             </a:r>
             <a:endParaRPr lang="en-US"/>
@@ -875,7 +1784,7 @@
       </p:sp>
       <p:sp>
         <p:nvSpPr>
-          <p:cNvPr id="3" name="Text Placeholder 2"/>
+          <p:cNvPr id="1232632937" name="Text Placeholder 2"/>
           <p:cNvSpPr>
             <a:spLocks noGrp="1"/>
           </p:cNvSpPr>
@@ -883,7 +1792,7 @@
             <p:ph type="body" idx="1"/>
           </p:nvPr>
         </p:nvSpPr>
-        <p:spPr>
+        <p:spPr bwMode="auto">
           <a:xfrm>
             <a:off x="831850" y="4589463"/>
             <a:ext cx="10515600" cy="1500187"/>
@@ -984,17 +1893,20 @@
             </a:lvl9pPr>
           </a:lstStyle>
           <a:p>
-            <a:pPr lvl="0"/>
-            <a:r>
-              <a:rPr lang="en-US" smtClean="0"/>
+            <a:pPr lvl="0">
+              <a:defRPr/>
+            </a:pPr>
+            <a:r>
+              <a:rPr lang="en-US"/>
               <a:t>Edit Master text styles</a:t>
             </a:r>
-          </a:p>
-        </p:txBody>
-      </p:sp>
-      <p:sp>
-        <p:nvSpPr>
-          <p:cNvPr id="4" name="Date Placeholder 3"/>
+            <a:endParaRPr/>
+          </a:p>
+        </p:txBody>
+      </p:sp>
+      <p:sp>
+        <p:nvSpPr>
+          <p:cNvPr id="1613990331" name="Date Placeholder 3"/>
           <p:cNvSpPr>
             <a:spLocks noGrp="1"/>
           </p:cNvSpPr>
@@ -1002,13 +1914,16 @@
             <p:ph type="dt" sz="half" idx="10"/>
           </p:nvPr>
         </p:nvSpPr>
-        <p:spPr/>
-        <p:txBody>
-          <a:bodyPr/>
-          <a:lstStyle/>
-          <a:p>
+        <p:spPr bwMode="auto"/>
+        <p:txBody>
+          <a:bodyPr/>
+          <a:lstStyle/>
+          <a:p>
+            <a:pPr>
+              <a:defRPr/>
+            </a:pPr>
             <a:fld id="{C1A0CB4C-5559-475B-830B-093C2DBE2538}" type="datetimeFigureOut">
-              <a:rPr lang="en-US" smtClean="0"/>
+              <a:rPr lang="en-US"/>
               <a:t>1/15/2026</a:t>
             </a:fld>
             <a:endParaRPr lang="en-US"/>
@@ -1017,7 +1932,7 @@
       </p:sp>
       <p:sp>
         <p:nvSpPr>
-          <p:cNvPr id="5" name="Footer Placeholder 4"/>
+          <p:cNvPr id="1700457402" name="Footer Placeholder 4"/>
           <p:cNvSpPr>
             <a:spLocks noGrp="1"/>
           </p:cNvSpPr>
@@ -1025,18 +1940,21 @@
             <p:ph type="ftr" sz="quarter" idx="11"/>
           </p:nvPr>
         </p:nvSpPr>
-        <p:spPr/>
-        <p:txBody>
-          <a:bodyPr/>
-          <a:lstStyle/>
-          <a:p>
-            <a:endParaRPr lang="en-US"/>
-          </a:p>
-        </p:txBody>
-      </p:sp>
-      <p:sp>
-        <p:nvSpPr>
-          <p:cNvPr id="6" name="Slide Number Placeholder 5"/>
+        <p:spPr bwMode="auto"/>
+        <p:txBody>
+          <a:bodyPr/>
+          <a:lstStyle/>
+          <a:p>
+            <a:pPr>
+              <a:defRPr/>
+            </a:pPr>
+            <a:endParaRPr lang="en-US"/>
+          </a:p>
+        </p:txBody>
+      </p:sp>
+      <p:sp>
+        <p:nvSpPr>
+          <p:cNvPr id="530511246" name="Slide Number Placeholder 5"/>
           <p:cNvSpPr>
             <a:spLocks noGrp="1"/>
           </p:cNvSpPr>
@@ -1044,13 +1962,16 @@
             <p:ph type="sldNum" sz="quarter" idx="12"/>
           </p:nvPr>
         </p:nvSpPr>
-        <p:spPr/>
-        <p:txBody>
-          <a:bodyPr/>
-          <a:lstStyle/>
-          <a:p>
+        <p:spPr bwMode="auto"/>
+        <p:txBody>
+          <a:bodyPr/>
+          <a:lstStyle/>
+          <a:p>
+            <a:pPr>
+              <a:defRPr/>
+            </a:pPr>
             <a:fld id="{16EEFF7F-0A2A-489A-9962-FBDAE4758270}" type="slidenum">
-              <a:rPr lang="en-US" smtClean="0"/>
+              <a:rPr lang="en-US"/>
               <a:t>‹#›</a:t>
             </a:fld>
             <a:endParaRPr lang="en-US"/>
@@ -1058,11 +1979,6 @@
         </p:txBody>
       </p:sp>
     </p:spTree>
-    <p:extLst>
-      <p:ext uri="{BB962C8B-B14F-4D97-AF65-F5344CB8AC3E}">
-        <p14:creationId xmlns:p14="http://schemas.microsoft.com/office/powerpoint/2010/main" val="3918663215"/>
-      </p:ext>
-    </p:extLst>
   </p:cSld>
   <p:clrMapOvr>
     <a:masterClrMapping/>
@@ -1071,7 +1987,7 @@
 </file>
 
 <file path=ppt/slideLayouts/slideLayout4.xml><?xml version="1.0" encoding="utf-8"?>
-<p:sldLayout xmlns:a="http://schemas.openxmlformats.org/drawingml/2006/main" xmlns:r="http://schemas.openxmlformats.org/officeDocument/2006/relationships" xmlns:p="http://schemas.openxmlformats.org/presentationml/2006/main" type="twoObj" preserve="1">
+<p:sldLayout xmlns:a="http://schemas.openxmlformats.org/drawingml/2006/main" xmlns:r="http://schemas.openxmlformats.org/officeDocument/2006/relationships" xmlns:p="http://schemas.openxmlformats.org/presentationml/2006/main" xmlns:m="http://schemas.openxmlformats.org/officeDocument/2006/math" xmlns:w="http://schemas.openxmlformats.org/wordprocessingml/2006/main" matchingName="" preserve="1" showMasterPhAnim="0" showMasterSp="1" type="twoObj" userDrawn="1">
   <p:cSld name="Two Content">
     <p:spTree>
       <p:nvGrpSpPr>
@@ -1079,7 +1995,7 @@
         <p:cNvGrpSpPr/>
         <p:nvPr/>
       </p:nvGrpSpPr>
-      <p:grpSpPr>
+      <p:grpSpPr bwMode="auto">
         <a:xfrm>
           <a:off x="0" y="0"/>
           <a:ext cx="0" cy="0"/>
@@ -1089,7 +2005,7 @@
       </p:grpSpPr>
       <p:sp>
         <p:nvSpPr>
-          <p:cNvPr id="2" name="Title 1"/>
+          <p:cNvPr id="2104307643" name="Title 1"/>
           <p:cNvSpPr>
             <a:spLocks noGrp="1"/>
           </p:cNvSpPr>
@@ -1097,13 +2013,16 @@
             <p:ph type="title"/>
           </p:nvPr>
         </p:nvSpPr>
-        <p:spPr/>
-        <p:txBody>
-          <a:bodyPr/>
-          <a:lstStyle/>
-          <a:p>
-            <a:r>
-              <a:rPr lang="en-US" smtClean="0"/>
+        <p:spPr bwMode="auto"/>
+        <p:txBody>
+          <a:bodyPr/>
+          <a:lstStyle/>
+          <a:p>
+            <a:pPr>
+              <a:defRPr/>
+            </a:pPr>
+            <a:r>
+              <a:rPr lang="en-US"/>
               <a:t>Click to edit Master title style</a:t>
             </a:r>
             <a:endParaRPr lang="en-US"/>
@@ -1112,7 +2031,7 @@
       </p:sp>
       <p:sp>
         <p:nvSpPr>
-          <p:cNvPr id="3" name="Content Placeholder 2"/>
+          <p:cNvPr id="91014101" name="Content Placeholder 2"/>
           <p:cNvSpPr>
             <a:spLocks noGrp="1"/>
           </p:cNvSpPr>
@@ -1120,7 +2039,7 @@
             <p:ph sz="half" idx="1"/>
           </p:nvPr>
         </p:nvSpPr>
-        <p:spPr>
+        <p:spPr bwMode="auto">
           <a:xfrm>
             <a:off x="838200" y="1825625"/>
             <a:ext cx="5181600" cy="4351338"/>
@@ -1130,37 +2049,51 @@
           <a:bodyPr/>
           <a:lstStyle/>
           <a:p>
-            <a:pPr lvl="0"/>
-            <a:r>
-              <a:rPr lang="en-US" smtClean="0"/>
+            <a:pPr lvl="0">
+              <a:defRPr/>
+            </a:pPr>
+            <a:r>
+              <a:rPr lang="en-US"/>
               <a:t>Edit Master text styles</a:t>
             </a:r>
-          </a:p>
-          <a:p>
-            <a:pPr lvl="1"/>
-            <a:r>
-              <a:rPr lang="en-US" smtClean="0"/>
+            <a:endParaRPr/>
+          </a:p>
+          <a:p>
+            <a:pPr lvl="1">
+              <a:defRPr/>
+            </a:pPr>
+            <a:r>
+              <a:rPr lang="en-US"/>
               <a:t>Second level</a:t>
             </a:r>
-          </a:p>
-          <a:p>
-            <a:pPr lvl="2"/>
-            <a:r>
-              <a:rPr lang="en-US" smtClean="0"/>
+            <a:endParaRPr/>
+          </a:p>
+          <a:p>
+            <a:pPr lvl="2">
+              <a:defRPr/>
+            </a:pPr>
+            <a:r>
+              <a:rPr lang="en-US"/>
               <a:t>Third level</a:t>
             </a:r>
-          </a:p>
-          <a:p>
-            <a:pPr lvl="3"/>
-            <a:r>
-              <a:rPr lang="en-US" smtClean="0"/>
+            <a:endParaRPr/>
+          </a:p>
+          <a:p>
+            <a:pPr lvl="3">
+              <a:defRPr/>
+            </a:pPr>
+            <a:r>
+              <a:rPr lang="en-US"/>
               <a:t>Fourth level</a:t>
             </a:r>
-          </a:p>
-          <a:p>
-            <a:pPr lvl="4"/>
-            <a:r>
-              <a:rPr lang="en-US" smtClean="0"/>
+            <a:endParaRPr/>
+          </a:p>
+          <a:p>
+            <a:pPr lvl="4">
+              <a:defRPr/>
+            </a:pPr>
+            <a:r>
+              <a:rPr lang="en-US"/>
               <a:t>Fifth level</a:t>
             </a:r>
             <a:endParaRPr lang="en-US"/>
@@ -1169,7 +2102,7 @@
       </p:sp>
       <p:sp>
         <p:nvSpPr>
-          <p:cNvPr id="4" name="Content Placeholder 3"/>
+          <p:cNvPr id="824963581" name="Content Placeholder 3"/>
           <p:cNvSpPr>
             <a:spLocks noGrp="1"/>
           </p:cNvSpPr>
@@ -1177,7 +2110,7 @@
             <p:ph sz="half" idx="2"/>
           </p:nvPr>
         </p:nvSpPr>
-        <p:spPr>
+        <p:spPr bwMode="auto">
           <a:xfrm>
             <a:off x="6172200" y="1825625"/>
             <a:ext cx="5181600" cy="4351338"/>
@@ -1187,37 +2120,51 @@
           <a:bodyPr/>
           <a:lstStyle/>
           <a:p>
-            <a:pPr lvl="0"/>
-            <a:r>
-              <a:rPr lang="en-US" smtClean="0"/>
+            <a:pPr lvl="0">
+              <a:defRPr/>
+            </a:pPr>
+            <a:r>
+              <a:rPr lang="en-US"/>
               <a:t>Edit Master text styles</a:t>
             </a:r>
-          </a:p>
-          <a:p>
-            <a:pPr lvl="1"/>
-            <a:r>
-              <a:rPr lang="en-US" smtClean="0"/>
+            <a:endParaRPr/>
+          </a:p>
+          <a:p>
+            <a:pPr lvl="1">
+              <a:defRPr/>
+            </a:pPr>
+            <a:r>
+              <a:rPr lang="en-US"/>
               <a:t>Second level</a:t>
             </a:r>
-          </a:p>
-          <a:p>
-            <a:pPr lvl="2"/>
-            <a:r>
-              <a:rPr lang="en-US" smtClean="0"/>
+            <a:endParaRPr/>
+          </a:p>
+          <a:p>
+            <a:pPr lvl="2">
+              <a:defRPr/>
+            </a:pPr>
+            <a:r>
+              <a:rPr lang="en-US"/>
               <a:t>Third level</a:t>
             </a:r>
-          </a:p>
-          <a:p>
-            <a:pPr lvl="3"/>
-            <a:r>
-              <a:rPr lang="en-US" smtClean="0"/>
+            <a:endParaRPr/>
+          </a:p>
+          <a:p>
+            <a:pPr lvl="3">
+              <a:defRPr/>
+            </a:pPr>
+            <a:r>
+              <a:rPr lang="en-US"/>
               <a:t>Fourth level</a:t>
             </a:r>
-          </a:p>
-          <a:p>
-            <a:pPr lvl="4"/>
-            <a:r>
-              <a:rPr lang="en-US" smtClean="0"/>
+            <a:endParaRPr/>
+          </a:p>
+          <a:p>
+            <a:pPr lvl="4">
+              <a:defRPr/>
+            </a:pPr>
+            <a:r>
+              <a:rPr lang="en-US"/>
               <a:t>Fifth level</a:t>
             </a:r>
             <a:endParaRPr lang="en-US"/>
@@ -1226,7 +2173,7 @@
       </p:sp>
       <p:sp>
         <p:nvSpPr>
-          <p:cNvPr id="5" name="Date Placeholder 4"/>
+          <p:cNvPr id="1631542017" name="Date Placeholder 4"/>
           <p:cNvSpPr>
             <a:spLocks noGrp="1"/>
           </p:cNvSpPr>
@@ -1234,13 +2181,16 @@
             <p:ph type="dt" sz="half" idx="10"/>
           </p:nvPr>
         </p:nvSpPr>
-        <p:spPr/>
-        <p:txBody>
-          <a:bodyPr/>
-          <a:lstStyle/>
-          <a:p>
+        <p:spPr bwMode="auto"/>
+        <p:txBody>
+          <a:bodyPr/>
+          <a:lstStyle/>
+          <a:p>
+            <a:pPr>
+              <a:defRPr/>
+            </a:pPr>
             <a:fld id="{C1A0CB4C-5559-475B-830B-093C2DBE2538}" type="datetimeFigureOut">
-              <a:rPr lang="en-US" smtClean="0"/>
+              <a:rPr lang="en-US"/>
               <a:t>1/15/2026</a:t>
             </a:fld>
             <a:endParaRPr lang="en-US"/>
@@ -1249,7 +2199,7 @@
       </p:sp>
       <p:sp>
         <p:nvSpPr>
-          <p:cNvPr id="6" name="Footer Placeholder 5"/>
+          <p:cNvPr id="122605481" name="Footer Placeholder 5"/>
           <p:cNvSpPr>
             <a:spLocks noGrp="1"/>
           </p:cNvSpPr>
@@ -1257,18 +2207,21 @@
             <p:ph type="ftr" sz="quarter" idx="11"/>
           </p:nvPr>
         </p:nvSpPr>
-        <p:spPr/>
-        <p:txBody>
-          <a:bodyPr/>
-          <a:lstStyle/>
-          <a:p>
-            <a:endParaRPr lang="en-US"/>
-          </a:p>
-        </p:txBody>
-      </p:sp>
-      <p:sp>
-        <p:nvSpPr>
-          <p:cNvPr id="7" name="Slide Number Placeholder 6"/>
+        <p:spPr bwMode="auto"/>
+        <p:txBody>
+          <a:bodyPr/>
+          <a:lstStyle/>
+          <a:p>
+            <a:pPr>
+              <a:defRPr/>
+            </a:pPr>
+            <a:endParaRPr lang="en-US"/>
+          </a:p>
+        </p:txBody>
+      </p:sp>
+      <p:sp>
+        <p:nvSpPr>
+          <p:cNvPr id="2146695161" name="Slide Number Placeholder 6"/>
           <p:cNvSpPr>
             <a:spLocks noGrp="1"/>
           </p:cNvSpPr>
@@ -1276,13 +2229,16 @@
             <p:ph type="sldNum" sz="quarter" idx="12"/>
           </p:nvPr>
         </p:nvSpPr>
-        <p:spPr/>
-        <p:txBody>
-          <a:bodyPr/>
-          <a:lstStyle/>
-          <a:p>
+        <p:spPr bwMode="auto"/>
+        <p:txBody>
+          <a:bodyPr/>
+          <a:lstStyle/>
+          <a:p>
+            <a:pPr>
+              <a:defRPr/>
+            </a:pPr>
             <a:fld id="{16EEFF7F-0A2A-489A-9962-FBDAE4758270}" type="slidenum">
-              <a:rPr lang="en-US" smtClean="0"/>
+              <a:rPr lang="en-US"/>
               <a:t>‹#›</a:t>
             </a:fld>
             <a:endParaRPr lang="en-US"/>
@@ -1290,11 +2246,6 @@
         </p:txBody>
       </p:sp>
     </p:spTree>
-    <p:extLst>
-      <p:ext uri="{BB962C8B-B14F-4D97-AF65-F5344CB8AC3E}">
-        <p14:creationId xmlns:p14="http://schemas.microsoft.com/office/powerpoint/2010/main" val="2131986200"/>
-      </p:ext>
-    </p:extLst>
   </p:cSld>
   <p:clrMapOvr>
     <a:masterClrMapping/>
@@ -1303,7 +2254,7 @@
 </file>
 
 <file path=ppt/slideLayouts/slideLayout5.xml><?xml version="1.0" encoding="utf-8"?>
-<p:sldLayout xmlns:a="http://schemas.openxmlformats.org/drawingml/2006/main" xmlns:r="http://schemas.openxmlformats.org/officeDocument/2006/relationships" xmlns:p="http://schemas.openxmlformats.org/presentationml/2006/main" type="twoTxTwoObj" preserve="1">
+<p:sldLayout xmlns:a="http://schemas.openxmlformats.org/drawingml/2006/main" xmlns:r="http://schemas.openxmlformats.org/officeDocument/2006/relationships" xmlns:p="http://schemas.openxmlformats.org/presentationml/2006/main" xmlns:m="http://schemas.openxmlformats.org/officeDocument/2006/math" xmlns:w="http://schemas.openxmlformats.org/wordprocessingml/2006/main" matchingName="" preserve="1" showMasterPhAnim="0" showMasterSp="1" type="twoTxTwoObj" userDrawn="1">
   <p:cSld name="Comparison">
     <p:spTree>
       <p:nvGrpSpPr>
@@ -1311,7 +2262,7 @@
         <p:cNvGrpSpPr/>
         <p:nvPr/>
       </p:nvGrpSpPr>
-      <p:grpSpPr>
+      <p:grpSpPr bwMode="auto">
         <a:xfrm>
           <a:off x="0" y="0"/>
           <a:ext cx="0" cy="0"/>
@@ -1321,7 +2272,7 @@
       </p:grpSpPr>
       <p:sp>
         <p:nvSpPr>
-          <p:cNvPr id="2" name="Title 1"/>
+          <p:cNvPr id="1178335526" name="Title 1"/>
           <p:cNvSpPr>
             <a:spLocks noGrp="1"/>
           </p:cNvSpPr>
@@ -1329,7 +2280,7 @@
             <p:ph type="title"/>
           </p:nvPr>
         </p:nvSpPr>
-        <p:spPr>
+        <p:spPr bwMode="auto">
           <a:xfrm>
             <a:off x="839788" y="365125"/>
             <a:ext cx="10515600" cy="1325563"/>
@@ -1339,8 +2290,11 @@
           <a:bodyPr/>
           <a:lstStyle/>
           <a:p>
-            <a:r>
-              <a:rPr lang="en-US" smtClean="0"/>
+            <a:pPr>
+              <a:defRPr/>
+            </a:pPr>
+            <a:r>
+              <a:rPr lang="en-US"/>
               <a:t>Click to edit Master title style</a:t>
             </a:r>
             <a:endParaRPr lang="en-US"/>
@@ -1349,7 +2303,7 @@
       </p:sp>
       <p:sp>
         <p:nvSpPr>
-          <p:cNvPr id="3" name="Text Placeholder 2"/>
+          <p:cNvPr id="857894469" name="Text Placeholder 2"/>
           <p:cNvSpPr>
             <a:spLocks noGrp="1"/>
           </p:cNvSpPr>
@@ -1357,7 +2311,7 @@
             <p:ph type="body" idx="1"/>
           </p:nvPr>
         </p:nvSpPr>
-        <p:spPr>
+        <p:spPr bwMode="auto">
           <a:xfrm>
             <a:off x="839788" y="1681163"/>
             <a:ext cx="5157787" cy="823912"/>
@@ -1404,17 +2358,20 @@
             </a:lvl9pPr>
           </a:lstStyle>
           <a:p>
-            <a:pPr lvl="0"/>
-            <a:r>
-              <a:rPr lang="en-US" smtClean="0"/>
+            <a:pPr lvl="0">
+              <a:defRPr/>
+            </a:pPr>
+            <a:r>
+              <a:rPr lang="en-US"/>
               <a:t>Edit Master text styles</a:t>
             </a:r>
-          </a:p>
-        </p:txBody>
-      </p:sp>
-      <p:sp>
-        <p:nvSpPr>
-          <p:cNvPr id="4" name="Content Placeholder 3"/>
+            <a:endParaRPr/>
+          </a:p>
+        </p:txBody>
+      </p:sp>
+      <p:sp>
+        <p:nvSpPr>
+          <p:cNvPr id="299684016" name="Content Placeholder 3"/>
           <p:cNvSpPr>
             <a:spLocks noGrp="1"/>
           </p:cNvSpPr>
@@ -1422,9 +2379,9 @@
             <p:ph sz="half" idx="2"/>
           </p:nvPr>
         </p:nvSpPr>
-        <p:spPr>
+        <p:spPr bwMode="auto">
           <a:xfrm>
-            <a:off x="839788" y="2505075"/>
+            <a:off x="839788" y="2505074"/>
             <a:ext cx="5157787" cy="3684588"/>
           </a:xfrm>
         </p:spPr>
@@ -1432,37 +2389,51 @@
           <a:bodyPr/>
           <a:lstStyle/>
           <a:p>
-            <a:pPr lvl="0"/>
-            <a:r>
-              <a:rPr lang="en-US" smtClean="0"/>
+            <a:pPr lvl="0">
+              <a:defRPr/>
+            </a:pPr>
+            <a:r>
+              <a:rPr lang="en-US"/>
               <a:t>Edit Master text styles</a:t>
             </a:r>
-          </a:p>
-          <a:p>
-            <a:pPr lvl="1"/>
-            <a:r>
-              <a:rPr lang="en-US" smtClean="0"/>
+            <a:endParaRPr/>
+          </a:p>
+          <a:p>
+            <a:pPr lvl="1">
+              <a:defRPr/>
+            </a:pPr>
+            <a:r>
+              <a:rPr lang="en-US"/>
               <a:t>Second level</a:t>
             </a:r>
-          </a:p>
-          <a:p>
-            <a:pPr lvl="2"/>
-            <a:r>
-              <a:rPr lang="en-US" smtClean="0"/>
+            <a:endParaRPr/>
+          </a:p>
+          <a:p>
+            <a:pPr lvl="2">
+              <a:defRPr/>
+            </a:pPr>
+            <a:r>
+              <a:rPr lang="en-US"/>
               <a:t>Third level</a:t>
             </a:r>
-          </a:p>
-          <a:p>
-            <a:pPr lvl="3"/>
-            <a:r>
-              <a:rPr lang="en-US" smtClean="0"/>
+            <a:endParaRPr/>
+          </a:p>
+          <a:p>
+            <a:pPr lvl="3">
+              <a:defRPr/>
+            </a:pPr>
+            <a:r>
+              <a:rPr lang="en-US"/>
               <a:t>Fourth level</a:t>
             </a:r>
-          </a:p>
-          <a:p>
-            <a:pPr lvl="4"/>
-            <a:r>
-              <a:rPr lang="en-US" smtClean="0"/>
+            <a:endParaRPr/>
+          </a:p>
+          <a:p>
+            <a:pPr lvl="4">
+              <a:defRPr/>
+            </a:pPr>
+            <a:r>
+              <a:rPr lang="en-US"/>
               <a:t>Fifth level</a:t>
             </a:r>
             <a:endParaRPr lang="en-US"/>
@@ -1471,7 +2442,7 @@
       </p:sp>
       <p:sp>
         <p:nvSpPr>
-          <p:cNvPr id="5" name="Text Placeholder 4"/>
+          <p:cNvPr id="1280196697" name="Text Placeholder 4"/>
           <p:cNvSpPr>
             <a:spLocks noGrp="1"/>
           </p:cNvSpPr>
@@ -1479,7 +2450,7 @@
             <p:ph type="body" sz="quarter" idx="3"/>
           </p:nvPr>
         </p:nvSpPr>
-        <p:spPr>
+        <p:spPr bwMode="auto">
           <a:xfrm>
             <a:off x="6172200" y="1681163"/>
             <a:ext cx="5183188" cy="823912"/>
@@ -1526,17 +2497,20 @@
             </a:lvl9pPr>
           </a:lstStyle>
           <a:p>
-            <a:pPr lvl="0"/>
-            <a:r>
-              <a:rPr lang="en-US" smtClean="0"/>
+            <a:pPr lvl="0">
+              <a:defRPr/>
+            </a:pPr>
+            <a:r>
+              <a:rPr lang="en-US"/>
               <a:t>Edit Master text styles</a:t>
             </a:r>
-          </a:p>
-        </p:txBody>
-      </p:sp>
-      <p:sp>
-        <p:nvSpPr>
-          <p:cNvPr id="6" name="Content Placeholder 5"/>
+            <a:endParaRPr/>
+          </a:p>
+        </p:txBody>
+      </p:sp>
+      <p:sp>
+        <p:nvSpPr>
+          <p:cNvPr id="797527003" name="Content Placeholder 5"/>
           <p:cNvSpPr>
             <a:spLocks noGrp="1"/>
           </p:cNvSpPr>
@@ -1544,9 +2518,9 @@
             <p:ph sz="quarter" idx="4"/>
           </p:nvPr>
         </p:nvSpPr>
-        <p:spPr>
+        <p:spPr bwMode="auto">
           <a:xfrm>
-            <a:off x="6172200" y="2505075"/>
+            <a:off x="6172200" y="2505074"/>
             <a:ext cx="5183188" cy="3684588"/>
           </a:xfrm>
         </p:spPr>
@@ -1554,37 +2528,51 @@
           <a:bodyPr/>
           <a:lstStyle/>
           <a:p>
-            <a:pPr lvl="0"/>
-            <a:r>
-              <a:rPr lang="en-US" smtClean="0"/>
+            <a:pPr lvl="0">
+              <a:defRPr/>
+            </a:pPr>
+            <a:r>
+              <a:rPr lang="en-US"/>
               <a:t>Edit Master text styles</a:t>
             </a:r>
-          </a:p>
-          <a:p>
-            <a:pPr lvl="1"/>
-            <a:r>
-              <a:rPr lang="en-US" smtClean="0"/>
+            <a:endParaRPr/>
+          </a:p>
+          <a:p>
+            <a:pPr lvl="1">
+              <a:defRPr/>
+            </a:pPr>
+            <a:r>
+              <a:rPr lang="en-US"/>
               <a:t>Second level</a:t>
             </a:r>
-          </a:p>
-          <a:p>
-            <a:pPr lvl="2"/>
-            <a:r>
-              <a:rPr lang="en-US" smtClean="0"/>
+            <a:endParaRPr/>
+          </a:p>
+          <a:p>
+            <a:pPr lvl="2">
+              <a:defRPr/>
+            </a:pPr>
+            <a:r>
+              <a:rPr lang="en-US"/>
               <a:t>Third level</a:t>
             </a:r>
-          </a:p>
-          <a:p>
-            <a:pPr lvl="3"/>
-            <a:r>
-              <a:rPr lang="en-US" smtClean="0"/>
+            <a:endParaRPr/>
+          </a:p>
+          <a:p>
+            <a:pPr lvl="3">
+              <a:defRPr/>
+            </a:pPr>
+            <a:r>
+              <a:rPr lang="en-US"/>
               <a:t>Fourth level</a:t>
             </a:r>
-          </a:p>
-          <a:p>
-            <a:pPr lvl="4"/>
-            <a:r>
-              <a:rPr lang="en-US" smtClean="0"/>
+            <a:endParaRPr/>
+          </a:p>
+          <a:p>
+            <a:pPr lvl="4">
+              <a:defRPr/>
+            </a:pPr>
+            <a:r>
+              <a:rPr lang="en-US"/>
               <a:t>Fifth level</a:t>
             </a:r>
             <a:endParaRPr lang="en-US"/>
@@ -1593,7 +2581,7 @@
       </p:sp>
       <p:sp>
         <p:nvSpPr>
-          <p:cNvPr id="7" name="Date Placeholder 6"/>
+          <p:cNvPr id="608280007" name="Date Placeholder 6"/>
           <p:cNvSpPr>
             <a:spLocks noGrp="1"/>
           </p:cNvSpPr>
@@ -1601,13 +2589,16 @@
             <p:ph type="dt" sz="half" idx="10"/>
           </p:nvPr>
         </p:nvSpPr>
-        <p:spPr/>
-        <p:txBody>
-          <a:bodyPr/>
-          <a:lstStyle/>
-          <a:p>
+        <p:spPr bwMode="auto"/>
+        <p:txBody>
+          <a:bodyPr/>
+          <a:lstStyle/>
+          <a:p>
+            <a:pPr>
+              <a:defRPr/>
+            </a:pPr>
             <a:fld id="{C1A0CB4C-5559-475B-830B-093C2DBE2538}" type="datetimeFigureOut">
-              <a:rPr lang="en-US" smtClean="0"/>
+              <a:rPr lang="en-US"/>
               <a:t>1/15/2026</a:t>
             </a:fld>
             <a:endParaRPr lang="en-US"/>
@@ -1616,7 +2607,7 @@
       </p:sp>
       <p:sp>
         <p:nvSpPr>
-          <p:cNvPr id="8" name="Footer Placeholder 7"/>
+          <p:cNvPr id="478703409" name="Footer Placeholder 7"/>
           <p:cNvSpPr>
             <a:spLocks noGrp="1"/>
           </p:cNvSpPr>
@@ -1624,18 +2615,21 @@
             <p:ph type="ftr" sz="quarter" idx="11"/>
           </p:nvPr>
         </p:nvSpPr>
-        <p:spPr/>
-        <p:txBody>
-          <a:bodyPr/>
-          <a:lstStyle/>
-          <a:p>
-            <a:endParaRPr lang="en-US"/>
-          </a:p>
-        </p:txBody>
-      </p:sp>
-      <p:sp>
-        <p:nvSpPr>
-          <p:cNvPr id="9" name="Slide Number Placeholder 8"/>
+        <p:spPr bwMode="auto"/>
+        <p:txBody>
+          <a:bodyPr/>
+          <a:lstStyle/>
+          <a:p>
+            <a:pPr>
+              <a:defRPr/>
+            </a:pPr>
+            <a:endParaRPr lang="en-US"/>
+          </a:p>
+        </p:txBody>
+      </p:sp>
+      <p:sp>
+        <p:nvSpPr>
+          <p:cNvPr id="1109921099" name="Slide Number Placeholder 8"/>
           <p:cNvSpPr>
             <a:spLocks noGrp="1"/>
           </p:cNvSpPr>
@@ -1643,13 +2637,16 @@
             <p:ph type="sldNum" sz="quarter" idx="12"/>
           </p:nvPr>
         </p:nvSpPr>
-        <p:spPr/>
-        <p:txBody>
-          <a:bodyPr/>
-          <a:lstStyle/>
-          <a:p>
+        <p:spPr bwMode="auto"/>
+        <p:txBody>
+          <a:bodyPr/>
+          <a:lstStyle/>
+          <a:p>
+            <a:pPr>
+              <a:defRPr/>
+            </a:pPr>
             <a:fld id="{16EEFF7F-0A2A-489A-9962-FBDAE4758270}" type="slidenum">
-              <a:rPr lang="en-US" smtClean="0"/>
+              <a:rPr lang="en-US"/>
               <a:t>‹#›</a:t>
             </a:fld>
             <a:endParaRPr lang="en-US"/>
@@ -1657,11 +2654,6 @@
         </p:txBody>
       </p:sp>
     </p:spTree>
-    <p:extLst>
-      <p:ext uri="{BB962C8B-B14F-4D97-AF65-F5344CB8AC3E}">
-        <p14:creationId xmlns:p14="http://schemas.microsoft.com/office/powerpoint/2010/main" val="1371760227"/>
-      </p:ext>
-    </p:extLst>
   </p:cSld>
   <p:clrMapOvr>
     <a:masterClrMapping/>
@@ -1670,7 +2662,7 @@
 </file>
 
 <file path=ppt/slideLayouts/slideLayout6.xml><?xml version="1.0" encoding="utf-8"?>
-<p:sldLayout xmlns:a="http://schemas.openxmlformats.org/drawingml/2006/main" xmlns:r="http://schemas.openxmlformats.org/officeDocument/2006/relationships" xmlns:p="http://schemas.openxmlformats.org/presentationml/2006/main" type="titleOnly" preserve="1">
+<p:sldLayout xmlns:a="http://schemas.openxmlformats.org/drawingml/2006/main" xmlns:r="http://schemas.openxmlformats.org/officeDocument/2006/relationships" xmlns:p="http://schemas.openxmlformats.org/presentationml/2006/main" xmlns:m="http://schemas.openxmlformats.org/officeDocument/2006/math" xmlns:w="http://schemas.openxmlformats.org/wordprocessingml/2006/main" matchingName="" preserve="1" showMasterPhAnim="0" showMasterSp="1" type="titleOnly" userDrawn="1">
   <p:cSld name="Title Only">
     <p:spTree>
       <p:nvGrpSpPr>
@@ -1678,7 +2670,7 @@
         <p:cNvGrpSpPr/>
         <p:nvPr/>
       </p:nvGrpSpPr>
-      <p:grpSpPr>
+      <p:grpSpPr bwMode="auto">
         <a:xfrm>
           <a:off x="0" y="0"/>
           <a:ext cx="0" cy="0"/>
@@ -1688,7 +2680,7 @@
       </p:grpSpPr>
       <p:sp>
         <p:nvSpPr>
-          <p:cNvPr id="2" name="Title 1"/>
+          <p:cNvPr id="1734230596" name="Title 1"/>
           <p:cNvSpPr>
             <a:spLocks noGrp="1"/>
           </p:cNvSpPr>
@@ -1696,13 +2688,16 @@
             <p:ph type="title"/>
           </p:nvPr>
         </p:nvSpPr>
-        <p:spPr/>
-        <p:txBody>
-          <a:bodyPr/>
-          <a:lstStyle/>
-          <a:p>
-            <a:r>
-              <a:rPr lang="en-US" smtClean="0"/>
+        <p:spPr bwMode="auto"/>
+        <p:txBody>
+          <a:bodyPr/>
+          <a:lstStyle/>
+          <a:p>
+            <a:pPr>
+              <a:defRPr/>
+            </a:pPr>
+            <a:r>
+              <a:rPr lang="en-US"/>
               <a:t>Click to edit Master title style</a:t>
             </a:r>
             <a:endParaRPr lang="en-US"/>
@@ -1711,7 +2706,7 @@
       </p:sp>
       <p:sp>
         <p:nvSpPr>
-          <p:cNvPr id="3" name="Date Placeholder 2"/>
+          <p:cNvPr id="392795312" name="Date Placeholder 2"/>
           <p:cNvSpPr>
             <a:spLocks noGrp="1"/>
           </p:cNvSpPr>
@@ -1719,13 +2714,16 @@
             <p:ph type="dt" sz="half" idx="10"/>
           </p:nvPr>
         </p:nvSpPr>
-        <p:spPr/>
-        <p:txBody>
-          <a:bodyPr/>
-          <a:lstStyle/>
-          <a:p>
+        <p:spPr bwMode="auto"/>
+        <p:txBody>
+          <a:bodyPr/>
+          <a:lstStyle/>
+          <a:p>
+            <a:pPr>
+              <a:defRPr/>
+            </a:pPr>
             <a:fld id="{C1A0CB4C-5559-475B-830B-093C2DBE2538}" type="datetimeFigureOut">
-              <a:rPr lang="en-US" smtClean="0"/>
+              <a:rPr lang="en-US"/>
               <a:t>1/15/2026</a:t>
             </a:fld>
             <a:endParaRPr lang="en-US"/>
@@ -1734,7 +2732,7 @@
       </p:sp>
       <p:sp>
         <p:nvSpPr>
-          <p:cNvPr id="4" name="Footer Placeholder 3"/>
+          <p:cNvPr id="1641344067" name="Footer Placeholder 3"/>
           <p:cNvSpPr>
             <a:spLocks noGrp="1"/>
           </p:cNvSpPr>
@@ -1742,18 +2740,21 @@
             <p:ph type="ftr" sz="quarter" idx="11"/>
           </p:nvPr>
         </p:nvSpPr>
-        <p:spPr/>
-        <p:txBody>
-          <a:bodyPr/>
-          <a:lstStyle/>
-          <a:p>
-            <a:endParaRPr lang="en-US"/>
-          </a:p>
-        </p:txBody>
-      </p:sp>
-      <p:sp>
-        <p:nvSpPr>
-          <p:cNvPr id="5" name="Slide Number Placeholder 4"/>
+        <p:spPr bwMode="auto"/>
+        <p:txBody>
+          <a:bodyPr/>
+          <a:lstStyle/>
+          <a:p>
+            <a:pPr>
+              <a:defRPr/>
+            </a:pPr>
+            <a:endParaRPr lang="en-US"/>
+          </a:p>
+        </p:txBody>
+      </p:sp>
+      <p:sp>
+        <p:nvSpPr>
+          <p:cNvPr id="1135960341" name="Slide Number Placeholder 4"/>
           <p:cNvSpPr>
             <a:spLocks noGrp="1"/>
           </p:cNvSpPr>
@@ -1761,13 +2762,16 @@
             <p:ph type="sldNum" sz="quarter" idx="12"/>
           </p:nvPr>
         </p:nvSpPr>
-        <p:spPr/>
-        <p:txBody>
-          <a:bodyPr/>
-          <a:lstStyle/>
-          <a:p>
+        <p:spPr bwMode="auto"/>
+        <p:txBody>
+          <a:bodyPr/>
+          <a:lstStyle/>
+          <a:p>
+            <a:pPr>
+              <a:defRPr/>
+            </a:pPr>
             <a:fld id="{16EEFF7F-0A2A-489A-9962-FBDAE4758270}" type="slidenum">
-              <a:rPr lang="en-US" smtClean="0"/>
+              <a:rPr lang="en-US"/>
               <a:t>‹#›</a:t>
             </a:fld>
             <a:endParaRPr lang="en-US"/>
@@ -1775,11 +2779,6 @@
         </p:txBody>
       </p:sp>
     </p:spTree>
-    <p:extLst>
-      <p:ext uri="{BB962C8B-B14F-4D97-AF65-F5344CB8AC3E}">
-        <p14:creationId xmlns:p14="http://schemas.microsoft.com/office/powerpoint/2010/main" val="2072401735"/>
-      </p:ext>
-    </p:extLst>
   </p:cSld>
   <p:clrMapOvr>
     <a:masterClrMapping/>
@@ -1788,7 +2787,7 @@
 </file>
 
 <file path=ppt/slideLayouts/slideLayout7.xml><?xml version="1.0" encoding="utf-8"?>
-<p:sldLayout xmlns:a="http://schemas.openxmlformats.org/drawingml/2006/main" xmlns:r="http://schemas.openxmlformats.org/officeDocument/2006/relationships" xmlns:p="http://schemas.openxmlformats.org/presentationml/2006/main" type="blank" preserve="1">
+<p:sldLayout xmlns:a="http://schemas.openxmlformats.org/drawingml/2006/main" xmlns:r="http://schemas.openxmlformats.org/officeDocument/2006/relationships" xmlns:p="http://schemas.openxmlformats.org/presentationml/2006/main" xmlns:m="http://schemas.openxmlformats.org/officeDocument/2006/math" xmlns:w="http://schemas.openxmlformats.org/wordprocessingml/2006/main" matchingName="" preserve="1" showMasterPhAnim="0" showMasterSp="1" type="blank" userDrawn="1">
   <p:cSld name="Blank">
     <p:spTree>
       <p:nvGrpSpPr>
@@ -1796,7 +2795,7 @@
         <p:cNvGrpSpPr/>
         <p:nvPr/>
       </p:nvGrpSpPr>
-      <p:grpSpPr>
+      <p:grpSpPr bwMode="auto">
         <a:xfrm>
           <a:off x="0" y="0"/>
           <a:ext cx="0" cy="0"/>
@@ -1806,7 +2805,7 @@
       </p:grpSpPr>
       <p:sp>
         <p:nvSpPr>
-          <p:cNvPr id="2" name="Date Placeholder 1"/>
+          <p:cNvPr id="545867160" name="Date Placeholder 1"/>
           <p:cNvSpPr>
             <a:spLocks noGrp="1"/>
           </p:cNvSpPr>
@@ -1814,13 +2813,16 @@
             <p:ph type="dt" sz="half" idx="10"/>
           </p:nvPr>
         </p:nvSpPr>
-        <p:spPr/>
-        <p:txBody>
-          <a:bodyPr/>
-          <a:lstStyle/>
-          <a:p>
+        <p:spPr bwMode="auto"/>
+        <p:txBody>
+          <a:bodyPr/>
+          <a:lstStyle/>
+          <a:p>
+            <a:pPr>
+              <a:defRPr/>
+            </a:pPr>
             <a:fld id="{C1A0CB4C-5559-475B-830B-093C2DBE2538}" type="datetimeFigureOut">
-              <a:rPr lang="en-US" smtClean="0"/>
+              <a:rPr lang="en-US"/>
               <a:t>1/15/2026</a:t>
             </a:fld>
             <a:endParaRPr lang="en-US"/>
@@ -1829,7 +2831,7 @@
       </p:sp>
       <p:sp>
         <p:nvSpPr>
-          <p:cNvPr id="3" name="Footer Placeholder 2"/>
+          <p:cNvPr id="1888660208" name="Footer Placeholder 2"/>
           <p:cNvSpPr>
             <a:spLocks noGrp="1"/>
           </p:cNvSpPr>
@@ -1837,18 +2839,21 @@
             <p:ph type="ftr" sz="quarter" idx="11"/>
           </p:nvPr>
         </p:nvSpPr>
-        <p:spPr/>
-        <p:txBody>
-          <a:bodyPr/>
-          <a:lstStyle/>
-          <a:p>
-            <a:endParaRPr lang="en-US"/>
-          </a:p>
-        </p:txBody>
-      </p:sp>
-      <p:sp>
-        <p:nvSpPr>
-          <p:cNvPr id="4" name="Slide Number Placeholder 3"/>
+        <p:spPr bwMode="auto"/>
+        <p:txBody>
+          <a:bodyPr/>
+          <a:lstStyle/>
+          <a:p>
+            <a:pPr>
+              <a:defRPr/>
+            </a:pPr>
+            <a:endParaRPr lang="en-US"/>
+          </a:p>
+        </p:txBody>
+      </p:sp>
+      <p:sp>
+        <p:nvSpPr>
+          <p:cNvPr id="105440791" name="Slide Number Placeholder 3"/>
           <p:cNvSpPr>
             <a:spLocks noGrp="1"/>
           </p:cNvSpPr>
@@ -1856,13 +2861,16 @@
             <p:ph type="sldNum" sz="quarter" idx="12"/>
           </p:nvPr>
         </p:nvSpPr>
-        <p:spPr/>
-        <p:txBody>
-          <a:bodyPr/>
-          <a:lstStyle/>
-          <a:p>
+        <p:spPr bwMode="auto"/>
+        <p:txBody>
+          <a:bodyPr/>
+          <a:lstStyle/>
+          <a:p>
+            <a:pPr>
+              <a:defRPr/>
+            </a:pPr>
             <a:fld id="{16EEFF7F-0A2A-489A-9962-FBDAE4758270}" type="slidenum">
-              <a:rPr lang="en-US" smtClean="0"/>
+              <a:rPr lang="en-US"/>
               <a:t>‹#›</a:t>
             </a:fld>
             <a:endParaRPr lang="en-US"/>
@@ -1870,11 +2878,6 @@
         </p:txBody>
       </p:sp>
     </p:spTree>
-    <p:extLst>
-      <p:ext uri="{BB962C8B-B14F-4D97-AF65-F5344CB8AC3E}">
-        <p14:creationId xmlns:p14="http://schemas.microsoft.com/office/powerpoint/2010/main" val="1227363087"/>
-      </p:ext>
-    </p:extLst>
   </p:cSld>
   <p:clrMapOvr>
     <a:masterClrMapping/>
@@ -1883,7 +2886,7 @@
 </file>
 
 <file path=ppt/slideLayouts/slideLayout8.xml><?xml version="1.0" encoding="utf-8"?>
-<p:sldLayout xmlns:a="http://schemas.openxmlformats.org/drawingml/2006/main" xmlns:r="http://schemas.openxmlformats.org/officeDocument/2006/relationships" xmlns:p="http://schemas.openxmlformats.org/presentationml/2006/main" type="objTx" preserve="1">
+<p:sldLayout xmlns:a="http://schemas.openxmlformats.org/drawingml/2006/main" xmlns:r="http://schemas.openxmlformats.org/officeDocument/2006/relationships" xmlns:p="http://schemas.openxmlformats.org/presentationml/2006/main" xmlns:m="http://schemas.openxmlformats.org/officeDocument/2006/math" xmlns:w="http://schemas.openxmlformats.org/wordprocessingml/2006/main" matchingName="" preserve="1" showMasterPhAnim="0" showMasterSp="1" type="objTx" userDrawn="1">
   <p:cSld name="Content with Caption">
     <p:spTree>
       <p:nvGrpSpPr>
@@ -1891,7 +2894,7 @@
         <p:cNvGrpSpPr/>
         <p:nvPr/>
       </p:nvGrpSpPr>
-      <p:grpSpPr>
+      <p:grpSpPr bwMode="auto">
         <a:xfrm>
           <a:off x="0" y="0"/>
           <a:ext cx="0" cy="0"/>
@@ -1901,7 +2904,7 @@
       </p:grpSpPr>
       <p:sp>
         <p:nvSpPr>
-          <p:cNvPr id="2" name="Title 1"/>
+          <p:cNvPr id="1083783351" name="Title 1"/>
           <p:cNvSpPr>
             <a:spLocks noGrp="1"/>
           </p:cNvSpPr>
@@ -1909,7 +2912,7 @@
             <p:ph type="title"/>
           </p:nvPr>
         </p:nvSpPr>
-        <p:spPr>
+        <p:spPr bwMode="auto">
           <a:xfrm>
             <a:off x="839788" y="457200"/>
             <a:ext cx="3932237" cy="1600200"/>
@@ -1923,8 +2926,11 @@
             </a:lvl1pPr>
           </a:lstStyle>
           <a:p>
-            <a:r>
-              <a:rPr lang="en-US" smtClean="0"/>
+            <a:pPr>
+              <a:defRPr/>
+            </a:pPr>
+            <a:r>
+              <a:rPr lang="en-US"/>
               <a:t>Click to edit Master title style</a:t>
             </a:r>
             <a:endParaRPr lang="en-US"/>
@@ -1933,7 +2939,7 @@
       </p:sp>
       <p:sp>
         <p:nvSpPr>
-          <p:cNvPr id="3" name="Content Placeholder 2"/>
+          <p:cNvPr id="1369611944" name="Content Placeholder 2"/>
           <p:cNvSpPr>
             <a:spLocks noGrp="1"/>
           </p:cNvSpPr>
@@ -1941,7 +2947,7 @@
             <p:ph idx="1"/>
           </p:nvPr>
         </p:nvSpPr>
-        <p:spPr>
+        <p:spPr bwMode="auto">
           <a:xfrm>
             <a:off x="5183188" y="987425"/>
             <a:ext cx="6172200" cy="4873625"/>
@@ -1979,37 +2985,51 @@
             </a:lvl9pPr>
           </a:lstStyle>
           <a:p>
-            <a:pPr lvl="0"/>
-            <a:r>
-              <a:rPr lang="en-US" smtClean="0"/>
+            <a:pPr lvl="0">
+              <a:defRPr/>
+            </a:pPr>
+            <a:r>
+              <a:rPr lang="en-US"/>
               <a:t>Edit Master text styles</a:t>
             </a:r>
-          </a:p>
-          <a:p>
-            <a:pPr lvl="1"/>
-            <a:r>
-              <a:rPr lang="en-US" smtClean="0"/>
+            <a:endParaRPr/>
+          </a:p>
+          <a:p>
+            <a:pPr lvl="1">
+              <a:defRPr/>
+            </a:pPr>
+            <a:r>
+              <a:rPr lang="en-US"/>
               <a:t>Second level</a:t>
             </a:r>
-          </a:p>
-          <a:p>
-            <a:pPr lvl="2"/>
-            <a:r>
-              <a:rPr lang="en-US" smtClean="0"/>
+            <a:endParaRPr/>
+          </a:p>
+          <a:p>
+            <a:pPr lvl="2">
+              <a:defRPr/>
+            </a:pPr>
+            <a:r>
+              <a:rPr lang="en-US"/>
               <a:t>Third level</a:t>
             </a:r>
-          </a:p>
-          <a:p>
-            <a:pPr lvl="3"/>
-            <a:r>
-              <a:rPr lang="en-US" smtClean="0"/>
+            <a:endParaRPr/>
+          </a:p>
+          <a:p>
+            <a:pPr lvl="3">
+              <a:defRPr/>
+            </a:pPr>
+            <a:r>
+              <a:rPr lang="en-US"/>
               <a:t>Fourth level</a:t>
             </a:r>
-          </a:p>
-          <a:p>
-            <a:pPr lvl="4"/>
-            <a:r>
-              <a:rPr lang="en-US" smtClean="0"/>
+            <a:endParaRPr/>
+          </a:p>
+          <a:p>
+            <a:pPr lvl="4">
+              <a:defRPr/>
+            </a:pPr>
+            <a:r>
+              <a:rPr lang="en-US"/>
               <a:t>Fifth level</a:t>
             </a:r>
             <a:endParaRPr lang="en-US"/>
@@ -2018,7 +3038,7 @@
       </p:sp>
       <p:sp>
         <p:nvSpPr>
-          <p:cNvPr id="4" name="Text Placeholder 3"/>
+          <p:cNvPr id="1047627131" name="Text Placeholder 3"/>
           <p:cNvSpPr>
             <a:spLocks noGrp="1"/>
           </p:cNvSpPr>
@@ -2026,7 +3046,7 @@
             <p:ph type="body" sz="half" idx="2"/>
           </p:nvPr>
         </p:nvSpPr>
-        <p:spPr>
+        <p:spPr bwMode="auto">
           <a:xfrm>
             <a:off x="839788" y="2057400"/>
             <a:ext cx="3932237" cy="3811588"/>
@@ -2073,17 +3093,20 @@
             </a:lvl9pPr>
           </a:lstStyle>
           <a:p>
-            <a:pPr lvl="0"/>
-            <a:r>
-              <a:rPr lang="en-US" smtClean="0"/>
+            <a:pPr lvl="0">
+              <a:defRPr/>
+            </a:pPr>
+            <a:r>
+              <a:rPr lang="en-US"/>
               <a:t>Edit Master text styles</a:t>
             </a:r>
-          </a:p>
-        </p:txBody>
-      </p:sp>
-      <p:sp>
-        <p:nvSpPr>
-          <p:cNvPr id="5" name="Date Placeholder 4"/>
+            <a:endParaRPr/>
+          </a:p>
+        </p:txBody>
+      </p:sp>
+      <p:sp>
+        <p:nvSpPr>
+          <p:cNvPr id="269704053" name="Date Placeholder 4"/>
           <p:cNvSpPr>
             <a:spLocks noGrp="1"/>
           </p:cNvSpPr>
@@ -2091,13 +3114,16 @@
             <p:ph type="dt" sz="half" idx="10"/>
           </p:nvPr>
         </p:nvSpPr>
-        <p:spPr/>
-        <p:txBody>
-          <a:bodyPr/>
-          <a:lstStyle/>
-          <a:p>
+        <p:spPr bwMode="auto"/>
+        <p:txBody>
+          <a:bodyPr/>
+          <a:lstStyle/>
+          <a:p>
+            <a:pPr>
+              <a:defRPr/>
+            </a:pPr>
             <a:fld id="{C1A0CB4C-5559-475B-830B-093C2DBE2538}" type="datetimeFigureOut">
-              <a:rPr lang="en-US" smtClean="0"/>
+              <a:rPr lang="en-US"/>
               <a:t>1/15/2026</a:t>
             </a:fld>
             <a:endParaRPr lang="en-US"/>
@@ -2106,7 +3132,7 @@
       </p:sp>
       <p:sp>
         <p:nvSpPr>
-          <p:cNvPr id="6" name="Footer Placeholder 5"/>
+          <p:cNvPr id="935399170" name="Footer Placeholder 5"/>
           <p:cNvSpPr>
             <a:spLocks noGrp="1"/>
           </p:cNvSpPr>
@@ -2114,18 +3140,21 @@
             <p:ph type="ftr" sz="quarter" idx="11"/>
           </p:nvPr>
         </p:nvSpPr>
-        <p:spPr/>
-        <p:txBody>
-          <a:bodyPr/>
-          <a:lstStyle/>
-          <a:p>
-            <a:endParaRPr lang="en-US"/>
-          </a:p>
-        </p:txBody>
-      </p:sp>
-      <p:sp>
-        <p:nvSpPr>
-          <p:cNvPr id="7" name="Slide Number Placeholder 6"/>
+        <p:spPr bwMode="auto"/>
+        <p:txBody>
+          <a:bodyPr/>
+          <a:lstStyle/>
+          <a:p>
+            <a:pPr>
+              <a:defRPr/>
+            </a:pPr>
+            <a:endParaRPr lang="en-US"/>
+          </a:p>
+        </p:txBody>
+      </p:sp>
+      <p:sp>
+        <p:nvSpPr>
+          <p:cNvPr id="180152113" name="Slide Number Placeholder 6"/>
           <p:cNvSpPr>
             <a:spLocks noGrp="1"/>
           </p:cNvSpPr>
@@ -2133,13 +3162,16 @@
             <p:ph type="sldNum" sz="quarter" idx="12"/>
           </p:nvPr>
         </p:nvSpPr>
-        <p:spPr/>
-        <p:txBody>
-          <a:bodyPr/>
-          <a:lstStyle/>
-          <a:p>
+        <p:spPr bwMode="auto"/>
+        <p:txBody>
+          <a:bodyPr/>
+          <a:lstStyle/>
+          <a:p>
+            <a:pPr>
+              <a:defRPr/>
+            </a:pPr>
             <a:fld id="{16EEFF7F-0A2A-489A-9962-FBDAE4758270}" type="slidenum">
-              <a:rPr lang="en-US" smtClean="0"/>
+              <a:rPr lang="en-US"/>
               <a:t>‹#›</a:t>
             </a:fld>
             <a:endParaRPr lang="en-US"/>
@@ -2147,11 +3179,6 @@
         </p:txBody>
       </p:sp>
     </p:spTree>
-    <p:extLst>
-      <p:ext uri="{BB962C8B-B14F-4D97-AF65-F5344CB8AC3E}">
-        <p14:creationId xmlns:p14="http://schemas.microsoft.com/office/powerpoint/2010/main" val="632309277"/>
-      </p:ext>
-    </p:extLst>
   </p:cSld>
   <p:clrMapOvr>
     <a:masterClrMapping/>
@@ -2160,7 +3187,7 @@
 </file>
 
 <file path=ppt/slideLayouts/slideLayout9.xml><?xml version="1.0" encoding="utf-8"?>
-<p:sldLayout xmlns:a="http://schemas.openxmlformats.org/drawingml/2006/main" xmlns:r="http://schemas.openxmlformats.org/officeDocument/2006/relationships" xmlns:p="http://schemas.openxmlformats.org/presentationml/2006/main" type="picTx" preserve="1">
+<p:sldLayout xmlns:a="http://schemas.openxmlformats.org/drawingml/2006/main" xmlns:r="http://schemas.openxmlformats.org/officeDocument/2006/relationships" xmlns:p="http://schemas.openxmlformats.org/presentationml/2006/main" xmlns:m="http://schemas.openxmlformats.org/officeDocument/2006/math" xmlns:w="http://schemas.openxmlformats.org/wordprocessingml/2006/main" matchingName="" preserve="1" showMasterPhAnim="0" showMasterSp="1" type="picTx" userDrawn="1">
   <p:cSld name="Picture with Caption">
     <p:spTree>
       <p:nvGrpSpPr>
@@ -2168,7 +3195,7 @@
         <p:cNvGrpSpPr/>
         <p:nvPr/>
       </p:nvGrpSpPr>
-      <p:grpSpPr>
+      <p:grpSpPr bwMode="auto">
         <a:xfrm>
           <a:off x="0" y="0"/>
           <a:ext cx="0" cy="0"/>
@@ -2178,7 +3205,7 @@
       </p:grpSpPr>
       <p:sp>
         <p:nvSpPr>
-          <p:cNvPr id="2" name="Title 1"/>
+          <p:cNvPr id="1346464200" name="Title 1"/>
           <p:cNvSpPr>
             <a:spLocks noGrp="1"/>
           </p:cNvSpPr>
@@ -2186,7 +3213,7 @@
             <p:ph type="title"/>
           </p:nvPr>
         </p:nvSpPr>
-        <p:spPr>
+        <p:spPr bwMode="auto">
           <a:xfrm>
             <a:off x="839788" y="457200"/>
             <a:ext cx="3932237" cy="1600200"/>
@@ -2200,8 +3227,11 @@
             </a:lvl1pPr>
           </a:lstStyle>
           <a:p>
-            <a:r>
-              <a:rPr lang="en-US" smtClean="0"/>
+            <a:pPr>
+              <a:defRPr/>
+            </a:pPr>
+            <a:r>
+              <a:rPr lang="en-US"/>
               <a:t>Click to edit Master title style</a:t>
             </a:r>
             <a:endParaRPr lang="en-US"/>
@@ -2210,7 +3240,7 @@
       </p:sp>
       <p:sp>
         <p:nvSpPr>
-          <p:cNvPr id="3" name="Picture Placeholder 2"/>
+          <p:cNvPr id="779303496" name="Picture Placeholder 2"/>
           <p:cNvSpPr>
             <a:spLocks noGrp="1"/>
           </p:cNvSpPr>
@@ -2218,7 +3248,7 @@
             <p:ph type="pic" idx="1"/>
           </p:nvPr>
         </p:nvSpPr>
-        <p:spPr>
+        <p:spPr bwMode="auto">
           <a:xfrm>
             <a:off x="5183188" y="987425"/>
             <a:ext cx="6172200" cy="4873625"/>
@@ -2265,13 +3295,16 @@
             </a:lvl9pPr>
           </a:lstStyle>
           <a:p>
-            <a:endParaRPr lang="en-US"/>
-          </a:p>
-        </p:txBody>
-      </p:sp>
-      <p:sp>
-        <p:nvSpPr>
-          <p:cNvPr id="4" name="Text Placeholder 3"/>
+            <a:pPr>
+              <a:defRPr/>
+            </a:pPr>
+            <a:endParaRPr lang="en-US"/>
+          </a:p>
+        </p:txBody>
+      </p:sp>
+      <p:sp>
+        <p:nvSpPr>
+          <p:cNvPr id="286516067" name="Text Placeholder 3"/>
           <p:cNvSpPr>
             <a:spLocks noGrp="1"/>
           </p:cNvSpPr>
@@ -2279,7 +3312,7 @@
             <p:ph type="body" sz="half" idx="2"/>
           </p:nvPr>
         </p:nvSpPr>
-        <p:spPr>
+        <p:spPr bwMode="auto">
           <a:xfrm>
             <a:off x="839788" y="2057400"/>
             <a:ext cx="3932237" cy="3811588"/>
@@ -2326,17 +3359,20 @@
             </a:lvl9pPr>
           </a:lstStyle>
           <a:p>
-            <a:pPr lvl="0"/>
-            <a:r>
-              <a:rPr lang="en-US" smtClean="0"/>
+            <a:pPr lvl="0">
+              <a:defRPr/>
+            </a:pPr>
+            <a:r>
+              <a:rPr lang="en-US"/>
               <a:t>Edit Master text styles</a:t>
             </a:r>
-          </a:p>
-        </p:txBody>
-      </p:sp>
-      <p:sp>
-        <p:nvSpPr>
-          <p:cNvPr id="5" name="Date Placeholder 4"/>
+            <a:endParaRPr/>
+          </a:p>
+        </p:txBody>
+      </p:sp>
+      <p:sp>
+        <p:nvSpPr>
+          <p:cNvPr id="1630172558" name="Date Placeholder 4"/>
           <p:cNvSpPr>
             <a:spLocks noGrp="1"/>
           </p:cNvSpPr>
@@ -2344,13 +3380,16 @@
             <p:ph type="dt" sz="half" idx="10"/>
           </p:nvPr>
         </p:nvSpPr>
-        <p:spPr/>
-        <p:txBody>
-          <a:bodyPr/>
-          <a:lstStyle/>
-          <a:p>
+        <p:spPr bwMode="auto"/>
+        <p:txBody>
+          <a:bodyPr/>
+          <a:lstStyle/>
+          <a:p>
+            <a:pPr>
+              <a:defRPr/>
+            </a:pPr>
             <a:fld id="{C1A0CB4C-5559-475B-830B-093C2DBE2538}" type="datetimeFigureOut">
-              <a:rPr lang="en-US" smtClean="0"/>
+              <a:rPr lang="en-US"/>
               <a:t>1/15/2026</a:t>
             </a:fld>
             <a:endParaRPr lang="en-US"/>
@@ -2359,7 +3398,7 @@
       </p:sp>
       <p:sp>
         <p:nvSpPr>
-          <p:cNvPr id="6" name="Footer Placeholder 5"/>
+          <p:cNvPr id="1801303468" name="Footer Placeholder 5"/>
           <p:cNvSpPr>
             <a:spLocks noGrp="1"/>
           </p:cNvSpPr>
@@ -2367,18 +3406,21 @@
             <p:ph type="ftr" sz="quarter" idx="11"/>
           </p:nvPr>
         </p:nvSpPr>
-        <p:spPr/>
-        <p:txBody>
-          <a:bodyPr/>
-          <a:lstStyle/>
-          <a:p>
-            <a:endParaRPr lang="en-US"/>
-          </a:p>
-        </p:txBody>
-      </p:sp>
-      <p:sp>
-        <p:nvSpPr>
-          <p:cNvPr id="7" name="Slide Number Placeholder 6"/>
+        <p:spPr bwMode="auto"/>
+        <p:txBody>
+          <a:bodyPr/>
+          <a:lstStyle/>
+          <a:p>
+            <a:pPr>
+              <a:defRPr/>
+            </a:pPr>
+            <a:endParaRPr lang="en-US"/>
+          </a:p>
+        </p:txBody>
+      </p:sp>
+      <p:sp>
+        <p:nvSpPr>
+          <p:cNvPr id="1538658123" name="Slide Number Placeholder 6"/>
           <p:cNvSpPr>
             <a:spLocks noGrp="1"/>
           </p:cNvSpPr>
@@ -2386,13 +3428,16 @@
             <p:ph type="sldNum" sz="quarter" idx="12"/>
           </p:nvPr>
         </p:nvSpPr>
-        <p:spPr/>
-        <p:txBody>
-          <a:bodyPr/>
-          <a:lstStyle/>
-          <a:p>
+        <p:spPr bwMode="auto"/>
+        <p:txBody>
+          <a:bodyPr/>
+          <a:lstStyle/>
+          <a:p>
+            <a:pPr>
+              <a:defRPr/>
+            </a:pPr>
             <a:fld id="{16EEFF7F-0A2A-489A-9962-FBDAE4758270}" type="slidenum">
-              <a:rPr lang="en-US" smtClean="0"/>
+              <a:rPr lang="en-US"/>
               <a:t>‹#›</a:t>
             </a:fld>
             <a:endParaRPr lang="en-US"/>
@@ -2400,11 +3445,6 @@
         </p:txBody>
       </p:sp>
     </p:spTree>
-    <p:extLst>
-      <p:ext uri="{BB962C8B-B14F-4D97-AF65-F5344CB8AC3E}">
-        <p14:creationId xmlns:p14="http://schemas.microsoft.com/office/powerpoint/2010/main" val="2223027837"/>
-      </p:ext>
-    </p:extLst>
   </p:cSld>
   <p:clrMapOvr>
     <a:masterClrMapping/>
@@ -2413,8 +3453,8 @@
 </file>
 
 <file path=ppt/slideMasters/slideMaster1.xml><?xml version="1.0" encoding="utf-8"?>
-<p:sldMaster xmlns:a="http://schemas.openxmlformats.org/drawingml/2006/main" xmlns:r="http://schemas.openxmlformats.org/officeDocument/2006/relationships" xmlns:p="http://schemas.openxmlformats.org/presentationml/2006/main">
-  <p:cSld>
+<p:sldMaster xmlns:a="http://schemas.openxmlformats.org/drawingml/2006/main" xmlns:r="http://schemas.openxmlformats.org/officeDocument/2006/relationships" xmlns:p="http://schemas.openxmlformats.org/presentationml/2006/main" xmlns:m="http://schemas.openxmlformats.org/officeDocument/2006/math" xmlns:w="http://schemas.openxmlformats.org/wordprocessingml/2006/main" preserve="0">
+  <p:cSld name="">
     <p:bg>
       <p:bgRef idx="1001">
         <a:schemeClr val="bg1"/>
@@ -2426,7 +3466,7 @@
         <p:cNvGrpSpPr/>
         <p:nvPr/>
       </p:nvGrpSpPr>
-      <p:grpSpPr>
+      <p:grpSpPr bwMode="auto">
         <a:xfrm>
           <a:off x="0" y="0"/>
           <a:ext cx="0" cy="0"/>
@@ -2436,7 +3476,7 @@
       </p:grpSpPr>
       <p:sp>
         <p:nvSpPr>
-          <p:cNvPr id="2" name="Title Placeholder 1"/>
+          <p:cNvPr id="1871521355" name="Title Placeholder 1"/>
           <p:cNvSpPr>
             <a:spLocks noGrp="1"/>
           </p:cNvSpPr>
@@ -2444,7 +3484,7 @@
             <p:ph type="title"/>
           </p:nvPr>
         </p:nvSpPr>
-        <p:spPr>
+        <p:spPr bwMode="auto">
           <a:xfrm>
             <a:off x="838200" y="365125"/>
             <a:ext cx="10515600" cy="1325563"/>
@@ -2459,8 +3499,11 @@
           </a:bodyPr>
           <a:lstStyle/>
           <a:p>
-            <a:r>
-              <a:rPr lang="en-US" smtClean="0"/>
+            <a:pPr>
+              <a:defRPr/>
+            </a:pPr>
+            <a:r>
+              <a:rPr lang="en-US"/>
               <a:t>Click to edit Master title style</a:t>
             </a:r>
             <a:endParaRPr lang="en-US"/>
@@ -2469,7 +3512,7 @@
       </p:sp>
       <p:sp>
         <p:nvSpPr>
-          <p:cNvPr id="3" name="Text Placeholder 2"/>
+          <p:cNvPr id="1213675563" name="Text Placeholder 2"/>
           <p:cNvSpPr>
             <a:spLocks noGrp="1"/>
           </p:cNvSpPr>
@@ -2477,7 +3520,7 @@
             <p:ph type="body" idx="1"/>
           </p:nvPr>
         </p:nvSpPr>
-        <p:spPr>
+        <p:spPr bwMode="auto">
           <a:xfrm>
             <a:off x="838200" y="1825625"/>
             <a:ext cx="10515600" cy="4351338"/>
@@ -2492,37 +3535,51 @@
           </a:bodyPr>
           <a:lstStyle/>
           <a:p>
-            <a:pPr lvl="0"/>
-            <a:r>
-              <a:rPr lang="en-US" smtClean="0"/>
+            <a:pPr lvl="0">
+              <a:defRPr/>
+            </a:pPr>
+            <a:r>
+              <a:rPr lang="en-US"/>
               <a:t>Edit Master text styles</a:t>
             </a:r>
-          </a:p>
-          <a:p>
-            <a:pPr lvl="1"/>
-            <a:r>
-              <a:rPr lang="en-US" smtClean="0"/>
+            <a:endParaRPr/>
+          </a:p>
+          <a:p>
+            <a:pPr lvl="1">
+              <a:defRPr/>
+            </a:pPr>
+            <a:r>
+              <a:rPr lang="en-US"/>
               <a:t>Second level</a:t>
             </a:r>
-          </a:p>
-          <a:p>
-            <a:pPr lvl="2"/>
-            <a:r>
-              <a:rPr lang="en-US" smtClean="0"/>
+            <a:endParaRPr/>
+          </a:p>
+          <a:p>
+            <a:pPr lvl="2">
+              <a:defRPr/>
+            </a:pPr>
+            <a:r>
+              <a:rPr lang="en-US"/>
               <a:t>Third level</a:t>
             </a:r>
-          </a:p>
-          <a:p>
-            <a:pPr lvl="3"/>
-            <a:r>
-              <a:rPr lang="en-US" smtClean="0"/>
+            <a:endParaRPr/>
+          </a:p>
+          <a:p>
+            <a:pPr lvl="3">
+              <a:defRPr/>
+            </a:pPr>
+            <a:r>
+              <a:rPr lang="en-US"/>
               <a:t>Fourth level</a:t>
             </a:r>
-          </a:p>
-          <a:p>
-            <a:pPr lvl="4"/>
-            <a:r>
-              <a:rPr lang="en-US" smtClean="0"/>
+            <a:endParaRPr/>
+          </a:p>
+          <a:p>
+            <a:pPr lvl="4">
+              <a:defRPr/>
+            </a:pPr>
+            <a:r>
+              <a:rPr lang="en-US"/>
               <a:t>Fifth level</a:t>
             </a:r>
             <a:endParaRPr lang="en-US"/>
@@ -2531,7 +3588,7 @@
       </p:sp>
       <p:sp>
         <p:nvSpPr>
-          <p:cNvPr id="4" name="Date Placeholder 3"/>
+          <p:cNvPr id="221871589" name="Date Placeholder 3"/>
           <p:cNvSpPr>
             <a:spLocks noGrp="1"/>
           </p:cNvSpPr>
@@ -2539,7 +3596,7 @@
             <p:ph type="dt" sz="half" idx="2"/>
           </p:nvPr>
         </p:nvSpPr>
-        <p:spPr>
+        <p:spPr bwMode="auto">
           <a:xfrm>
             <a:off x="838200" y="6356350"/>
             <a:ext cx="2743200" cy="365125"/>
@@ -2562,8 +3619,11 @@
             </a:lvl1pPr>
           </a:lstStyle>
           <a:p>
+            <a:pPr>
+              <a:defRPr/>
+            </a:pPr>
             <a:fld id="{C1A0CB4C-5559-475B-830B-093C2DBE2538}" type="datetimeFigureOut">
-              <a:rPr lang="en-US" smtClean="0"/>
+              <a:rPr lang="en-US"/>
               <a:t>1/15/2026</a:t>
             </a:fld>
             <a:endParaRPr lang="en-US"/>
@@ -2572,7 +3632,7 @@
       </p:sp>
       <p:sp>
         <p:nvSpPr>
-          <p:cNvPr id="5" name="Footer Placeholder 4"/>
+          <p:cNvPr id="1255010261" name="Footer Placeholder 4"/>
           <p:cNvSpPr>
             <a:spLocks noGrp="1"/>
           </p:cNvSpPr>
@@ -2580,7 +3640,7 @@
             <p:ph type="ftr" sz="quarter" idx="3"/>
           </p:nvPr>
         </p:nvSpPr>
-        <p:spPr>
+        <p:spPr bwMode="auto">
           <a:xfrm>
             <a:off x="4038600" y="6356350"/>
             <a:ext cx="4114800" cy="365125"/>
@@ -2603,13 +3663,16 @@
             </a:lvl1pPr>
           </a:lstStyle>
           <a:p>
-            <a:endParaRPr lang="en-US"/>
-          </a:p>
-        </p:txBody>
-      </p:sp>
-      <p:sp>
-        <p:nvSpPr>
-          <p:cNvPr id="6" name="Slide Number Placeholder 5"/>
+            <a:pPr>
+              <a:defRPr/>
+            </a:pPr>
+            <a:endParaRPr lang="en-US"/>
+          </a:p>
+        </p:txBody>
+      </p:sp>
+      <p:sp>
+        <p:nvSpPr>
+          <p:cNvPr id="2018499111" name="Slide Number Placeholder 5"/>
           <p:cNvSpPr>
             <a:spLocks noGrp="1"/>
           </p:cNvSpPr>
@@ -2617,7 +3680,7 @@
             <p:ph type="sldNum" sz="quarter" idx="4"/>
           </p:nvPr>
         </p:nvSpPr>
-        <p:spPr>
+        <p:spPr bwMode="auto">
           <a:xfrm>
             <a:off x="8610600" y="6356350"/>
             <a:ext cx="2743200" cy="365125"/>
@@ -2640,8 +3703,11 @@
             </a:lvl1pPr>
           </a:lstStyle>
           <a:p>
+            <a:pPr>
+              <a:defRPr/>
+            </a:pPr>
             <a:fld id="{16EEFF7F-0A2A-489A-9962-FBDAE4758270}" type="slidenum">
-              <a:rPr lang="en-US" smtClean="0"/>
+              <a:rPr lang="en-US"/>
               <a:t>‹#›</a:t>
             </a:fld>
             <a:endParaRPr lang="en-US"/>
@@ -2649,11 +3715,6 @@
         </p:txBody>
       </p:sp>
     </p:spTree>
-    <p:extLst>
-      <p:ext uri="{BB962C8B-B14F-4D97-AF65-F5344CB8AC3E}">
-        <p14:creationId xmlns:p14="http://schemas.microsoft.com/office/powerpoint/2010/main" val="3720672291"/>
-      </p:ext>
-    </p:extLst>
   </p:cSld>
   <p:clrMap bg1="lt1" tx1="dk1" bg2="lt2" tx2="dk2" accent1="accent1" accent2="accent2" accent3="accent3" accent4="accent4" accent5="accent5" accent6="accent6" hlink="hlink" folHlink="folHlink"/>
   <p:sldLayoutIdLst>
@@ -2671,15 +3732,15 @@
   </p:sldLayoutIdLst>
   <p:txStyles>
     <p:titleStyle>
-      <a:lvl1pPr algn="l" defTabSz="914400" rtl="0" eaLnBrk="1" latinLnBrk="0" hangingPunct="1">
+      <a:lvl1pPr algn="l" defTabSz="914400" rtl="0">
         <a:lnSpc>
           <a:spcPct val="90000"/>
         </a:lnSpc>
         <a:spcBef>
-          <a:spcPct val="0"/>
+          <a:spcPts val="0"/>
         </a:spcBef>
         <a:buNone/>
-        <a:defRPr sz="4400" kern="1200">
+        <a:defRPr sz="4400">
           <a:solidFill>
             <a:schemeClr val="tx1"/>
           </a:solidFill>
@@ -2690,16 +3751,16 @@
       </a:lvl1pPr>
     </p:titleStyle>
     <p:bodyStyle>
-      <a:lvl1pPr marL="228600" indent="-228600" algn="l" defTabSz="914400" rtl="0" eaLnBrk="1" latinLnBrk="0" hangingPunct="1">
+      <a:lvl1pPr marL="228600" indent="-228600" algn="l" defTabSz="914400" rtl="0">
         <a:lnSpc>
           <a:spcPct val="90000"/>
         </a:lnSpc>
         <a:spcBef>
           <a:spcPts val="1000"/>
         </a:spcBef>
-        <a:buFont typeface="Arial" panose="020B0604020202020204" pitchFamily="34" charset="0"/>
+        <a:buFont typeface="Arial"/>
         <a:buChar char="•"/>
-        <a:defRPr sz="2800" kern="1200">
+        <a:defRPr sz="2800">
           <a:solidFill>
             <a:schemeClr val="tx1"/>
           </a:solidFill>
@@ -2708,16 +3769,16 @@
           <a:cs typeface="+mn-cs"/>
         </a:defRPr>
       </a:lvl1pPr>
-      <a:lvl2pPr marL="685800" indent="-228600" algn="l" defTabSz="914400" rtl="0" eaLnBrk="1" latinLnBrk="0" hangingPunct="1">
+      <a:lvl2pPr marL="685800" indent="-228600" algn="l" defTabSz="914400" rtl="0">
         <a:lnSpc>
           <a:spcPct val="90000"/>
         </a:lnSpc>
         <a:spcBef>
           <a:spcPts val="500"/>
         </a:spcBef>
-        <a:buFont typeface="Arial" panose="020B0604020202020204" pitchFamily="34" charset="0"/>
+        <a:buFont typeface="Arial"/>
         <a:buChar char="•"/>
-        <a:defRPr sz="2400" kern="1200">
+        <a:defRPr sz="2400">
           <a:solidFill>
             <a:schemeClr val="tx1"/>
           </a:solidFill>
@@ -2726,16 +3787,16 @@
           <a:cs typeface="+mn-cs"/>
         </a:defRPr>
       </a:lvl2pPr>
-      <a:lvl3pPr marL="1143000" indent="-228600" algn="l" defTabSz="914400" rtl="0" eaLnBrk="1" latinLnBrk="0" hangingPunct="1">
+      <a:lvl3pPr marL="1143000" indent="-228600" algn="l" defTabSz="914400" rtl="0">
         <a:lnSpc>
           <a:spcPct val="90000"/>
         </a:lnSpc>
         <a:spcBef>
           <a:spcPts val="500"/>
         </a:spcBef>
-        <a:buFont typeface="Arial" panose="020B0604020202020204" pitchFamily="34" charset="0"/>
+        <a:buFont typeface="Arial"/>
         <a:buChar char="•"/>
-        <a:defRPr sz="2000" kern="1200">
+        <a:defRPr sz="2000">
           <a:solidFill>
             <a:schemeClr val="tx1"/>
           </a:solidFill>
@@ -2744,16 +3805,16 @@
           <a:cs typeface="+mn-cs"/>
         </a:defRPr>
       </a:lvl3pPr>
-      <a:lvl4pPr marL="1600200" indent="-228600" algn="l" defTabSz="914400" rtl="0" eaLnBrk="1" latinLnBrk="0" hangingPunct="1">
+      <a:lvl4pPr marL="1600200" indent="-228600" algn="l" defTabSz="914400" rtl="0">
         <a:lnSpc>
           <a:spcPct val="90000"/>
         </a:lnSpc>
         <a:spcBef>
           <a:spcPts val="500"/>
         </a:spcBef>
-        <a:buFont typeface="Arial" panose="020B0604020202020204" pitchFamily="34" charset="0"/>
+        <a:buFont typeface="Arial"/>
         <a:buChar char="•"/>
-        <a:defRPr sz="1800" kern="1200">
+        <a:defRPr sz="1800">
           <a:solidFill>
             <a:schemeClr val="tx1"/>
           </a:solidFill>
@@ -2762,16 +3823,16 @@
           <a:cs typeface="+mn-cs"/>
         </a:defRPr>
       </a:lvl4pPr>
-      <a:lvl5pPr marL="2057400" indent="-228600" algn="l" defTabSz="914400" rtl="0" eaLnBrk="1" latinLnBrk="0" hangingPunct="1">
+      <a:lvl5pPr marL="2057400" indent="-228600" algn="l" defTabSz="914400" rtl="0">
         <a:lnSpc>
           <a:spcPct val="90000"/>
         </a:lnSpc>
         <a:spcBef>
           <a:spcPts val="500"/>
         </a:spcBef>
-        <a:buFont typeface="Arial" panose="020B0604020202020204" pitchFamily="34" charset="0"/>
+        <a:buFont typeface="Arial"/>
         <a:buChar char="•"/>
-        <a:defRPr sz="1800" kern="1200">
+        <a:defRPr sz="1800">
           <a:solidFill>
             <a:schemeClr val="tx1"/>
           </a:solidFill>
@@ -2780,16 +3841,16 @@
           <a:cs typeface="+mn-cs"/>
         </a:defRPr>
       </a:lvl5pPr>
-      <a:lvl6pPr marL="2514600" indent="-228600" algn="l" defTabSz="914400" rtl="0" eaLnBrk="1" latinLnBrk="0" hangingPunct="1">
+      <a:lvl6pPr marL="2514600" indent="-228600" algn="l" defTabSz="914400" rtl="0">
         <a:lnSpc>
           <a:spcPct val="90000"/>
         </a:lnSpc>
         <a:spcBef>
           <a:spcPts val="500"/>
         </a:spcBef>
-        <a:buFont typeface="Arial" panose="020B0604020202020204" pitchFamily="34" charset="0"/>
+        <a:buFont typeface="Arial"/>
         <a:buChar char="•"/>
-        <a:defRPr sz="1800" kern="1200">
+        <a:defRPr sz="1800">
           <a:solidFill>
             <a:schemeClr val="tx1"/>
           </a:solidFill>
@@ -2798,16 +3859,16 @@
           <a:cs typeface="+mn-cs"/>
         </a:defRPr>
       </a:lvl6pPr>
-      <a:lvl7pPr marL="2971800" indent="-228600" algn="l" defTabSz="914400" rtl="0" eaLnBrk="1" latinLnBrk="0" hangingPunct="1">
+      <a:lvl7pPr marL="2971800" indent="-228600" algn="l" defTabSz="914400" rtl="0">
         <a:lnSpc>
           <a:spcPct val="90000"/>
         </a:lnSpc>
         <a:spcBef>
           <a:spcPts val="500"/>
         </a:spcBef>
-        <a:buFont typeface="Arial" panose="020B0604020202020204" pitchFamily="34" charset="0"/>
+        <a:buFont typeface="Arial"/>
         <a:buChar char="•"/>
-        <a:defRPr sz="1800" kern="1200">
+        <a:defRPr sz="1800">
           <a:solidFill>
             <a:schemeClr val="tx1"/>
           </a:solidFill>
@@ -2816,16 +3877,16 @@
           <a:cs typeface="+mn-cs"/>
         </a:defRPr>
       </a:lvl7pPr>
-      <a:lvl8pPr marL="3429000" indent="-228600" algn="l" defTabSz="914400" rtl="0" eaLnBrk="1" latinLnBrk="0" hangingPunct="1">
+      <a:lvl8pPr marL="3429000" indent="-228600" algn="l" defTabSz="914400" rtl="0">
         <a:lnSpc>
           <a:spcPct val="90000"/>
         </a:lnSpc>
         <a:spcBef>
           <a:spcPts val="500"/>
         </a:spcBef>
-        <a:buFont typeface="Arial" panose="020B0604020202020204" pitchFamily="34" charset="0"/>
+        <a:buFont typeface="Arial"/>
         <a:buChar char="•"/>
-        <a:defRPr sz="1800" kern="1200">
+        <a:defRPr sz="1800">
           <a:solidFill>
             <a:schemeClr val="tx1"/>
           </a:solidFill>
@@ -2834,16 +3895,16 @@
           <a:cs typeface="+mn-cs"/>
         </a:defRPr>
       </a:lvl8pPr>
-      <a:lvl9pPr marL="3886200" indent="-228600" algn="l" defTabSz="914400" rtl="0" eaLnBrk="1" latinLnBrk="0" hangingPunct="1">
+      <a:lvl9pPr marL="3886200" indent="-228600" algn="l" defTabSz="914400" rtl="0">
         <a:lnSpc>
           <a:spcPct val="90000"/>
         </a:lnSpc>
         <a:spcBef>
           <a:spcPts val="500"/>
         </a:spcBef>
-        <a:buFont typeface="Arial" panose="020B0604020202020204" pitchFamily="34" charset="0"/>
+        <a:buFont typeface="Arial"/>
         <a:buChar char="•"/>
-        <a:defRPr sz="1800" kern="1200">
+        <a:defRPr sz="1800">
           <a:solidFill>
             <a:schemeClr val="tx1"/>
           </a:solidFill>
@@ -2857,8 +3918,8 @@
       <a:defPPr>
         <a:defRPr lang="en-US"/>
       </a:defPPr>
-      <a:lvl1pPr marL="0" algn="l" defTabSz="914400" rtl="0" eaLnBrk="1" latinLnBrk="0" hangingPunct="1">
-        <a:defRPr sz="1800" kern="1200">
+      <a:lvl1pPr marL="0" algn="l" defTabSz="914400" rtl="0">
+        <a:defRPr sz="1800">
           <a:solidFill>
             <a:schemeClr val="tx1"/>
           </a:solidFill>
@@ -2867,8 +3928,8 @@
           <a:cs typeface="+mn-cs"/>
         </a:defRPr>
       </a:lvl1pPr>
-      <a:lvl2pPr marL="457200" algn="l" defTabSz="914400" rtl="0" eaLnBrk="1" latinLnBrk="0" hangingPunct="1">
-        <a:defRPr sz="1800" kern="1200">
+      <a:lvl2pPr marL="457200" algn="l" defTabSz="914400" rtl="0">
+        <a:defRPr sz="1800">
           <a:solidFill>
             <a:schemeClr val="tx1"/>
           </a:solidFill>
@@ -2877,8 +3938,8 @@
           <a:cs typeface="+mn-cs"/>
         </a:defRPr>
       </a:lvl2pPr>
-      <a:lvl3pPr marL="914400" algn="l" defTabSz="914400" rtl="0" eaLnBrk="1" latinLnBrk="0" hangingPunct="1">
-        <a:defRPr sz="1800" kern="1200">
+      <a:lvl3pPr marL="914400" algn="l" defTabSz="914400" rtl="0">
+        <a:defRPr sz="1800">
           <a:solidFill>
             <a:schemeClr val="tx1"/>
           </a:solidFill>
@@ -2887,8 +3948,8 @@
           <a:cs typeface="+mn-cs"/>
         </a:defRPr>
       </a:lvl3pPr>
-      <a:lvl4pPr marL="1371600" algn="l" defTabSz="914400" rtl="0" eaLnBrk="1" latinLnBrk="0" hangingPunct="1">
-        <a:defRPr sz="1800" kern="1200">
+      <a:lvl4pPr marL="1371600" algn="l" defTabSz="914400" rtl="0">
+        <a:defRPr sz="1800">
           <a:solidFill>
             <a:schemeClr val="tx1"/>
           </a:solidFill>
@@ -2897,8 +3958,8 @@
           <a:cs typeface="+mn-cs"/>
         </a:defRPr>
       </a:lvl4pPr>
-      <a:lvl5pPr marL="1828800" algn="l" defTabSz="914400" rtl="0" eaLnBrk="1" latinLnBrk="0" hangingPunct="1">
-        <a:defRPr sz="1800" kern="1200">
+      <a:lvl5pPr marL="1828800" algn="l" defTabSz="914400" rtl="0">
+        <a:defRPr sz="1800">
           <a:solidFill>
             <a:schemeClr val="tx1"/>
           </a:solidFill>
@@ -2907,8 +3968,8 @@
           <a:cs typeface="+mn-cs"/>
         </a:defRPr>
       </a:lvl5pPr>
-      <a:lvl6pPr marL="2286000" algn="l" defTabSz="914400" rtl="0" eaLnBrk="1" latinLnBrk="0" hangingPunct="1">
-        <a:defRPr sz="1800" kern="1200">
+      <a:lvl6pPr marL="2286000" algn="l" defTabSz="914400" rtl="0">
+        <a:defRPr sz="1800">
           <a:solidFill>
             <a:schemeClr val="tx1"/>
           </a:solidFill>
@@ -2917,8 +3978,8 @@
           <a:cs typeface="+mn-cs"/>
         </a:defRPr>
       </a:lvl6pPr>
-      <a:lvl7pPr marL="2743200" algn="l" defTabSz="914400" rtl="0" eaLnBrk="1" latinLnBrk="0" hangingPunct="1">
-        <a:defRPr sz="1800" kern="1200">
+      <a:lvl7pPr marL="2743200" algn="l" defTabSz="914400" rtl="0">
+        <a:defRPr sz="1800">
           <a:solidFill>
             <a:schemeClr val="tx1"/>
           </a:solidFill>
@@ -2927,8 +3988,8 @@
           <a:cs typeface="+mn-cs"/>
         </a:defRPr>
       </a:lvl7pPr>
-      <a:lvl8pPr marL="3200400" algn="l" defTabSz="914400" rtl="0" eaLnBrk="1" latinLnBrk="0" hangingPunct="1">
-        <a:defRPr sz="1800" kern="1200">
+      <a:lvl8pPr marL="3200400" algn="l" defTabSz="914400" rtl="0">
+        <a:defRPr sz="1800">
           <a:solidFill>
             <a:schemeClr val="tx1"/>
           </a:solidFill>
@@ -2937,8 +3998,8 @@
           <a:cs typeface="+mn-cs"/>
         </a:defRPr>
       </a:lvl8pPr>
-      <a:lvl9pPr marL="3657600" algn="l" defTabSz="914400" rtl="0" eaLnBrk="1" latinLnBrk="0" hangingPunct="1">
-        <a:defRPr sz="1800" kern="1200">
+      <a:lvl9pPr marL="3657600" algn="l" defTabSz="914400" rtl="0">
+        <a:defRPr sz="1800">
           <a:solidFill>
             <a:schemeClr val="tx1"/>
           </a:solidFill>
@@ -2953,15 +4014,15 @@
 </file>
 
 <file path=ppt/slides/slide1.xml><?xml version="1.0" encoding="utf-8"?>
-<p:sld xmlns:a="http://schemas.openxmlformats.org/drawingml/2006/main" xmlns:r="http://schemas.openxmlformats.org/officeDocument/2006/relationships" xmlns:p="http://schemas.openxmlformats.org/presentationml/2006/main">
-  <p:cSld>
+<p:sld xmlns:a="http://schemas.openxmlformats.org/drawingml/2006/main" xmlns:r="http://schemas.openxmlformats.org/officeDocument/2006/relationships" xmlns:p="http://schemas.openxmlformats.org/presentationml/2006/main" xmlns:m="http://schemas.openxmlformats.org/officeDocument/2006/math" xmlns:w="http://schemas.openxmlformats.org/wordprocessingml/2006/main" xmlns:mc="http://schemas.openxmlformats.org/markup-compatibility/2006" showMasterPhAnim="0" showMasterSp="1" show="1">
+  <p:cSld name="">
     <p:spTree>
       <p:nvGrpSpPr>
         <p:cNvPr id="1" name=""/>
         <p:cNvGrpSpPr/>
         <p:nvPr/>
       </p:nvGrpSpPr>
-      <p:grpSpPr>
+      <p:grpSpPr bwMode="auto">
         <a:xfrm>
           <a:off x="0" y="0"/>
           <a:ext cx="0" cy="0"/>
@@ -2971,7 +4032,7 @@
       </p:grpSpPr>
       <p:sp>
         <p:nvSpPr>
-          <p:cNvPr id="2" name="Title 1"/>
+          <p:cNvPr id="972622786" name="Title 1"/>
           <p:cNvSpPr>
             <a:spLocks noGrp="1"/>
           </p:cNvSpPr>
@@ -2979,18 +4040,21 @@
             <p:ph type="ctrTitle"/>
           </p:nvPr>
         </p:nvSpPr>
-        <p:spPr/>
-        <p:txBody>
-          <a:bodyPr/>
-          <a:lstStyle/>
-          <a:p>
-            <a:endParaRPr lang="en-US"/>
-          </a:p>
-        </p:txBody>
-      </p:sp>
-      <p:sp>
-        <p:nvSpPr>
-          <p:cNvPr id="3" name="Subtitle 2"/>
+        <p:spPr bwMode="auto"/>
+        <p:txBody>
+          <a:bodyPr/>
+          <a:lstStyle/>
+          <a:p>
+            <a:pPr>
+              <a:defRPr/>
+            </a:pPr>
+            <a:endParaRPr lang="en-US"/>
+          </a:p>
+        </p:txBody>
+      </p:sp>
+      <p:sp>
+        <p:nvSpPr>
+          <p:cNvPr id="446722359" name="Subtitle 2"/>
           <p:cNvSpPr>
             <a:spLocks noGrp="1"/>
           </p:cNvSpPr>
@@ -2998,30 +4062,31 @@
             <p:ph type="subTitle" idx="1"/>
           </p:nvPr>
         </p:nvSpPr>
-        <p:spPr/>
-        <p:txBody>
-          <a:bodyPr/>
-          <a:lstStyle/>
-          <a:p>
+        <p:spPr bwMode="auto"/>
+        <p:txBody>
+          <a:bodyPr/>
+          <a:lstStyle/>
+          <a:p>
+            <a:pPr>
+              <a:defRPr/>
+            </a:pPr>
             <a:endParaRPr lang="en-US"/>
           </a:p>
         </p:txBody>
       </p:sp>
       <p:pic>
         <p:nvPicPr>
-          <p:cNvPr id="6" name="Picture 5"/>
+          <p:cNvPr id="915030931" name="Picture 5"/>
           <p:cNvPicPr>
             <a:picLocks noChangeAspect="1"/>
           </p:cNvPicPr>
           <p:nvPr/>
         </p:nvPicPr>
-        <p:blipFill>
-          <a:blip r:embed="rId2"/>
-          <a:stretch>
-            <a:fillRect/>
-          </a:stretch>
+        <p:blipFill rotWithShape="1">
+          <a:blip r:embed="rId3"/>
+          <a:stretch/>
         </p:blipFill>
-        <p:spPr>
+        <p:spPr bwMode="auto">
           <a:xfrm>
             <a:off x="649361" y="454717"/>
             <a:ext cx="11082391" cy="6294641"/>
@@ -3032,28 +4097,31 @@
         </p:spPr>
       </p:pic>
     </p:spTree>
-    <p:extLst>
-      <p:ext uri="{BB962C8B-B14F-4D97-AF65-F5344CB8AC3E}">
-        <p14:creationId xmlns:p14="http://schemas.microsoft.com/office/powerpoint/2010/main" val="2750499249"/>
-      </p:ext>
-    </p:extLst>
   </p:cSld>
   <p:clrMapOvr>
     <a:masterClrMapping/>
   </p:clrMapOvr>
+  <mc:AlternateContent xmlns:mc="http://schemas.openxmlformats.org/markup-compatibility/2006">
+    <mc:Choice xmlns:p159="http://schemas.microsoft.com/office/powerpoint/2015/09/main" xmlns:p14="http://schemas.microsoft.com/office/powerpoint/2010/main" Requires="p159">
+      <p:transition p14:dur="500" advClick="1"/>
+    </mc:Choice>
+    <mc:Fallback>
+      <p:transition advClick="1"/>
+    </mc:Fallback>
+  </mc:AlternateContent>
 </p:sld>
 </file>
 
 <file path=ppt/slides/slide2.xml><?xml version="1.0" encoding="utf-8"?>
-<p:sld xmlns:a="http://schemas.openxmlformats.org/drawingml/2006/main" xmlns:r="http://schemas.openxmlformats.org/officeDocument/2006/relationships" xmlns:p="http://schemas.openxmlformats.org/presentationml/2006/main">
-  <p:cSld>
+<p:sld xmlns:a="http://schemas.openxmlformats.org/drawingml/2006/main" xmlns:r="http://schemas.openxmlformats.org/officeDocument/2006/relationships" xmlns:p="http://schemas.openxmlformats.org/presentationml/2006/main" xmlns:m="http://schemas.openxmlformats.org/officeDocument/2006/math" xmlns:w="http://schemas.openxmlformats.org/wordprocessingml/2006/main" xmlns:mc="http://schemas.openxmlformats.org/markup-compatibility/2006" showMasterPhAnim="0" showMasterSp="1" show="1">
+  <p:cSld name="">
     <p:spTree>
       <p:nvGrpSpPr>
         <p:cNvPr id="1" name=""/>
         <p:cNvGrpSpPr/>
         <p:nvPr/>
       </p:nvGrpSpPr>
-      <p:grpSpPr>
+      <p:grpSpPr bwMode="auto">
         <a:xfrm>
           <a:off x="0" y="0"/>
           <a:ext cx="0" cy="0"/>
@@ -3061,61 +4129,21 @@
           <a:chExt cx="0" cy="0"/>
         </a:xfrm>
       </p:grpSpPr>
-      <p:sp>
-        <p:nvSpPr>
-          <p:cNvPr id="2" name="Title 1"/>
-          <p:cNvSpPr>
-            <a:spLocks noGrp="1"/>
-          </p:cNvSpPr>
-          <p:nvPr>
-            <p:ph type="title"/>
-          </p:nvPr>
-        </p:nvSpPr>
-        <p:spPr/>
-        <p:txBody>
-          <a:bodyPr/>
-          <a:lstStyle/>
-          <a:p>
-            <a:endParaRPr lang="en-US"/>
-          </a:p>
-        </p:txBody>
-      </p:sp>
-      <p:sp>
-        <p:nvSpPr>
-          <p:cNvPr id="3" name="Content Placeholder 2"/>
-          <p:cNvSpPr>
-            <a:spLocks noGrp="1"/>
-          </p:cNvSpPr>
-          <p:nvPr>
-            <p:ph idx="1"/>
-          </p:nvPr>
-        </p:nvSpPr>
-        <p:spPr/>
-        <p:txBody>
-          <a:bodyPr/>
-          <a:lstStyle/>
-          <a:p>
-            <a:endParaRPr lang="en-US"/>
-          </a:p>
-        </p:txBody>
-      </p:sp>
       <p:pic>
         <p:nvPicPr>
-          <p:cNvPr id="4" name="Picture 3"/>
+          <p:cNvPr id="365244068" name="Picture 3"/>
           <p:cNvPicPr>
             <a:picLocks noChangeAspect="1"/>
           </p:cNvPicPr>
           <p:nvPr/>
         </p:nvPicPr>
-        <p:blipFill>
-          <a:blip r:embed="rId2"/>
-          <a:stretch>
-            <a:fillRect/>
-          </a:stretch>
+        <p:blipFill rotWithShape="1">
+          <a:blip r:embed="rId3"/>
+          <a:stretch/>
         </p:blipFill>
-        <p:spPr>
+        <p:spPr bwMode="auto">
           <a:xfrm>
-            <a:off x="429768" y="161510"/>
+            <a:off x="120205" y="195055"/>
             <a:ext cx="10924032" cy="6467889"/>
           </a:xfrm>
           <a:prstGeom prst="rect">
@@ -3124,28 +4152,31 @@
         </p:spPr>
       </p:pic>
     </p:spTree>
-    <p:extLst>
-      <p:ext uri="{BB962C8B-B14F-4D97-AF65-F5344CB8AC3E}">
-        <p14:creationId xmlns:p14="http://schemas.microsoft.com/office/powerpoint/2010/main" val="1523461164"/>
-      </p:ext>
-    </p:extLst>
   </p:cSld>
   <p:clrMapOvr>
     <a:masterClrMapping/>
   </p:clrMapOvr>
+  <mc:AlternateContent xmlns:mc="http://schemas.openxmlformats.org/markup-compatibility/2006">
+    <mc:Choice xmlns:p159="http://schemas.microsoft.com/office/powerpoint/2015/09/main" xmlns:p14="http://schemas.microsoft.com/office/powerpoint/2010/main" Requires="p159">
+      <p:transition p14:dur="500" advClick="1"/>
+    </mc:Choice>
+    <mc:Fallback>
+      <p:transition advClick="1"/>
+    </mc:Fallback>
+  </mc:AlternateContent>
 </p:sld>
 </file>
 
 <file path=ppt/slides/slide3.xml><?xml version="1.0" encoding="utf-8"?>
-<p:sld xmlns:a="http://schemas.openxmlformats.org/drawingml/2006/main" xmlns:r="http://schemas.openxmlformats.org/officeDocument/2006/relationships" xmlns:p="http://schemas.openxmlformats.org/presentationml/2006/main">
-  <p:cSld>
+<p:sld xmlns:a="http://schemas.openxmlformats.org/drawingml/2006/main" xmlns:r="http://schemas.openxmlformats.org/officeDocument/2006/relationships" xmlns:p="http://schemas.openxmlformats.org/presentationml/2006/main" xmlns:m="http://schemas.openxmlformats.org/officeDocument/2006/math" xmlns:w="http://schemas.openxmlformats.org/wordprocessingml/2006/main" xmlns:mc="http://schemas.openxmlformats.org/markup-compatibility/2006" showMasterPhAnim="0" showMasterSp="1" show="1">
+  <p:cSld name="">
     <p:spTree>
       <p:nvGrpSpPr>
         <p:cNvPr id="1" name=""/>
         <p:cNvGrpSpPr/>
         <p:nvPr/>
       </p:nvGrpSpPr>
-      <p:grpSpPr>
+      <p:grpSpPr bwMode="auto">
         <a:xfrm>
           <a:off x="0" y="0"/>
           <a:ext cx="0" cy="0"/>
@@ -3155,7 +4186,7 @@
       </p:grpSpPr>
       <p:sp>
         <p:nvSpPr>
-          <p:cNvPr id="3" name="Content Placeholder 2"/>
+          <p:cNvPr id="283494622" name="Content Placeholder 2"/>
           <p:cNvSpPr>
             <a:spLocks noGrp="1"/>
           </p:cNvSpPr>
@@ -3163,7 +4194,7 @@
             <p:ph idx="1"/>
           </p:nvPr>
         </p:nvSpPr>
-        <p:spPr>
+        <p:spPr bwMode="auto">
           <a:xfrm>
             <a:off x="3120449" y="0"/>
             <a:ext cx="8324791" cy="1325563"/>
@@ -3173,31 +4204,32 @@
           <a:bodyPr/>
           <a:lstStyle/>
           <a:p>
-            <a:r>
-              <a:rPr lang="en-US" dirty="0" smtClean="0"/>
+            <a:pPr>
+              <a:defRPr/>
+            </a:pPr>
+            <a:r>
+              <a:rPr lang="en-US"/>
               <a:t>This equation is commonly used in optical fiber communication to calculate the critical bending radius of an optical fiber.</a:t>
             </a:r>
-            <a:endParaRPr lang="en-US" dirty="0"/>
+            <a:endParaRPr lang="en-US"/>
           </a:p>
         </p:txBody>
       </p:sp>
       <p:pic>
         <p:nvPicPr>
-          <p:cNvPr id="4" name="Picture 3"/>
+          <p:cNvPr id="1972859448" name="Picture 3"/>
           <p:cNvPicPr>
             <a:picLocks noChangeAspect="1"/>
           </p:cNvPicPr>
           <p:nvPr/>
         </p:nvPicPr>
-        <p:blipFill>
-          <a:blip r:embed="rId2"/>
-          <a:stretch>
-            <a:fillRect/>
-          </a:stretch>
+        <p:blipFill rotWithShape="1">
+          <a:blip r:embed="rId3"/>
+          <a:stretch/>
         </p:blipFill>
-        <p:spPr>
+        <p:spPr bwMode="auto">
           <a:xfrm>
-            <a:off x="396313" y="278488"/>
+            <a:off x="1072573" y="105568"/>
             <a:ext cx="2047875" cy="1114425"/>
           </a:xfrm>
           <a:prstGeom prst="rect">
@@ -3207,21 +4239,19 @@
       </p:pic>
       <p:pic>
         <p:nvPicPr>
-          <p:cNvPr id="5" name="Picture 4"/>
+          <p:cNvPr id="2013312070" name="Picture 4"/>
           <p:cNvPicPr>
             <a:picLocks noChangeAspect="1"/>
           </p:cNvPicPr>
           <p:nvPr/>
         </p:nvPicPr>
-        <p:blipFill>
-          <a:blip r:embed="rId3"/>
-          <a:stretch>
-            <a:fillRect/>
-          </a:stretch>
+        <p:blipFill rotWithShape="1">
+          <a:blip r:embed="rId4"/>
+          <a:stretch/>
         </p:blipFill>
-        <p:spPr>
+        <p:spPr bwMode="auto">
           <a:xfrm>
-            <a:off x="1923170" y="1531046"/>
+            <a:off x="1770769" y="1607245"/>
             <a:ext cx="6954220" cy="5326954"/>
           </a:xfrm>
           <a:prstGeom prst="rect">
@@ -3230,28 +4260,31 @@
         </p:spPr>
       </p:pic>
     </p:spTree>
-    <p:extLst>
-      <p:ext uri="{BB962C8B-B14F-4D97-AF65-F5344CB8AC3E}">
-        <p14:creationId xmlns:p14="http://schemas.microsoft.com/office/powerpoint/2010/main" val="1609414463"/>
-      </p:ext>
-    </p:extLst>
   </p:cSld>
   <p:clrMapOvr>
     <a:masterClrMapping/>
   </p:clrMapOvr>
+  <mc:AlternateContent xmlns:mc="http://schemas.openxmlformats.org/markup-compatibility/2006">
+    <mc:Choice xmlns:p159="http://schemas.microsoft.com/office/powerpoint/2015/09/main" xmlns:p14="http://schemas.microsoft.com/office/powerpoint/2010/main" Requires="p159">
+      <p:transition p14:dur="500" advClick="1"/>
+    </mc:Choice>
+    <mc:Fallback>
+      <p:transition advClick="1"/>
+    </mc:Fallback>
+  </mc:AlternateContent>
 </p:sld>
 </file>
 
 <file path=ppt/slides/slide4.xml><?xml version="1.0" encoding="utf-8"?>
-<p:sld xmlns:a="http://schemas.openxmlformats.org/drawingml/2006/main" xmlns:r="http://schemas.openxmlformats.org/officeDocument/2006/relationships" xmlns:p="http://schemas.openxmlformats.org/presentationml/2006/main">
-  <p:cSld>
+<p:sld xmlns:a="http://schemas.openxmlformats.org/drawingml/2006/main" xmlns:r="http://schemas.openxmlformats.org/officeDocument/2006/relationships" xmlns:p="http://schemas.openxmlformats.org/presentationml/2006/main" xmlns:m="http://schemas.openxmlformats.org/officeDocument/2006/math" xmlns:w="http://schemas.openxmlformats.org/wordprocessingml/2006/main" xmlns:mc="http://schemas.openxmlformats.org/markup-compatibility/2006" showMasterPhAnim="0" showMasterSp="1" show="1">
+  <p:cSld name="">
     <p:spTree>
       <p:nvGrpSpPr>
         <p:cNvPr id="1" name=""/>
         <p:cNvGrpSpPr/>
         <p:nvPr/>
       </p:nvGrpSpPr>
-      <p:grpSpPr>
+      <p:grpSpPr bwMode="auto">
         <a:xfrm>
           <a:off x="0" y="0"/>
           <a:ext cx="0" cy="0"/>
@@ -3261,7 +4294,7 @@
       </p:grpSpPr>
       <p:sp>
         <p:nvSpPr>
-          <p:cNvPr id="3" name="Content Placeholder 2"/>
+          <p:cNvPr id="701245049" name="Content Placeholder 2"/>
           <p:cNvSpPr>
             <a:spLocks noGrp="1"/>
           </p:cNvSpPr>
@@ -3269,7 +4302,7 @@
             <p:ph idx="1"/>
           </p:nvPr>
         </p:nvSpPr>
-        <p:spPr>
+        <p:spPr bwMode="auto">
           <a:xfrm>
             <a:off x="3120449" y="0"/>
             <a:ext cx="8324791" cy="1325563"/>
@@ -3279,31 +4312,32 @@
           <a:bodyPr/>
           <a:lstStyle/>
           <a:p>
-            <a:r>
-              <a:rPr lang="en-US" dirty="0" smtClean="0"/>
+            <a:pPr>
+              <a:defRPr/>
+            </a:pPr>
+            <a:r>
+              <a:rPr lang="en-US"/>
               <a:t>This equation is commonly used in optical fiber communication to calculate the critical bending radius of an optical fiber.</a:t>
             </a:r>
-            <a:endParaRPr lang="en-US" dirty="0"/>
+            <a:endParaRPr lang="en-US"/>
           </a:p>
         </p:txBody>
       </p:sp>
       <p:pic>
         <p:nvPicPr>
-          <p:cNvPr id="4" name="Picture 3"/>
+          <p:cNvPr id="1973888532" name="Picture 3"/>
           <p:cNvPicPr>
             <a:picLocks noChangeAspect="1"/>
           </p:cNvPicPr>
           <p:nvPr/>
         </p:nvPicPr>
-        <p:blipFill>
-          <a:blip r:embed="rId2"/>
-          <a:stretch>
-            <a:fillRect/>
-          </a:stretch>
+        <p:blipFill rotWithShape="1">
+          <a:blip r:embed="rId3"/>
+          <a:stretch/>
         </p:blipFill>
-        <p:spPr>
+        <p:spPr bwMode="auto">
           <a:xfrm>
-            <a:off x="396313" y="278488"/>
+            <a:off x="1253562" y="278487"/>
             <a:ext cx="2047875" cy="1114425"/>
           </a:xfrm>
           <a:prstGeom prst="rect">
@@ -3313,19 +4347,17 @@
       </p:pic>
       <p:pic>
         <p:nvPicPr>
-          <p:cNvPr id="2" name="Picture 1"/>
+          <p:cNvPr id="1736188483" name="Picture 1"/>
           <p:cNvPicPr>
             <a:picLocks noChangeAspect="1"/>
           </p:cNvPicPr>
           <p:nvPr/>
         </p:nvPicPr>
-        <p:blipFill>
-          <a:blip r:embed="rId3"/>
-          <a:stretch>
-            <a:fillRect/>
-          </a:stretch>
+        <p:blipFill rotWithShape="1">
+          <a:blip r:embed="rId4"/>
+          <a:stretch/>
         </p:blipFill>
-        <p:spPr>
+        <p:spPr bwMode="auto">
           <a:xfrm>
             <a:off x="1420250" y="2000990"/>
             <a:ext cx="4991797" cy="3038899"/>
@@ -3336,28 +4368,31 @@
         </p:spPr>
       </p:pic>
     </p:spTree>
-    <p:extLst>
-      <p:ext uri="{BB962C8B-B14F-4D97-AF65-F5344CB8AC3E}">
-        <p14:creationId xmlns:p14="http://schemas.microsoft.com/office/powerpoint/2010/main" val="205979813"/>
-      </p:ext>
-    </p:extLst>
   </p:cSld>
   <p:clrMapOvr>
     <a:masterClrMapping/>
   </p:clrMapOvr>
+  <mc:AlternateContent xmlns:mc="http://schemas.openxmlformats.org/markup-compatibility/2006">
+    <mc:Choice xmlns:p159="http://schemas.microsoft.com/office/powerpoint/2015/09/main" xmlns:p14="http://schemas.microsoft.com/office/powerpoint/2010/main" Requires="p159">
+      <p:transition p14:dur="500" advClick="1"/>
+    </mc:Choice>
+    <mc:Fallback>
+      <p:transition advClick="1"/>
+    </mc:Fallback>
+  </mc:AlternateContent>
 </p:sld>
 </file>
 
 <file path=ppt/slides/slide5.xml><?xml version="1.0" encoding="utf-8"?>
-<p:sld xmlns:a="http://schemas.openxmlformats.org/drawingml/2006/main" xmlns:r="http://schemas.openxmlformats.org/officeDocument/2006/relationships" xmlns:p="http://schemas.openxmlformats.org/presentationml/2006/main">
-  <p:cSld>
+<p:sld xmlns:a="http://schemas.openxmlformats.org/drawingml/2006/main" xmlns:r="http://schemas.openxmlformats.org/officeDocument/2006/relationships" xmlns:p="http://schemas.openxmlformats.org/presentationml/2006/main" xmlns:m="http://schemas.openxmlformats.org/officeDocument/2006/math" xmlns:w="http://schemas.openxmlformats.org/wordprocessingml/2006/main" xmlns:mc="http://schemas.openxmlformats.org/markup-compatibility/2006" showMasterPhAnim="0" showMasterSp="1" show="1">
+  <p:cSld name="">
     <p:spTree>
       <p:nvGrpSpPr>
         <p:cNvPr id="1" name=""/>
         <p:cNvGrpSpPr/>
         <p:nvPr/>
       </p:nvGrpSpPr>
-      <p:grpSpPr>
+      <p:grpSpPr bwMode="auto">
         <a:xfrm>
           <a:off x="0" y="0"/>
           <a:ext cx="0" cy="0"/>
@@ -3365,62 +4400,22 @@
           <a:chExt cx="0" cy="0"/>
         </a:xfrm>
       </p:grpSpPr>
-      <p:sp>
-        <p:nvSpPr>
-          <p:cNvPr id="2" name="Title 1"/>
-          <p:cNvSpPr>
-            <a:spLocks noGrp="1"/>
-          </p:cNvSpPr>
-          <p:nvPr>
-            <p:ph type="title"/>
-          </p:nvPr>
-        </p:nvSpPr>
-        <p:spPr/>
-        <p:txBody>
-          <a:bodyPr/>
-          <a:lstStyle/>
-          <a:p>
-            <a:endParaRPr lang="en-US"/>
-          </a:p>
-        </p:txBody>
-      </p:sp>
-      <p:sp>
-        <p:nvSpPr>
-          <p:cNvPr id="3" name="Content Placeholder 2"/>
-          <p:cNvSpPr>
-            <a:spLocks noGrp="1"/>
-          </p:cNvSpPr>
-          <p:nvPr>
-            <p:ph idx="1"/>
-          </p:nvPr>
-        </p:nvSpPr>
-        <p:spPr/>
-        <p:txBody>
-          <a:bodyPr/>
-          <a:lstStyle/>
-          <a:p>
-            <a:endParaRPr lang="en-US"/>
-          </a:p>
-        </p:txBody>
-      </p:sp>
       <p:pic>
         <p:nvPicPr>
-          <p:cNvPr id="4" name="Picture 3"/>
+          <p:cNvPr id="1097166829" name="Picture 3"/>
           <p:cNvPicPr>
             <a:picLocks noChangeAspect="1"/>
           </p:cNvPicPr>
           <p:nvPr/>
         </p:nvPicPr>
-        <p:blipFill>
-          <a:blip r:embed="rId2"/>
-          <a:stretch>
-            <a:fillRect/>
-          </a:stretch>
+        <p:blipFill rotWithShape="1">
+          <a:blip r:embed="rId3"/>
+          <a:stretch/>
         </p:blipFill>
-        <p:spPr>
-          <a:xfrm>
-            <a:off x="146304" y="0"/>
-            <a:ext cx="10780776" cy="6858000"/>
+        <p:spPr bwMode="auto">
+          <a:xfrm flipH="0" flipV="0">
+            <a:off x="614362" y="85725"/>
+            <a:ext cx="12168187" cy="6858000"/>
           </a:xfrm>
           <a:prstGeom prst="rect">
             <a:avLst/>
@@ -3428,28 +4423,31 @@
         </p:spPr>
       </p:pic>
     </p:spTree>
-    <p:extLst>
-      <p:ext uri="{BB962C8B-B14F-4D97-AF65-F5344CB8AC3E}">
-        <p14:creationId xmlns:p14="http://schemas.microsoft.com/office/powerpoint/2010/main" val="2268615494"/>
-      </p:ext>
-    </p:extLst>
   </p:cSld>
   <p:clrMapOvr>
     <a:masterClrMapping/>
   </p:clrMapOvr>
+  <mc:AlternateContent xmlns:mc="http://schemas.openxmlformats.org/markup-compatibility/2006">
+    <mc:Choice xmlns:p159="http://schemas.microsoft.com/office/powerpoint/2015/09/main" xmlns:p14="http://schemas.microsoft.com/office/powerpoint/2010/main" Requires="p159">
+      <p:transition p14:dur="500" advClick="1"/>
+    </mc:Choice>
+    <mc:Fallback>
+      <p:transition advClick="1"/>
+    </mc:Fallback>
+  </mc:AlternateContent>
 </p:sld>
 </file>
 
 <file path=ppt/slides/slide6.xml><?xml version="1.0" encoding="utf-8"?>
-<p:sld xmlns:a="http://schemas.openxmlformats.org/drawingml/2006/main" xmlns:r="http://schemas.openxmlformats.org/officeDocument/2006/relationships" xmlns:p="http://schemas.openxmlformats.org/presentationml/2006/main">
-  <p:cSld>
+<p:sld xmlns:a="http://schemas.openxmlformats.org/drawingml/2006/main" xmlns:r="http://schemas.openxmlformats.org/officeDocument/2006/relationships" xmlns:p="http://schemas.openxmlformats.org/presentationml/2006/main" xmlns:m="http://schemas.openxmlformats.org/officeDocument/2006/math" xmlns:w="http://schemas.openxmlformats.org/wordprocessingml/2006/main" xmlns:mc="http://schemas.openxmlformats.org/markup-compatibility/2006" showMasterPhAnim="0" showMasterSp="1" show="1">
+  <p:cSld name="">
     <p:spTree>
       <p:nvGrpSpPr>
         <p:cNvPr id="1" name=""/>
         <p:cNvGrpSpPr/>
         <p:nvPr/>
       </p:nvGrpSpPr>
-      <p:grpSpPr>
+      <p:grpSpPr bwMode="auto">
         <a:xfrm>
           <a:off x="0" y="0"/>
           <a:ext cx="0" cy="0"/>
@@ -3457,62 +4455,22 @@
           <a:chExt cx="0" cy="0"/>
         </a:xfrm>
       </p:grpSpPr>
-      <p:sp>
-        <p:nvSpPr>
-          <p:cNvPr id="2" name="Title 1"/>
-          <p:cNvSpPr>
-            <a:spLocks noGrp="1"/>
-          </p:cNvSpPr>
-          <p:nvPr>
-            <p:ph type="title"/>
-          </p:nvPr>
-        </p:nvSpPr>
-        <p:spPr/>
-        <p:txBody>
-          <a:bodyPr/>
-          <a:lstStyle/>
-          <a:p>
-            <a:endParaRPr lang="en-US"/>
-          </a:p>
-        </p:txBody>
-      </p:sp>
-      <p:sp>
-        <p:nvSpPr>
-          <p:cNvPr id="3" name="Content Placeholder 2"/>
-          <p:cNvSpPr>
-            <a:spLocks noGrp="1"/>
-          </p:cNvSpPr>
-          <p:nvPr>
-            <p:ph idx="1"/>
-          </p:nvPr>
-        </p:nvSpPr>
-        <p:spPr/>
-        <p:txBody>
-          <a:bodyPr/>
-          <a:lstStyle/>
-          <a:p>
-            <a:endParaRPr lang="en-US"/>
-          </a:p>
-        </p:txBody>
-      </p:sp>
       <p:pic>
         <p:nvPicPr>
-          <p:cNvPr id="4" name="Picture 3"/>
+          <p:cNvPr id="227435026" name="Picture 3"/>
           <p:cNvPicPr>
             <a:picLocks noChangeAspect="1"/>
           </p:cNvPicPr>
           <p:nvPr/>
         </p:nvPicPr>
-        <p:blipFill>
-          <a:blip r:embed="rId2"/>
-          <a:stretch>
-            <a:fillRect/>
-          </a:stretch>
+        <p:blipFill rotWithShape="1">
+          <a:blip r:embed="rId3"/>
+          <a:stretch/>
         </p:blipFill>
-        <p:spPr>
-          <a:xfrm>
-            <a:off x="357686" y="210927"/>
-            <a:ext cx="10430476" cy="6506483"/>
+        <p:spPr bwMode="auto">
+          <a:xfrm flipH="0" flipV="0">
+            <a:off x="2058147" y="-26420"/>
+            <a:ext cx="9886201" cy="6796541"/>
           </a:xfrm>
           <a:prstGeom prst="rect">
             <a:avLst/>
@@ -3520,20 +4478,23 @@
         </p:spPr>
       </p:pic>
     </p:spTree>
-    <p:extLst>
-      <p:ext uri="{BB962C8B-B14F-4D97-AF65-F5344CB8AC3E}">
-        <p14:creationId xmlns:p14="http://schemas.microsoft.com/office/powerpoint/2010/main" val="3906601921"/>
-      </p:ext>
-    </p:extLst>
   </p:cSld>
   <p:clrMapOvr>
     <a:masterClrMapping/>
   </p:clrMapOvr>
+  <mc:AlternateContent xmlns:mc="http://schemas.openxmlformats.org/markup-compatibility/2006">
+    <mc:Choice xmlns:p159="http://schemas.microsoft.com/office/powerpoint/2015/09/main" xmlns:p14="http://schemas.microsoft.com/office/powerpoint/2010/main" Requires="p159">
+      <p:transition p14:dur="500" advClick="1"/>
+    </mc:Choice>
+    <mc:Fallback>
+      <p:transition advClick="1"/>
+    </mc:Fallback>
+  </mc:AlternateContent>
 </p:sld>
 </file>
 
 <file path=ppt/theme/theme1.xml><?xml version="1.0" encoding="utf-8"?>
-<a:theme xmlns:a="http://schemas.openxmlformats.org/drawingml/2006/main" name="Office Theme">
+<a:theme xmlns:a="http://schemas.openxmlformats.org/drawingml/2006/main" xmlns:r="http://schemas.openxmlformats.org/officeDocument/2006/relationships" xmlns:p="http://schemas.openxmlformats.org/presentationml/2006/main" name="Office Theme">
   <a:themeElements>
     <a:clrScheme name="Office">
       <a:dk1>
@@ -3575,74 +4536,14 @@
     </a:clrScheme>
     <a:fontScheme name="Office">
       <a:majorFont>
-        <a:latin typeface="Calibri Light" panose="020F0302020204030204"/>
-        <a:ea typeface=""/>
-        <a:cs typeface=""/>
-        <a:font script="Jpan" typeface="游ゴシック Light"/>
-        <a:font script="Hang" typeface="맑은 고딕"/>
-        <a:font script="Hans" typeface="等线 Light"/>
-        <a:font script="Hant" typeface="新細明體"/>
-        <a:font script="Arab" typeface="Times New Roman"/>
-        <a:font script="Hebr" typeface="Times New Roman"/>
-        <a:font script="Thai" typeface="Angsana New"/>
-        <a:font script="Ethi" typeface="Nyala"/>
-        <a:font script="Beng" typeface="Vrinda"/>
-        <a:font script="Gujr" typeface="Shruti"/>
-        <a:font script="Khmr" typeface="MoolBoran"/>
-        <a:font script="Knda" typeface="Tunga"/>
-        <a:font script="Guru" typeface="Raavi"/>
-        <a:font script="Cans" typeface="Euphemia"/>
-        <a:font script="Cher" typeface="Plantagenet Cherokee"/>
-        <a:font script="Yiii" typeface="Microsoft Yi Baiti"/>
-        <a:font script="Tibt" typeface="Microsoft Himalaya"/>
-        <a:font script="Thaa" typeface="MV Boli"/>
-        <a:font script="Deva" typeface="Mangal"/>
-        <a:font script="Telu" typeface="Gautami"/>
-        <a:font script="Taml" typeface="Latha"/>
-        <a:font script="Syrc" typeface="Estrangelo Edessa"/>
-        <a:font script="Orya" typeface="Kalinga"/>
-        <a:font script="Mlym" typeface="Kartika"/>
-        <a:font script="Laoo" typeface="DokChampa"/>
-        <a:font script="Sinh" typeface="Iskoola Pota"/>
-        <a:font script="Mong" typeface="Mongolian Baiti"/>
-        <a:font script="Viet" typeface="Times New Roman"/>
-        <a:font script="Uigh" typeface="Microsoft Uighur"/>
-        <a:font script="Geor" typeface="Sylfaen"/>
+        <a:latin typeface="Calibri Light"/>
+        <a:ea typeface="Arial"/>
+        <a:cs typeface="Arial"/>
       </a:majorFont>
       <a:minorFont>
-        <a:latin typeface="Calibri" panose="020F0502020204030204"/>
-        <a:ea typeface=""/>
-        <a:cs typeface=""/>
-        <a:font script="Jpan" typeface="游ゴシック"/>
-        <a:font script="Hang" typeface="맑은 고딕"/>
-        <a:font script="Hans" typeface="等线"/>
-        <a:font script="Hant" typeface="新細明體"/>
-        <a:font script="Arab" typeface="Arial"/>
-        <a:font script="Hebr" typeface="Arial"/>
-        <a:font script="Thai" typeface="Cordia New"/>
-        <a:font script="Ethi" typeface="Nyala"/>
-        <a:font script="Beng" typeface="Vrinda"/>
-        <a:font script="Gujr" typeface="Shruti"/>
-        <a:font script="Khmr" typeface="DaunPenh"/>
-        <a:font script="Knda" typeface="Tunga"/>
-        <a:font script="Guru" typeface="Raavi"/>
-        <a:font script="Cans" typeface="Euphemia"/>
-        <a:font script="Cher" typeface="Plantagenet Cherokee"/>
-        <a:font script="Yiii" typeface="Microsoft Yi Baiti"/>
-        <a:font script="Tibt" typeface="Microsoft Himalaya"/>
-        <a:font script="Thaa" typeface="MV Boli"/>
-        <a:font script="Deva" typeface="Mangal"/>
-        <a:font script="Telu" typeface="Gautami"/>
-        <a:font script="Taml" typeface="Latha"/>
-        <a:font script="Syrc" typeface="Estrangelo Edessa"/>
-        <a:font script="Orya" typeface="Kalinga"/>
-        <a:font script="Mlym" typeface="Kartika"/>
-        <a:font script="Laoo" typeface="DokChampa"/>
-        <a:font script="Sinh" typeface="Iskoola Pota"/>
-        <a:font script="Mong" typeface="Mongolian Baiti"/>
-        <a:font script="Viet" typeface="Arial"/>
-        <a:font script="Uigh" typeface="Microsoft Uighur"/>
-        <a:font script="Geor" typeface="Sylfaen"/>
+        <a:latin typeface="Calibri"/>
+        <a:ea typeface="Arial"/>
+        <a:cs typeface="Arial"/>
       </a:minorFont>
     </a:fontScheme>
     <a:fmtScheme name="Office">
@@ -3650,7 +4551,7 @@
         <a:solidFill>
           <a:schemeClr val="phClr"/>
         </a:solidFill>
-        <a:gradFill rotWithShape="1">
+        <a:gradFill>
           <a:gsLst>
             <a:gs pos="0">
               <a:schemeClr val="phClr">
@@ -3676,7 +4577,7 @@
           </a:gsLst>
           <a:lin ang="5400000" scaled="0"/>
         </a:gradFill>
-        <a:gradFill rotWithShape="1">
+        <a:gradFill>
           <a:gsLst>
             <a:gs pos="0">
               <a:schemeClr val="phClr">
@@ -3753,7 +4654,7 @@
             <a:satMod val="170000"/>
           </a:schemeClr>
         </a:solidFill>
-        <a:gradFill rotWithShape="1">
+        <a:gradFill>
           <a:gsLst>
             <a:gs pos="0">
               <a:schemeClr val="phClr">
@@ -3784,11 +4685,200 @@
     </a:fmtScheme>
   </a:themeElements>
   <a:objectDefaults/>
-  <a:extraClrSchemeLst/>
-  <a:extLst>
-    <a:ext uri="{05A4C25C-085E-4340-85A3-A5531E510DB2}">
-      <thm15:themeFamily xmlns:thm15="http://schemas.microsoft.com/office/thememl/2012/main" name="Office Theme" id="{62F939B6-93AF-4DB8-9C6B-D6C7DFDC589F}" vid="{4A3C46E8-61CC-4603-A589-7422A47A8E4A}"/>
-    </a:ext>
-  </a:extLst>
+</a:theme>
+</file>
+
+<file path=ppt/theme/theme2.xml><?xml version="1.0" encoding="utf-8"?>
+<a:theme xmlns:a="http://schemas.openxmlformats.org/drawingml/2006/main" xmlns:r="http://schemas.openxmlformats.org/officeDocument/2006/relationships" xmlns:p="http://schemas.openxmlformats.org/presentationml/2006/main" name="Office Theme">
+  <a:themeElements>
+    <a:clrScheme name="Office">
+      <a:dk1>
+        <a:sysClr val="windowText" lastClr="000000"/>
+      </a:dk1>
+      <a:lt1>
+        <a:sysClr val="window" lastClr="FFFFFF"/>
+      </a:lt1>
+      <a:dk2>
+        <a:srgbClr val="44546A"/>
+      </a:dk2>
+      <a:lt2>
+        <a:srgbClr val="E7E6E6"/>
+      </a:lt2>
+      <a:accent1>
+        <a:srgbClr val="5B9BD5"/>
+      </a:accent1>
+      <a:accent2>
+        <a:srgbClr val="ED7D31"/>
+      </a:accent2>
+      <a:accent3>
+        <a:srgbClr val="A5A5A5"/>
+      </a:accent3>
+      <a:accent4>
+        <a:srgbClr val="FFC000"/>
+      </a:accent4>
+      <a:accent5>
+        <a:srgbClr val="4472C4"/>
+      </a:accent5>
+      <a:accent6>
+        <a:srgbClr val="70AD47"/>
+      </a:accent6>
+      <a:hlink>
+        <a:srgbClr val="0563C1"/>
+      </a:hlink>
+      <a:folHlink>
+        <a:srgbClr val="954F72"/>
+      </a:folHlink>
+    </a:clrScheme>
+    <a:fontScheme name="">
+      <a:majorFont>
+        <a:latin typeface="Calibri Light"/>
+        <a:ea typeface="Arial"/>
+        <a:cs typeface="Arial"/>
+      </a:majorFont>
+      <a:minorFont>
+        <a:latin typeface="Calibri"/>
+        <a:ea typeface="Arial"/>
+        <a:cs typeface="Arial"/>
+      </a:minorFont>
+    </a:fontScheme>
+    <a:fmtScheme name="Office">
+      <a:fillStyleLst>
+        <a:solidFill>
+          <a:schemeClr val="phClr"/>
+        </a:solidFill>
+        <a:gradFill>
+          <a:gsLst>
+            <a:gs pos="0">
+              <a:schemeClr val="phClr">
+                <a:lumMod val="110000"/>
+                <a:satMod val="105000"/>
+                <a:tint val="67000"/>
+              </a:schemeClr>
+            </a:gs>
+            <a:gs pos="50000">
+              <a:schemeClr val="phClr">
+                <a:lumMod val="105000"/>
+                <a:satMod val="103000"/>
+                <a:tint val="73000"/>
+              </a:schemeClr>
+            </a:gs>
+            <a:gs pos="100000">
+              <a:schemeClr val="phClr">
+                <a:lumMod val="105000"/>
+                <a:satMod val="109000"/>
+                <a:tint val="81000"/>
+              </a:schemeClr>
+            </a:gs>
+          </a:gsLst>
+          <a:lin ang="5400000" scaled="0"/>
+        </a:gradFill>
+        <a:gradFill>
+          <a:gsLst>
+            <a:gs pos="0">
+              <a:schemeClr val="phClr">
+                <a:satMod val="103000"/>
+                <a:lumMod val="102000"/>
+                <a:tint val="94000"/>
+              </a:schemeClr>
+            </a:gs>
+            <a:gs pos="50000">
+              <a:schemeClr val="phClr">
+                <a:satMod val="110000"/>
+                <a:lumMod val="100000"/>
+                <a:shade val="100000"/>
+              </a:schemeClr>
+            </a:gs>
+            <a:gs pos="100000">
+              <a:schemeClr val="phClr">
+                <a:lumMod val="99000"/>
+                <a:satMod val="120000"/>
+                <a:shade val="78000"/>
+              </a:schemeClr>
+            </a:gs>
+          </a:gsLst>
+          <a:lin ang="5400000" scaled="0"/>
+        </a:gradFill>
+      </a:fillStyleLst>
+      <a:lnStyleLst>
+        <a:ln w="6350" cap="flat" cmpd="sng" algn="ctr">
+          <a:solidFill>
+            <a:schemeClr val="phClr"/>
+          </a:solidFill>
+          <a:prstDash val="solid"/>
+          <a:miter lim="800000"/>
+        </a:ln>
+        <a:ln w="12700" cap="flat" cmpd="sng" algn="ctr">
+          <a:solidFill>
+            <a:schemeClr val="phClr"/>
+          </a:solidFill>
+          <a:prstDash val="solid"/>
+          <a:miter lim="800000"/>
+        </a:ln>
+        <a:ln w="19050" cap="flat" cmpd="sng" algn="ctr">
+          <a:solidFill>
+            <a:schemeClr val="phClr"/>
+          </a:solidFill>
+          <a:prstDash val="solid"/>
+          <a:miter lim="800000"/>
+        </a:ln>
+      </a:lnStyleLst>
+      <a:effectStyleLst>
+        <a:effectStyle>
+          <a:effectLst/>
+        </a:effectStyle>
+        <a:effectStyle>
+          <a:effectLst/>
+        </a:effectStyle>
+        <a:effectStyle>
+          <a:effectLst>
+            <a:outerShdw blurRad="57150" dist="19050" dir="5400000" algn="ctr" rotWithShape="0">
+              <a:srgbClr val="000000">
+                <a:alpha val="63000"/>
+              </a:srgbClr>
+            </a:outerShdw>
+          </a:effectLst>
+        </a:effectStyle>
+      </a:effectStyleLst>
+      <a:bgFillStyleLst>
+        <a:solidFill>
+          <a:schemeClr val="phClr"/>
+        </a:solidFill>
+        <a:solidFill>
+          <a:schemeClr val="phClr">
+            <a:tint val="95000"/>
+            <a:satMod val="170000"/>
+          </a:schemeClr>
+        </a:solidFill>
+        <a:gradFill>
+          <a:gsLst>
+            <a:gs pos="0">
+              <a:schemeClr val="phClr">
+                <a:tint val="93000"/>
+                <a:satMod val="150000"/>
+                <a:shade val="98000"/>
+                <a:lumMod val="102000"/>
+              </a:schemeClr>
+            </a:gs>
+            <a:gs pos="50000">
+              <a:schemeClr val="phClr">
+                <a:tint val="98000"/>
+                <a:satMod val="130000"/>
+                <a:shade val="90000"/>
+                <a:lumMod val="103000"/>
+              </a:schemeClr>
+            </a:gs>
+            <a:gs pos="100000">
+              <a:schemeClr val="phClr">
+                <a:shade val="63000"/>
+                <a:satMod val="120000"/>
+              </a:schemeClr>
+            </a:gs>
+          </a:gsLst>
+          <a:lin ang="5400000" scaled="0"/>
+        </a:gradFill>
+      </a:bgFillStyleLst>
+    </a:fmtScheme>
+  </a:themeElements>
+  <a:objectDefaults/>
 </a:theme>
 </file>
--- a/6th Semester/Level-3, Semester-II/CCE 323  Optical Fiber Communication/Muradul Boshir/Example 3.4-3.2 15-1-26.pptx
+++ b/6th Semester/Level-3, Semester-II/CCE 323  Optical Fiber Communication/Muradul Boshir/Example 3.4-3.2 15-1-26.pptx
@@ -1,14 +1,14 @@
 
 <file path=ppt/presentation.xml><?xml version="1.0" encoding="utf-8"?>
-<p:presentation xmlns:a="http://schemas.openxmlformats.org/drawingml/2006/main" xmlns:r="http://schemas.openxmlformats.org/officeDocument/2006/relationships" xmlns:p="http://schemas.openxmlformats.org/presentationml/2006/main" xmlns:m="http://schemas.openxmlformats.org/officeDocument/2006/math" xmlns:w="http://schemas.openxmlformats.org/wordprocessingml/2006/main" saveSubsetFonts="1">
+<p:presentation xmlns:a="http://schemas.openxmlformats.org/drawingml/2006/main" xmlns:r="http://schemas.openxmlformats.org/officeDocument/2006/relationships" xmlns:p="http://schemas.openxmlformats.org/presentationml/2006/main">
   <p:sldMasterIdLst>
     <p:sldMasterId id="2147483648" r:id="rId1"/>
   </p:sldMasterIdLst>
   <p:notesMasterIdLst>
-    <p:notesMasterId r:id="rId10"/>
+    <p:notesMasterId r:id="rId4"/>
   </p:notesMasterIdLst>
   <p:sldIdLst>
-    <p:sldId id="256" r:id="rId4"/>
+    <p:sldId id="256" r:id="rId3"/>
     <p:sldId id="257" r:id="rId5"/>
     <p:sldId id="258" r:id="rId6"/>
     <p:sldId id="259" r:id="rId7"/>
@@ -112,12 +112,28 @@
       </a:defRPr>
     </a:lvl9pPr>
   </p:defaultTextStyle>
+  <p:extLst>
+    <p:ext uri="{EFAFB233-063F-42B5-8137-9DF3F51BA10A}">
+      <p15:sldGuideLst xmlns:p15="http://schemas.microsoft.com/office/powerpoint/2012/main">
+        <p15:guide id="1" pos="3840" userDrawn="1">
+          <p15:clr>
+            <a:srgbClr val="A4A3A4"/>
+          </p15:clr>
+        </p15:guide>
+        <p15:guide id="2" orient="horz" pos="2160" userDrawn="1">
+          <p15:clr>
+            <a:srgbClr val="A4A3A4"/>
+          </p15:clr>
+        </p15:guide>
+      </p15:sldGuideLst>
+    </p:ext>
+  </p:extLst>
 </p:presentation>
 </file>
 
 <file path=ppt/notesMasters/notesMaster1.xml><?xml version="1.0" encoding="utf-8"?>
 <p:notesMaster xmlns:a="http://schemas.openxmlformats.org/drawingml/2006/main" xmlns:r="http://schemas.openxmlformats.org/officeDocument/2006/relationships" xmlns:p="http://schemas.openxmlformats.org/presentationml/2006/main">
-  <p:cSld name="">
+  <p:cSld>
     <p:bg>
       <p:bgRef idx="1001">
         <a:schemeClr val="bg1"/>
@@ -167,7 +183,6 @@
             <a:pPr>
               <a:defRPr/>
             </a:pPr>
-            <a:endParaRPr/>
           </a:p>
         </p:txBody>
       </p:sp>
@@ -201,13 +216,12 @@
             <a:pPr>
               <a:defRPr/>
             </a:pPr>
-            <a:endParaRPr/>
-          </a:p>
-        </p:txBody>
-      </p:sp>
-      <p:sp>
-        <p:nvSpPr>
-          <p:cNvPr id="3" name="Date Placeholder 2"/>
+          </a:p>
+        </p:txBody>
+      </p:sp>
+      <p:sp>
+        <p:nvSpPr>
+          <p:cNvPr id="4" name="Date Placeholder 3"/>
           <p:cNvSpPr>
             <a:spLocks noGrp="1"/>
           </p:cNvSpPr>
@@ -235,7 +249,6 @@
             <a:pPr>
               <a:defRPr/>
             </a:pPr>
-            <a:endParaRPr/>
           </a:p>
         </p:txBody>
       </p:sp>
@@ -265,7 +278,6 @@
             <a:pPr>
               <a:defRPr/>
             </a:pPr>
-            <a:endParaRPr/>
           </a:p>
         </p:txBody>
       </p:sp>
@@ -299,7 +311,6 @@
             <a:pPr>
               <a:defRPr/>
             </a:pPr>
-            <a:endParaRPr/>
           </a:p>
         </p:txBody>
       </p:sp>
@@ -333,7 +344,6 @@
             <a:pPr>
               <a:defRPr/>
             </a:pPr>
-            <a:endParaRPr/>
           </a:p>
         </p:txBody>
       </p:sp>
@@ -436,8 +446,8 @@
 </file>
 
 <file path=ppt/notesSlides/notesSlide1.xml><?xml version="1.0" encoding="utf-8"?>
-<p:notes xmlns:a="http://schemas.openxmlformats.org/drawingml/2006/main" xmlns:r="http://schemas.openxmlformats.org/officeDocument/2006/relationships" xmlns:p="http://schemas.openxmlformats.org/presentationml/2006/main" xmlns:m="http://schemas.openxmlformats.org/officeDocument/2006/math" xmlns:w="http://schemas.openxmlformats.org/wordprocessingml/2006/main">
-  <p:cSld name="">
+<p:notes xmlns:a="http://schemas.openxmlformats.org/drawingml/2006/main" xmlns:r="http://schemas.openxmlformats.org/officeDocument/2006/relationships" xmlns:p="http://schemas.openxmlformats.org/presentationml/2006/main">
+  <p:cSld>
     <p:spTree>
       <p:nvGrpSpPr>
         <p:cNvPr id="1" name=""/>
@@ -456,7 +466,7 @@
         <p:nvSpPr>
           <p:cNvPr id="2" name="Slide Image Placeholder 1"/>
           <p:cNvSpPr>
-            <a:spLocks noChangeAspect="1" noGrp="1" noRot="1"/>
+            <a:spLocks noGrp="1" noRot="1" noChangeAspect="1"/>
           </p:cNvSpPr>
           <p:nvPr>
             <p:ph type="sldImg"/>
@@ -482,7 +492,6 @@
             <a:pPr>
               <a:defRPr/>
             </a:pPr>
-            <a:endParaRPr/>
           </a:p>
         </p:txBody>
       </p:sp>
@@ -506,7 +515,6 @@
             </a:pPr>
             <a:fld id="{4555A523-573C-62BF-42C6-F492195CE2FE}" type="slidenum">
               <a:rPr/>
-              <a:t/>
             </a:fld>
             <a:endParaRPr/>
           </a:p>
@@ -521,8 +529,8 @@
 </file>
 
 <file path=ppt/notesSlides/notesSlide2.xml><?xml version="1.0" encoding="utf-8"?>
-<p:notes xmlns:a="http://schemas.openxmlformats.org/drawingml/2006/main" xmlns:r="http://schemas.openxmlformats.org/officeDocument/2006/relationships" xmlns:p="http://schemas.openxmlformats.org/presentationml/2006/main" xmlns:m="http://schemas.openxmlformats.org/officeDocument/2006/math" xmlns:w="http://schemas.openxmlformats.org/wordprocessingml/2006/main">
-  <p:cSld name="">
+<p:notes xmlns:a="http://schemas.openxmlformats.org/drawingml/2006/main" xmlns:r="http://schemas.openxmlformats.org/officeDocument/2006/relationships" xmlns:p="http://schemas.openxmlformats.org/presentationml/2006/main">
+  <p:cSld>
     <p:spTree>
       <p:nvGrpSpPr>
         <p:cNvPr id="1" name=""/>
@@ -541,7 +549,7 @@
         <p:nvSpPr>
           <p:cNvPr id="2" name="Slide Image Placeholder 1"/>
           <p:cNvSpPr>
-            <a:spLocks noChangeAspect="1" noGrp="1" noRot="1"/>
+            <a:spLocks noGrp="1" noRot="1" noChangeAspect="1"/>
           </p:cNvSpPr>
           <p:nvPr>
             <p:ph type="sldImg"/>
@@ -567,7 +575,6 @@
             <a:pPr>
               <a:defRPr/>
             </a:pPr>
-            <a:endParaRPr/>
           </a:p>
         </p:txBody>
       </p:sp>
@@ -591,7 +598,6 @@
             </a:pPr>
             <a:fld id="{7AFDD43E-5FC3-3B3B-72CD-2E76FB3929EF}" type="slidenum">
               <a:rPr/>
-              <a:t/>
             </a:fld>
             <a:endParaRPr/>
           </a:p>
@@ -606,8 +612,8 @@
 </file>
 
 <file path=ppt/notesSlides/notesSlide3.xml><?xml version="1.0" encoding="utf-8"?>
-<p:notes xmlns:a="http://schemas.openxmlformats.org/drawingml/2006/main" xmlns:r="http://schemas.openxmlformats.org/officeDocument/2006/relationships" xmlns:p="http://schemas.openxmlformats.org/presentationml/2006/main" xmlns:m="http://schemas.openxmlformats.org/officeDocument/2006/math" xmlns:w="http://schemas.openxmlformats.org/wordprocessingml/2006/main">
-  <p:cSld name="">
+<p:notes xmlns:a="http://schemas.openxmlformats.org/drawingml/2006/main" xmlns:r="http://schemas.openxmlformats.org/officeDocument/2006/relationships" xmlns:p="http://schemas.openxmlformats.org/presentationml/2006/main">
+  <p:cSld>
     <p:spTree>
       <p:nvGrpSpPr>
         <p:cNvPr id="1" name=""/>
@@ -626,7 +632,7 @@
         <p:nvSpPr>
           <p:cNvPr id="2" name="Slide Image Placeholder 1"/>
           <p:cNvSpPr>
-            <a:spLocks noChangeAspect="1" noGrp="1" noRot="1"/>
+            <a:spLocks noGrp="1" noRot="1" noChangeAspect="1"/>
           </p:cNvSpPr>
           <p:nvPr>
             <p:ph type="sldImg"/>
@@ -652,7 +658,6 @@
             <a:pPr>
               <a:defRPr/>
             </a:pPr>
-            <a:endParaRPr/>
           </a:p>
         </p:txBody>
       </p:sp>
@@ -676,7 +681,6 @@
             </a:pPr>
             <a:fld id="{C22A8DED-398A-E57E-0DD1-C00D0C35F24C}" type="slidenum">
               <a:rPr/>
-              <a:t/>
             </a:fld>
             <a:endParaRPr/>
           </a:p>
@@ -691,8 +695,8 @@
 </file>
 
 <file path=ppt/notesSlides/notesSlide4.xml><?xml version="1.0" encoding="utf-8"?>
-<p:notes xmlns:a="http://schemas.openxmlformats.org/drawingml/2006/main" xmlns:r="http://schemas.openxmlformats.org/officeDocument/2006/relationships" xmlns:p="http://schemas.openxmlformats.org/presentationml/2006/main" xmlns:m="http://schemas.openxmlformats.org/officeDocument/2006/math" xmlns:w="http://schemas.openxmlformats.org/wordprocessingml/2006/main">
-  <p:cSld name="">
+<p:notes xmlns:a="http://schemas.openxmlformats.org/drawingml/2006/main" xmlns:r="http://schemas.openxmlformats.org/officeDocument/2006/relationships" xmlns:p="http://schemas.openxmlformats.org/presentationml/2006/main">
+  <p:cSld>
     <p:spTree>
       <p:nvGrpSpPr>
         <p:cNvPr id="1" name=""/>
@@ -711,7 +715,7 @@
         <p:nvSpPr>
           <p:cNvPr id="2" name="Slide Image Placeholder 1"/>
           <p:cNvSpPr>
-            <a:spLocks noChangeAspect="1" noGrp="1" noRot="1"/>
+            <a:spLocks noGrp="1" noRot="1" noChangeAspect="1"/>
           </p:cNvSpPr>
           <p:nvPr>
             <p:ph type="sldImg"/>
@@ -737,7 +741,6 @@
             <a:pPr>
               <a:defRPr/>
             </a:pPr>
-            <a:endParaRPr/>
           </a:p>
         </p:txBody>
       </p:sp>
@@ -761,7 +764,6 @@
             </a:pPr>
             <a:fld id="{3F9210D6-52FF-2782-CD36-58B6DB3CE254}" type="slidenum">
               <a:rPr/>
-              <a:t/>
             </a:fld>
             <a:endParaRPr/>
           </a:p>
@@ -776,8 +778,8 @@
 </file>
 
 <file path=ppt/notesSlides/notesSlide5.xml><?xml version="1.0" encoding="utf-8"?>
-<p:notes xmlns:a="http://schemas.openxmlformats.org/drawingml/2006/main" xmlns:r="http://schemas.openxmlformats.org/officeDocument/2006/relationships" xmlns:p="http://schemas.openxmlformats.org/presentationml/2006/main" xmlns:m="http://schemas.openxmlformats.org/officeDocument/2006/math" xmlns:w="http://schemas.openxmlformats.org/wordprocessingml/2006/main">
-  <p:cSld name="">
+<p:notes xmlns:a="http://schemas.openxmlformats.org/drawingml/2006/main" xmlns:r="http://schemas.openxmlformats.org/officeDocument/2006/relationships" xmlns:p="http://schemas.openxmlformats.org/presentationml/2006/main">
+  <p:cSld>
     <p:spTree>
       <p:nvGrpSpPr>
         <p:cNvPr id="1" name=""/>
@@ -796,7 +798,7 @@
         <p:nvSpPr>
           <p:cNvPr id="2" name="Slide Image Placeholder 1"/>
           <p:cNvSpPr>
-            <a:spLocks noChangeAspect="1" noGrp="1" noRot="1"/>
+            <a:spLocks noGrp="1" noRot="1" noChangeAspect="1"/>
           </p:cNvSpPr>
           <p:nvPr>
             <p:ph type="sldImg"/>
@@ -822,7 +824,6 @@
             <a:pPr>
               <a:defRPr/>
             </a:pPr>
-            <a:endParaRPr/>
           </a:p>
         </p:txBody>
       </p:sp>
@@ -846,7 +847,6 @@
             </a:pPr>
             <a:fld id="{C7DE6B3D-C06C-251C-9490-076566C0BB0D}" type="slidenum">
               <a:rPr/>
-              <a:t/>
             </a:fld>
             <a:endParaRPr/>
           </a:p>
@@ -861,8 +861,8 @@
 </file>
 
 <file path=ppt/notesSlides/notesSlide6.xml><?xml version="1.0" encoding="utf-8"?>
-<p:notes xmlns:a="http://schemas.openxmlformats.org/drawingml/2006/main" xmlns:r="http://schemas.openxmlformats.org/officeDocument/2006/relationships" xmlns:p="http://schemas.openxmlformats.org/presentationml/2006/main" xmlns:m="http://schemas.openxmlformats.org/officeDocument/2006/math" xmlns:w="http://schemas.openxmlformats.org/wordprocessingml/2006/main">
-  <p:cSld name="">
+<p:notes xmlns:a="http://schemas.openxmlformats.org/drawingml/2006/main" xmlns:r="http://schemas.openxmlformats.org/officeDocument/2006/relationships" xmlns:p="http://schemas.openxmlformats.org/presentationml/2006/main">
+  <p:cSld>
     <p:spTree>
       <p:nvGrpSpPr>
         <p:cNvPr id="1" name=""/>
@@ -881,7 +881,7 @@
         <p:nvSpPr>
           <p:cNvPr id="2" name="Slide Image Placeholder 1"/>
           <p:cNvSpPr>
-            <a:spLocks noChangeAspect="1" noGrp="1" noRot="1"/>
+            <a:spLocks noGrp="1" noRot="1" noChangeAspect="1"/>
           </p:cNvSpPr>
           <p:nvPr>
             <p:ph type="sldImg"/>
@@ -907,7 +907,6 @@
             <a:pPr>
               <a:defRPr/>
             </a:pPr>
-            <a:endParaRPr/>
           </a:p>
         </p:txBody>
       </p:sp>
@@ -931,7 +930,6 @@
             </a:pPr>
             <a:fld id="{D1036E0A-2E4C-765D-39FD-A2213D82B86D}" type="slidenum">
               <a:rPr/>
-              <a:t/>
             </a:fld>
             <a:endParaRPr/>
           </a:p>
@@ -946,7 +944,7 @@
 </file>
 
 <file path=ppt/slideLayouts/slideLayout1.xml><?xml version="1.0" encoding="utf-8"?>
-<p:sldLayout xmlns:a="http://schemas.openxmlformats.org/drawingml/2006/main" xmlns:r="http://schemas.openxmlformats.org/officeDocument/2006/relationships" xmlns:p="http://schemas.openxmlformats.org/presentationml/2006/main" xmlns:m="http://schemas.openxmlformats.org/officeDocument/2006/math" xmlns:w="http://schemas.openxmlformats.org/wordprocessingml/2006/main" matchingName="" preserve="1" showMasterPhAnim="0" showMasterSp="1" type="title" userDrawn="1">
+<p:sldLayout xmlns:a="http://schemas.openxmlformats.org/drawingml/2006/main" xmlns:r="http://schemas.openxmlformats.org/officeDocument/2006/relationships" xmlns:p="http://schemas.openxmlformats.org/presentationml/2006/main" type="title" preserve="1" showMasterPhAnim="0" userDrawn="1">
   <p:cSld name="Title Slide">
     <p:spTree>
       <p:nvGrpSpPr>
@@ -1085,7 +1083,6 @@
             </a:pPr>
             <a:fld id="{C1A0CB4C-5559-475B-830B-093C2DBE2538}" type="datetimeFigureOut">
               <a:rPr lang="en-US"/>
-              <a:t>1/15/2026</a:t>
             </a:fld>
             <a:endParaRPr lang="en-US"/>
           </a:p>
@@ -1133,7 +1130,6 @@
             </a:pPr>
             <a:fld id="{16EEFF7F-0A2A-489A-9962-FBDAE4758270}" type="slidenum">
               <a:rPr lang="en-US"/>
-              <a:t>‹#›</a:t>
             </a:fld>
             <a:endParaRPr lang="en-US"/>
           </a:p>
@@ -1148,7 +1144,7 @@
 </file>
 
 <file path=ppt/slideLayouts/slideLayout10.xml><?xml version="1.0" encoding="utf-8"?>
-<p:sldLayout xmlns:a="http://schemas.openxmlformats.org/drawingml/2006/main" xmlns:r="http://schemas.openxmlformats.org/officeDocument/2006/relationships" xmlns:p="http://schemas.openxmlformats.org/presentationml/2006/main" xmlns:m="http://schemas.openxmlformats.org/officeDocument/2006/math" xmlns:w="http://schemas.openxmlformats.org/wordprocessingml/2006/main" matchingName="" preserve="1" showMasterPhAnim="0" showMasterSp="1" type="vertTx" userDrawn="1">
+<p:sldLayout xmlns:a="http://schemas.openxmlformats.org/drawingml/2006/main" xmlns:r="http://schemas.openxmlformats.org/officeDocument/2006/relationships" xmlns:p="http://schemas.openxmlformats.org/presentationml/2006/main" type="vertTx" preserve="1" showMasterPhAnim="0" userDrawn="1">
   <p:cSld name="Title and Vertical Text">
     <p:spTree>
       <p:nvGrpSpPr>
@@ -1212,7 +1208,7 @@
               <a:rPr lang="en-US"/>
               <a:t>Edit Master text styles</a:t>
             </a:r>
-            <a:endParaRPr/>
+            <a:endParaRPr lang="en-US"/>
           </a:p>
           <a:p>
             <a:pPr lvl="1">
@@ -1222,7 +1218,7 @@
               <a:rPr lang="en-US"/>
               <a:t>Second level</a:t>
             </a:r>
-            <a:endParaRPr/>
+            <a:endParaRPr lang="en-US"/>
           </a:p>
           <a:p>
             <a:pPr lvl="2">
@@ -1232,7 +1228,7 @@
               <a:rPr lang="en-US"/>
               <a:t>Third level</a:t>
             </a:r>
-            <a:endParaRPr/>
+            <a:endParaRPr lang="en-US"/>
           </a:p>
           <a:p>
             <a:pPr lvl="3">
@@ -1242,7 +1238,7 @@
               <a:rPr lang="en-US"/>
               <a:t>Fourth level</a:t>
             </a:r>
-            <a:endParaRPr/>
+            <a:endParaRPr lang="en-US"/>
           </a:p>
           <a:p>
             <a:pPr lvl="4">
@@ -1276,7 +1272,6 @@
             </a:pPr>
             <a:fld id="{C1A0CB4C-5559-475B-830B-093C2DBE2538}" type="datetimeFigureOut">
               <a:rPr lang="en-US"/>
-              <a:t>1/15/2026</a:t>
             </a:fld>
             <a:endParaRPr lang="en-US"/>
           </a:p>
@@ -1324,7 +1319,6 @@
             </a:pPr>
             <a:fld id="{16EEFF7F-0A2A-489A-9962-FBDAE4758270}" type="slidenum">
               <a:rPr lang="en-US"/>
-              <a:t>‹#›</a:t>
             </a:fld>
             <a:endParaRPr lang="en-US"/>
           </a:p>
@@ -1339,7 +1333,7 @@
 </file>
 
 <file path=ppt/slideLayouts/slideLayout11.xml><?xml version="1.0" encoding="utf-8"?>
-<p:sldLayout xmlns:a="http://schemas.openxmlformats.org/drawingml/2006/main" xmlns:r="http://schemas.openxmlformats.org/officeDocument/2006/relationships" xmlns:p="http://schemas.openxmlformats.org/presentationml/2006/main" xmlns:m="http://schemas.openxmlformats.org/officeDocument/2006/math" xmlns:w="http://schemas.openxmlformats.org/wordprocessingml/2006/main" matchingName="" preserve="1" showMasterPhAnim="0" showMasterSp="1" type="vertTitleAndTx" userDrawn="1">
+<p:sldLayout xmlns:a="http://schemas.openxmlformats.org/drawingml/2006/main" xmlns:r="http://schemas.openxmlformats.org/officeDocument/2006/relationships" xmlns:p="http://schemas.openxmlformats.org/presentationml/2006/main" type="vertTitleAndTx" preserve="1" showMasterPhAnim="0" userDrawn="1">
   <p:cSld name="Vertical Title and Text">
     <p:spTree>
       <p:nvGrpSpPr>
@@ -1413,7 +1407,7 @@
               <a:rPr lang="en-US"/>
               <a:t>Edit Master text styles</a:t>
             </a:r>
-            <a:endParaRPr/>
+            <a:endParaRPr lang="en-US"/>
           </a:p>
           <a:p>
             <a:pPr lvl="1">
@@ -1423,7 +1417,7 @@
               <a:rPr lang="en-US"/>
               <a:t>Second level</a:t>
             </a:r>
-            <a:endParaRPr/>
+            <a:endParaRPr lang="en-US"/>
           </a:p>
           <a:p>
             <a:pPr lvl="2">
@@ -1433,7 +1427,7 @@
               <a:rPr lang="en-US"/>
               <a:t>Third level</a:t>
             </a:r>
-            <a:endParaRPr/>
+            <a:endParaRPr lang="en-US"/>
           </a:p>
           <a:p>
             <a:pPr lvl="3">
@@ -1443,7 +1437,7 @@
               <a:rPr lang="en-US"/>
               <a:t>Fourth level</a:t>
             </a:r>
-            <a:endParaRPr/>
+            <a:endParaRPr lang="en-US"/>
           </a:p>
           <a:p>
             <a:pPr lvl="4">
@@ -1477,7 +1471,6 @@
             </a:pPr>
             <a:fld id="{C1A0CB4C-5559-475B-830B-093C2DBE2538}" type="datetimeFigureOut">
               <a:rPr lang="en-US"/>
-              <a:t>1/15/2026</a:t>
             </a:fld>
             <a:endParaRPr lang="en-US"/>
           </a:p>
@@ -1525,7 +1518,6 @@
             </a:pPr>
             <a:fld id="{16EEFF7F-0A2A-489A-9962-FBDAE4758270}" type="slidenum">
               <a:rPr lang="en-US"/>
-              <a:t>‹#›</a:t>
             </a:fld>
             <a:endParaRPr lang="en-US"/>
           </a:p>
@@ -1540,7 +1532,7 @@
 </file>
 
 <file path=ppt/slideLayouts/slideLayout2.xml><?xml version="1.0" encoding="utf-8"?>
-<p:sldLayout xmlns:a="http://schemas.openxmlformats.org/drawingml/2006/main" xmlns:r="http://schemas.openxmlformats.org/officeDocument/2006/relationships" xmlns:p="http://schemas.openxmlformats.org/presentationml/2006/main" xmlns:m="http://schemas.openxmlformats.org/officeDocument/2006/math" xmlns:w="http://schemas.openxmlformats.org/wordprocessingml/2006/main" matchingName="" preserve="1" showMasterPhAnim="0" showMasterSp="1" type="obj" userDrawn="1">
+<p:sldLayout xmlns:a="http://schemas.openxmlformats.org/drawingml/2006/main" xmlns:r="http://schemas.openxmlformats.org/officeDocument/2006/relationships" xmlns:p="http://schemas.openxmlformats.org/presentationml/2006/main" type="obj" preserve="1" showMasterPhAnim="0" userDrawn="1">
   <p:cSld name="Title and Content">
     <p:spTree>
       <p:nvGrpSpPr>
@@ -1604,7 +1596,7 @@
               <a:rPr lang="en-US"/>
               <a:t>Edit Master text styles</a:t>
             </a:r>
-            <a:endParaRPr/>
+            <a:endParaRPr lang="en-US"/>
           </a:p>
           <a:p>
             <a:pPr lvl="1">
@@ -1614,7 +1606,7 @@
               <a:rPr lang="en-US"/>
               <a:t>Second level</a:t>
             </a:r>
-            <a:endParaRPr/>
+            <a:endParaRPr lang="en-US"/>
           </a:p>
           <a:p>
             <a:pPr lvl="2">
@@ -1624,7 +1616,7 @@
               <a:rPr lang="en-US"/>
               <a:t>Third level</a:t>
             </a:r>
-            <a:endParaRPr/>
+            <a:endParaRPr lang="en-US"/>
           </a:p>
           <a:p>
             <a:pPr lvl="3">
@@ -1634,7 +1626,7 @@
               <a:rPr lang="en-US"/>
               <a:t>Fourth level</a:t>
             </a:r>
-            <a:endParaRPr/>
+            <a:endParaRPr lang="en-US"/>
           </a:p>
           <a:p>
             <a:pPr lvl="4">
@@ -1668,7 +1660,6 @@
             </a:pPr>
             <a:fld id="{C1A0CB4C-5559-475B-830B-093C2DBE2538}" type="datetimeFigureOut">
               <a:rPr lang="en-US"/>
-              <a:t>1/15/2026</a:t>
             </a:fld>
             <a:endParaRPr lang="en-US"/>
           </a:p>
@@ -1716,7 +1707,6 @@
             </a:pPr>
             <a:fld id="{16EEFF7F-0A2A-489A-9962-FBDAE4758270}" type="slidenum">
               <a:rPr lang="en-US"/>
-              <a:t>‹#›</a:t>
             </a:fld>
             <a:endParaRPr lang="en-US"/>
           </a:p>
@@ -1731,7 +1721,7 @@
 </file>
 
 <file path=ppt/slideLayouts/slideLayout3.xml><?xml version="1.0" encoding="utf-8"?>
-<p:sldLayout xmlns:a="http://schemas.openxmlformats.org/drawingml/2006/main" xmlns:r="http://schemas.openxmlformats.org/officeDocument/2006/relationships" xmlns:p="http://schemas.openxmlformats.org/presentationml/2006/main" xmlns:m="http://schemas.openxmlformats.org/officeDocument/2006/math" xmlns:w="http://schemas.openxmlformats.org/wordprocessingml/2006/main" matchingName="" preserve="1" showMasterPhAnim="0" showMasterSp="1" type="secHead" userDrawn="1">
+<p:sldLayout xmlns:a="http://schemas.openxmlformats.org/drawingml/2006/main" xmlns:r="http://schemas.openxmlformats.org/officeDocument/2006/relationships" xmlns:p="http://schemas.openxmlformats.org/presentationml/2006/main" type="secHead" preserve="1" showMasterPhAnim="0" userDrawn="1">
   <p:cSld name="Section Header">
     <p:spTree>
       <p:nvGrpSpPr>
@@ -1900,7 +1890,7 @@
               <a:rPr lang="en-US"/>
               <a:t>Edit Master text styles</a:t>
             </a:r>
-            <a:endParaRPr/>
+            <a:endParaRPr lang="en-US"/>
           </a:p>
         </p:txBody>
       </p:sp>
@@ -1924,7 +1914,6 @@
             </a:pPr>
             <a:fld id="{C1A0CB4C-5559-475B-830B-093C2DBE2538}" type="datetimeFigureOut">
               <a:rPr lang="en-US"/>
-              <a:t>1/15/2026</a:t>
             </a:fld>
             <a:endParaRPr lang="en-US"/>
           </a:p>
@@ -1972,7 +1961,6 @@
             </a:pPr>
             <a:fld id="{16EEFF7F-0A2A-489A-9962-FBDAE4758270}" type="slidenum">
               <a:rPr lang="en-US"/>
-              <a:t>‹#›</a:t>
             </a:fld>
             <a:endParaRPr lang="en-US"/>
           </a:p>
@@ -1987,7 +1975,7 @@
 </file>
 
 <file path=ppt/slideLayouts/slideLayout4.xml><?xml version="1.0" encoding="utf-8"?>
-<p:sldLayout xmlns:a="http://schemas.openxmlformats.org/drawingml/2006/main" xmlns:r="http://schemas.openxmlformats.org/officeDocument/2006/relationships" xmlns:p="http://schemas.openxmlformats.org/presentationml/2006/main" xmlns:m="http://schemas.openxmlformats.org/officeDocument/2006/math" xmlns:w="http://schemas.openxmlformats.org/wordprocessingml/2006/main" matchingName="" preserve="1" showMasterPhAnim="0" showMasterSp="1" type="twoObj" userDrawn="1">
+<p:sldLayout xmlns:a="http://schemas.openxmlformats.org/drawingml/2006/main" xmlns:r="http://schemas.openxmlformats.org/officeDocument/2006/relationships" xmlns:p="http://schemas.openxmlformats.org/presentationml/2006/main" type="twoObj" preserve="1" showMasterPhAnim="0" userDrawn="1">
   <p:cSld name="Two Content">
     <p:spTree>
       <p:nvGrpSpPr>
@@ -2056,7 +2044,7 @@
               <a:rPr lang="en-US"/>
               <a:t>Edit Master text styles</a:t>
             </a:r>
-            <a:endParaRPr/>
+            <a:endParaRPr lang="en-US"/>
           </a:p>
           <a:p>
             <a:pPr lvl="1">
@@ -2066,7 +2054,7 @@
               <a:rPr lang="en-US"/>
               <a:t>Second level</a:t>
             </a:r>
-            <a:endParaRPr/>
+            <a:endParaRPr lang="en-US"/>
           </a:p>
           <a:p>
             <a:pPr lvl="2">
@@ -2076,7 +2064,7 @@
               <a:rPr lang="en-US"/>
               <a:t>Third level</a:t>
             </a:r>
-            <a:endParaRPr/>
+            <a:endParaRPr lang="en-US"/>
           </a:p>
           <a:p>
             <a:pPr lvl="3">
@@ -2086,7 +2074,7 @@
               <a:rPr lang="en-US"/>
               <a:t>Fourth level</a:t>
             </a:r>
-            <a:endParaRPr/>
+            <a:endParaRPr lang="en-US"/>
           </a:p>
           <a:p>
             <a:pPr lvl="4">
@@ -2127,7 +2115,7 @@
               <a:rPr lang="en-US"/>
               <a:t>Edit Master text styles</a:t>
             </a:r>
-            <a:endParaRPr/>
+            <a:endParaRPr lang="en-US"/>
           </a:p>
           <a:p>
             <a:pPr lvl="1">
@@ -2137,7 +2125,7 @@
               <a:rPr lang="en-US"/>
               <a:t>Second level</a:t>
             </a:r>
-            <a:endParaRPr/>
+            <a:endParaRPr lang="en-US"/>
           </a:p>
           <a:p>
             <a:pPr lvl="2">
@@ -2147,7 +2135,7 @@
               <a:rPr lang="en-US"/>
               <a:t>Third level</a:t>
             </a:r>
-            <a:endParaRPr/>
+            <a:endParaRPr lang="en-US"/>
           </a:p>
           <a:p>
             <a:pPr lvl="3">
@@ -2157,7 +2145,7 @@
               <a:rPr lang="en-US"/>
               <a:t>Fourth level</a:t>
             </a:r>
-            <a:endParaRPr/>
+            <a:endParaRPr lang="en-US"/>
           </a:p>
           <a:p>
             <a:pPr lvl="4">
@@ -2191,7 +2179,6 @@
             </a:pPr>
             <a:fld id="{C1A0CB4C-5559-475B-830B-093C2DBE2538}" type="datetimeFigureOut">
               <a:rPr lang="en-US"/>
-              <a:t>1/15/2026</a:t>
             </a:fld>
             <a:endParaRPr lang="en-US"/>
           </a:p>
@@ -2239,7 +2226,6 @@
             </a:pPr>
             <a:fld id="{16EEFF7F-0A2A-489A-9962-FBDAE4758270}" type="slidenum">
               <a:rPr lang="en-US"/>
-              <a:t>‹#›</a:t>
             </a:fld>
             <a:endParaRPr lang="en-US"/>
           </a:p>
@@ -2254,7 +2240,7 @@
 </file>
 
 <file path=ppt/slideLayouts/slideLayout5.xml><?xml version="1.0" encoding="utf-8"?>
-<p:sldLayout xmlns:a="http://schemas.openxmlformats.org/drawingml/2006/main" xmlns:r="http://schemas.openxmlformats.org/officeDocument/2006/relationships" xmlns:p="http://schemas.openxmlformats.org/presentationml/2006/main" xmlns:m="http://schemas.openxmlformats.org/officeDocument/2006/math" xmlns:w="http://schemas.openxmlformats.org/wordprocessingml/2006/main" matchingName="" preserve="1" showMasterPhAnim="0" showMasterSp="1" type="twoTxTwoObj" userDrawn="1">
+<p:sldLayout xmlns:a="http://schemas.openxmlformats.org/drawingml/2006/main" xmlns:r="http://schemas.openxmlformats.org/officeDocument/2006/relationships" xmlns:p="http://schemas.openxmlformats.org/presentationml/2006/main" type="twoTxTwoObj" preserve="1" showMasterPhAnim="0" userDrawn="1">
   <p:cSld name="Comparison">
     <p:spTree>
       <p:nvGrpSpPr>
@@ -2365,7 +2351,7 @@
               <a:rPr lang="en-US"/>
               <a:t>Edit Master text styles</a:t>
             </a:r>
-            <a:endParaRPr/>
+            <a:endParaRPr lang="en-US"/>
           </a:p>
         </p:txBody>
       </p:sp>
@@ -2396,7 +2382,7 @@
               <a:rPr lang="en-US"/>
               <a:t>Edit Master text styles</a:t>
             </a:r>
-            <a:endParaRPr/>
+            <a:endParaRPr lang="en-US"/>
           </a:p>
           <a:p>
             <a:pPr lvl="1">
@@ -2406,7 +2392,7 @@
               <a:rPr lang="en-US"/>
               <a:t>Second level</a:t>
             </a:r>
-            <a:endParaRPr/>
+            <a:endParaRPr lang="en-US"/>
           </a:p>
           <a:p>
             <a:pPr lvl="2">
@@ -2416,7 +2402,7 @@
               <a:rPr lang="en-US"/>
               <a:t>Third level</a:t>
             </a:r>
-            <a:endParaRPr/>
+            <a:endParaRPr lang="en-US"/>
           </a:p>
           <a:p>
             <a:pPr lvl="3">
@@ -2426,7 +2412,7 @@
               <a:rPr lang="en-US"/>
               <a:t>Fourth level</a:t>
             </a:r>
-            <a:endParaRPr/>
+            <a:endParaRPr lang="en-US"/>
           </a:p>
           <a:p>
             <a:pPr lvl="4">
@@ -2504,7 +2490,7 @@
               <a:rPr lang="en-US"/>
               <a:t>Edit Master text styles</a:t>
             </a:r>
-            <a:endParaRPr/>
+            <a:endParaRPr lang="en-US"/>
           </a:p>
         </p:txBody>
       </p:sp>
@@ -2535,7 +2521,7 @@
               <a:rPr lang="en-US"/>
               <a:t>Edit Master text styles</a:t>
             </a:r>
-            <a:endParaRPr/>
+            <a:endParaRPr lang="en-US"/>
           </a:p>
           <a:p>
             <a:pPr lvl="1">
@@ -2545,7 +2531,7 @@
               <a:rPr lang="en-US"/>
               <a:t>Second level</a:t>
             </a:r>
-            <a:endParaRPr/>
+            <a:endParaRPr lang="en-US"/>
           </a:p>
           <a:p>
             <a:pPr lvl="2">
@@ -2555,7 +2541,7 @@
               <a:rPr lang="en-US"/>
               <a:t>Third level</a:t>
             </a:r>
-            <a:endParaRPr/>
+            <a:endParaRPr lang="en-US"/>
           </a:p>
           <a:p>
             <a:pPr lvl="3">
@@ -2565,7 +2551,7 @@
               <a:rPr lang="en-US"/>
               <a:t>Fourth level</a:t>
             </a:r>
-            <a:endParaRPr/>
+            <a:endParaRPr lang="en-US"/>
           </a:p>
           <a:p>
             <a:pPr lvl="4">
@@ -2599,7 +2585,6 @@
             </a:pPr>
             <a:fld id="{C1A0CB4C-5559-475B-830B-093C2DBE2538}" type="datetimeFigureOut">
               <a:rPr lang="en-US"/>
-              <a:t>1/15/2026</a:t>
             </a:fld>
             <a:endParaRPr lang="en-US"/>
           </a:p>
@@ -2647,7 +2632,6 @@
             </a:pPr>
             <a:fld id="{16EEFF7F-0A2A-489A-9962-FBDAE4758270}" type="slidenum">
               <a:rPr lang="en-US"/>
-              <a:t>‹#›</a:t>
             </a:fld>
             <a:endParaRPr lang="en-US"/>
           </a:p>
@@ -2662,7 +2646,7 @@
 </file>
 
 <file path=ppt/slideLayouts/slideLayout6.xml><?xml version="1.0" encoding="utf-8"?>
-<p:sldLayout xmlns:a="http://schemas.openxmlformats.org/drawingml/2006/main" xmlns:r="http://schemas.openxmlformats.org/officeDocument/2006/relationships" xmlns:p="http://schemas.openxmlformats.org/presentationml/2006/main" xmlns:m="http://schemas.openxmlformats.org/officeDocument/2006/math" xmlns:w="http://schemas.openxmlformats.org/wordprocessingml/2006/main" matchingName="" preserve="1" showMasterPhAnim="0" showMasterSp="1" type="titleOnly" userDrawn="1">
+<p:sldLayout xmlns:a="http://schemas.openxmlformats.org/drawingml/2006/main" xmlns:r="http://schemas.openxmlformats.org/officeDocument/2006/relationships" xmlns:p="http://schemas.openxmlformats.org/presentationml/2006/main" type="titleOnly" preserve="1" showMasterPhAnim="0" userDrawn="1">
   <p:cSld name="Title Only">
     <p:spTree>
       <p:nvGrpSpPr>
@@ -2724,7 +2708,6 @@
             </a:pPr>
             <a:fld id="{C1A0CB4C-5559-475B-830B-093C2DBE2538}" type="datetimeFigureOut">
               <a:rPr lang="en-US"/>
-              <a:t>1/15/2026</a:t>
             </a:fld>
             <a:endParaRPr lang="en-US"/>
           </a:p>
@@ -2772,7 +2755,6 @@
             </a:pPr>
             <a:fld id="{16EEFF7F-0A2A-489A-9962-FBDAE4758270}" type="slidenum">
               <a:rPr lang="en-US"/>
-              <a:t>‹#›</a:t>
             </a:fld>
             <a:endParaRPr lang="en-US"/>
           </a:p>
@@ -2787,7 +2769,7 @@
 </file>
 
 <file path=ppt/slideLayouts/slideLayout7.xml><?xml version="1.0" encoding="utf-8"?>
-<p:sldLayout xmlns:a="http://schemas.openxmlformats.org/drawingml/2006/main" xmlns:r="http://schemas.openxmlformats.org/officeDocument/2006/relationships" xmlns:p="http://schemas.openxmlformats.org/presentationml/2006/main" xmlns:m="http://schemas.openxmlformats.org/officeDocument/2006/math" xmlns:w="http://schemas.openxmlformats.org/wordprocessingml/2006/main" matchingName="" preserve="1" showMasterPhAnim="0" showMasterSp="1" type="blank" userDrawn="1">
+<p:sldLayout xmlns:a="http://schemas.openxmlformats.org/drawingml/2006/main" xmlns:r="http://schemas.openxmlformats.org/officeDocument/2006/relationships" xmlns:p="http://schemas.openxmlformats.org/presentationml/2006/main" type="blank" preserve="1" showMasterPhAnim="0" userDrawn="1">
   <p:cSld name="Blank">
     <p:spTree>
       <p:nvGrpSpPr>
@@ -2823,7 +2805,6 @@
             </a:pPr>
             <a:fld id="{C1A0CB4C-5559-475B-830B-093C2DBE2538}" type="datetimeFigureOut">
               <a:rPr lang="en-US"/>
-              <a:t>1/15/2026</a:t>
             </a:fld>
             <a:endParaRPr lang="en-US"/>
           </a:p>
@@ -2871,7 +2852,6 @@
             </a:pPr>
             <a:fld id="{16EEFF7F-0A2A-489A-9962-FBDAE4758270}" type="slidenum">
               <a:rPr lang="en-US"/>
-              <a:t>‹#›</a:t>
             </a:fld>
             <a:endParaRPr lang="en-US"/>
           </a:p>
@@ -2886,7 +2866,7 @@
 </file>
 
 <file path=ppt/slideLayouts/slideLayout8.xml><?xml version="1.0" encoding="utf-8"?>
-<p:sldLayout xmlns:a="http://schemas.openxmlformats.org/drawingml/2006/main" xmlns:r="http://schemas.openxmlformats.org/officeDocument/2006/relationships" xmlns:p="http://schemas.openxmlformats.org/presentationml/2006/main" xmlns:m="http://schemas.openxmlformats.org/officeDocument/2006/math" xmlns:w="http://schemas.openxmlformats.org/wordprocessingml/2006/main" matchingName="" preserve="1" showMasterPhAnim="0" showMasterSp="1" type="objTx" userDrawn="1">
+<p:sldLayout xmlns:a="http://schemas.openxmlformats.org/drawingml/2006/main" xmlns:r="http://schemas.openxmlformats.org/officeDocument/2006/relationships" xmlns:p="http://schemas.openxmlformats.org/presentationml/2006/main" type="objTx" preserve="1" showMasterPhAnim="0" userDrawn="1">
   <p:cSld name="Content with Caption">
     <p:spTree>
       <p:nvGrpSpPr>
@@ -2992,7 +2972,7 @@
               <a:rPr lang="en-US"/>
               <a:t>Edit Master text styles</a:t>
             </a:r>
-            <a:endParaRPr/>
+            <a:endParaRPr lang="en-US"/>
           </a:p>
           <a:p>
             <a:pPr lvl="1">
@@ -3002,7 +2982,7 @@
               <a:rPr lang="en-US"/>
               <a:t>Second level</a:t>
             </a:r>
-            <a:endParaRPr/>
+            <a:endParaRPr lang="en-US"/>
           </a:p>
           <a:p>
             <a:pPr lvl="2">
@@ -3012,7 +2992,7 @@
               <a:rPr lang="en-US"/>
               <a:t>Third level</a:t>
             </a:r>
-            <a:endParaRPr/>
+            <a:endParaRPr lang="en-US"/>
           </a:p>
           <a:p>
             <a:pPr lvl="3">
@@ -3022,7 +3002,7 @@
               <a:rPr lang="en-US"/>
               <a:t>Fourth level</a:t>
             </a:r>
-            <a:endParaRPr/>
+            <a:endParaRPr lang="en-US"/>
           </a:p>
           <a:p>
             <a:pPr lvl="4">
@@ -3100,7 +3080,7 @@
               <a:rPr lang="en-US"/>
               <a:t>Edit Master text styles</a:t>
             </a:r>
-            <a:endParaRPr/>
+            <a:endParaRPr lang="en-US"/>
           </a:p>
         </p:txBody>
       </p:sp>
@@ -3124,7 +3104,6 @@
             </a:pPr>
             <a:fld id="{C1A0CB4C-5559-475B-830B-093C2DBE2538}" type="datetimeFigureOut">
               <a:rPr lang="en-US"/>
-              <a:t>1/15/2026</a:t>
             </a:fld>
             <a:endParaRPr lang="en-US"/>
           </a:p>
@@ -3172,7 +3151,6 @@
             </a:pPr>
             <a:fld id="{16EEFF7F-0A2A-489A-9962-FBDAE4758270}" type="slidenum">
               <a:rPr lang="en-US"/>
-              <a:t>‹#›</a:t>
             </a:fld>
             <a:endParaRPr lang="en-US"/>
           </a:p>
@@ -3187,7 +3165,7 @@
 </file>
 
 <file path=ppt/slideLayouts/slideLayout9.xml><?xml version="1.0" encoding="utf-8"?>
-<p:sldLayout xmlns:a="http://schemas.openxmlformats.org/drawingml/2006/main" xmlns:r="http://schemas.openxmlformats.org/officeDocument/2006/relationships" xmlns:p="http://schemas.openxmlformats.org/presentationml/2006/main" xmlns:m="http://schemas.openxmlformats.org/officeDocument/2006/math" xmlns:w="http://schemas.openxmlformats.org/wordprocessingml/2006/main" matchingName="" preserve="1" showMasterPhAnim="0" showMasterSp="1" type="picTx" userDrawn="1">
+<p:sldLayout xmlns:a="http://schemas.openxmlformats.org/drawingml/2006/main" xmlns:r="http://schemas.openxmlformats.org/officeDocument/2006/relationships" xmlns:p="http://schemas.openxmlformats.org/presentationml/2006/main" type="picTx" preserve="1" showMasterPhAnim="0" userDrawn="1">
   <p:cSld name="Picture with Caption">
     <p:spTree>
       <p:nvGrpSpPr>
@@ -3366,7 +3344,7 @@
               <a:rPr lang="en-US"/>
               <a:t>Edit Master text styles</a:t>
             </a:r>
-            <a:endParaRPr/>
+            <a:endParaRPr lang="en-US"/>
           </a:p>
         </p:txBody>
       </p:sp>
@@ -3390,7 +3368,6 @@
             </a:pPr>
             <a:fld id="{C1A0CB4C-5559-475B-830B-093C2DBE2538}" type="datetimeFigureOut">
               <a:rPr lang="en-US"/>
-              <a:t>1/15/2026</a:t>
             </a:fld>
             <a:endParaRPr lang="en-US"/>
           </a:p>
@@ -3438,7 +3415,6 @@
             </a:pPr>
             <a:fld id="{16EEFF7F-0A2A-489A-9962-FBDAE4758270}" type="slidenum">
               <a:rPr lang="en-US"/>
-              <a:t>‹#›</a:t>
             </a:fld>
             <a:endParaRPr lang="en-US"/>
           </a:p>
@@ -3453,8 +3429,8 @@
 </file>
 
 <file path=ppt/slideMasters/slideMaster1.xml><?xml version="1.0" encoding="utf-8"?>
-<p:sldMaster xmlns:a="http://schemas.openxmlformats.org/drawingml/2006/main" xmlns:r="http://schemas.openxmlformats.org/officeDocument/2006/relationships" xmlns:p="http://schemas.openxmlformats.org/presentationml/2006/main" xmlns:m="http://schemas.openxmlformats.org/officeDocument/2006/math" xmlns:w="http://schemas.openxmlformats.org/wordprocessingml/2006/main" preserve="0">
-  <p:cSld name="">
+<p:sldMaster xmlns:a="http://schemas.openxmlformats.org/drawingml/2006/main" xmlns:r="http://schemas.openxmlformats.org/officeDocument/2006/relationships" xmlns:p="http://schemas.openxmlformats.org/presentationml/2006/main">
+  <p:cSld>
     <p:bg>
       <p:bgRef idx="1001">
         <a:schemeClr val="bg1"/>
@@ -3542,7 +3518,7 @@
               <a:rPr lang="en-US"/>
               <a:t>Edit Master text styles</a:t>
             </a:r>
-            <a:endParaRPr/>
+            <a:endParaRPr lang="en-US"/>
           </a:p>
           <a:p>
             <a:pPr lvl="1">
@@ -3552,7 +3528,7 @@
               <a:rPr lang="en-US"/>
               <a:t>Second level</a:t>
             </a:r>
-            <a:endParaRPr/>
+            <a:endParaRPr lang="en-US"/>
           </a:p>
           <a:p>
             <a:pPr lvl="2">
@@ -3562,7 +3538,7 @@
               <a:rPr lang="en-US"/>
               <a:t>Third level</a:t>
             </a:r>
-            <a:endParaRPr/>
+            <a:endParaRPr lang="en-US"/>
           </a:p>
           <a:p>
             <a:pPr lvl="3">
@@ -3572,7 +3548,7 @@
               <a:rPr lang="en-US"/>
               <a:t>Fourth level</a:t>
             </a:r>
-            <a:endParaRPr/>
+            <a:endParaRPr lang="en-US"/>
           </a:p>
           <a:p>
             <a:pPr lvl="4">
@@ -3624,7 +3600,6 @@
             </a:pPr>
             <a:fld id="{C1A0CB4C-5559-475B-830B-093C2DBE2538}" type="datetimeFigureOut">
               <a:rPr lang="en-US"/>
-              <a:t>1/15/2026</a:t>
             </a:fld>
             <a:endParaRPr lang="en-US"/>
           </a:p>
@@ -3708,7 +3683,6 @@
             </a:pPr>
             <a:fld id="{16EEFF7F-0A2A-489A-9962-FBDAE4758270}" type="slidenum">
               <a:rPr lang="en-US"/>
-              <a:t>‹#›</a:t>
             </a:fld>
             <a:endParaRPr lang="en-US"/>
           </a:p>
@@ -3758,7 +3732,7 @@
         <a:spcBef>
           <a:spcPts val="1000"/>
         </a:spcBef>
-        <a:buFont typeface="Arial"/>
+        <a:buFont typeface="Arial" panose="020B0604020202020204"/>
         <a:buChar char="•"/>
         <a:defRPr sz="2800">
           <a:solidFill>
@@ -3776,7 +3750,7 @@
         <a:spcBef>
           <a:spcPts val="500"/>
         </a:spcBef>
-        <a:buFont typeface="Arial"/>
+        <a:buFont typeface="Arial" panose="020B0604020202020204"/>
         <a:buChar char="•"/>
         <a:defRPr sz="2400">
           <a:solidFill>
@@ -3794,7 +3768,7 @@
         <a:spcBef>
           <a:spcPts val="500"/>
         </a:spcBef>
-        <a:buFont typeface="Arial"/>
+        <a:buFont typeface="Arial" panose="020B0604020202020204"/>
         <a:buChar char="•"/>
         <a:defRPr sz="2000">
           <a:solidFill>
@@ -3812,7 +3786,7 @@
         <a:spcBef>
           <a:spcPts val="500"/>
         </a:spcBef>
-        <a:buFont typeface="Arial"/>
+        <a:buFont typeface="Arial" panose="020B0604020202020204"/>
         <a:buChar char="•"/>
         <a:defRPr sz="1800">
           <a:solidFill>
@@ -3830,7 +3804,7 @@
         <a:spcBef>
           <a:spcPts val="500"/>
         </a:spcBef>
-        <a:buFont typeface="Arial"/>
+        <a:buFont typeface="Arial" panose="020B0604020202020204"/>
         <a:buChar char="•"/>
         <a:defRPr sz="1800">
           <a:solidFill>
@@ -3848,7 +3822,7 @@
         <a:spcBef>
           <a:spcPts val="500"/>
         </a:spcBef>
-        <a:buFont typeface="Arial"/>
+        <a:buFont typeface="Arial" panose="020B0604020202020204"/>
         <a:buChar char="•"/>
         <a:defRPr sz="1800">
           <a:solidFill>
@@ -3866,7 +3840,7 @@
         <a:spcBef>
           <a:spcPts val="500"/>
         </a:spcBef>
-        <a:buFont typeface="Arial"/>
+        <a:buFont typeface="Arial" panose="020B0604020202020204"/>
         <a:buChar char="•"/>
         <a:defRPr sz="1800">
           <a:solidFill>
@@ -3884,7 +3858,7 @@
         <a:spcBef>
           <a:spcPts val="500"/>
         </a:spcBef>
-        <a:buFont typeface="Arial"/>
+        <a:buFont typeface="Arial" panose="020B0604020202020204"/>
         <a:buChar char="•"/>
         <a:defRPr sz="1800">
           <a:solidFill>
@@ -3902,7 +3876,7 @@
         <a:spcBef>
           <a:spcPts val="500"/>
         </a:spcBef>
-        <a:buFont typeface="Arial"/>
+        <a:buFont typeface="Arial" panose="020B0604020202020204"/>
         <a:buChar char="•"/>
         <a:defRPr sz="1800">
           <a:solidFill>
@@ -4014,8 +3988,8 @@
 </file>
 
 <file path=ppt/slides/slide1.xml><?xml version="1.0" encoding="utf-8"?>
-<p:sld xmlns:a="http://schemas.openxmlformats.org/drawingml/2006/main" xmlns:r="http://schemas.openxmlformats.org/officeDocument/2006/relationships" xmlns:p="http://schemas.openxmlformats.org/presentationml/2006/main" xmlns:m="http://schemas.openxmlformats.org/officeDocument/2006/math" xmlns:w="http://schemas.openxmlformats.org/wordprocessingml/2006/main" xmlns:mc="http://schemas.openxmlformats.org/markup-compatibility/2006" showMasterPhAnim="0" showMasterSp="1" show="1">
-  <p:cSld name="">
+<p:sld xmlns:a="http://schemas.openxmlformats.org/drawingml/2006/main" xmlns:r="http://schemas.openxmlformats.org/officeDocument/2006/relationships" xmlns:p="http://schemas.openxmlformats.org/presentationml/2006/main" showMasterPhAnim="0">
+  <p:cSld>
     <p:spTree>
       <p:nvGrpSpPr>
         <p:cNvPr id="1" name=""/>
@@ -4083,8 +4057,10 @@
           <p:nvPr/>
         </p:nvPicPr>
         <p:blipFill rotWithShape="1">
-          <a:blip r:embed="rId3"/>
-          <a:stretch/>
+          <a:blip r:embed="rId1"/>
+          <a:stretch>
+            <a:fillRect/>
+          </a:stretch>
         </p:blipFill>
         <p:spPr bwMode="auto">
           <a:xfrm>
@@ -4102,19 +4078,19 @@
     <a:masterClrMapping/>
   </p:clrMapOvr>
   <mc:AlternateContent xmlns:mc="http://schemas.openxmlformats.org/markup-compatibility/2006">
-    <mc:Choice xmlns:p159="http://schemas.microsoft.com/office/powerpoint/2015/09/main" xmlns:p14="http://schemas.microsoft.com/office/powerpoint/2010/main" Requires="p159">
-      <p:transition p14:dur="500" advClick="1"/>
+    <mc:Choice xmlns:p14="http://schemas.microsoft.com/office/powerpoint/2010/main" Requires="p14">
+      <p:transition p14:dur="500"/>
     </mc:Choice>
     <mc:Fallback>
-      <p:transition advClick="1"/>
+      <p:transition/>
     </mc:Fallback>
   </mc:AlternateContent>
 </p:sld>
 </file>
 
 <file path=ppt/slides/slide2.xml><?xml version="1.0" encoding="utf-8"?>
-<p:sld xmlns:a="http://schemas.openxmlformats.org/drawingml/2006/main" xmlns:r="http://schemas.openxmlformats.org/officeDocument/2006/relationships" xmlns:p="http://schemas.openxmlformats.org/presentationml/2006/main" xmlns:m="http://schemas.openxmlformats.org/officeDocument/2006/math" xmlns:w="http://schemas.openxmlformats.org/wordprocessingml/2006/main" xmlns:mc="http://schemas.openxmlformats.org/markup-compatibility/2006" showMasterPhAnim="0" showMasterSp="1" show="1">
-  <p:cSld name="">
+<p:sld xmlns:a="http://schemas.openxmlformats.org/drawingml/2006/main" xmlns:r="http://schemas.openxmlformats.org/officeDocument/2006/relationships" xmlns:p="http://schemas.openxmlformats.org/presentationml/2006/main" showMasterPhAnim="0">
+  <p:cSld>
     <p:spTree>
       <p:nvGrpSpPr>
         <p:cNvPr id="1" name=""/>
@@ -4138,12 +4114,14 @@
           <p:nvPr/>
         </p:nvPicPr>
         <p:blipFill rotWithShape="1">
-          <a:blip r:embed="rId3"/>
-          <a:stretch/>
+          <a:blip r:embed="rId1"/>
+          <a:stretch>
+            <a:fillRect/>
+          </a:stretch>
         </p:blipFill>
         <p:spPr bwMode="auto">
           <a:xfrm>
-            <a:off x="120205" y="195055"/>
+            <a:off x="-131255" y="179815"/>
             <a:ext cx="10924032" cy="6467889"/>
           </a:xfrm>
           <a:prstGeom prst="rect">
@@ -4157,19 +4135,19 @@
     <a:masterClrMapping/>
   </p:clrMapOvr>
   <mc:AlternateContent xmlns:mc="http://schemas.openxmlformats.org/markup-compatibility/2006">
-    <mc:Choice xmlns:p159="http://schemas.microsoft.com/office/powerpoint/2015/09/main" xmlns:p14="http://schemas.microsoft.com/office/powerpoint/2010/main" Requires="p159">
-      <p:transition p14:dur="500" advClick="1"/>
+    <mc:Choice xmlns:p14="http://schemas.microsoft.com/office/powerpoint/2010/main" Requires="p14">
+      <p:transition p14:dur="500"/>
     </mc:Choice>
     <mc:Fallback>
-      <p:transition advClick="1"/>
+      <p:transition/>
     </mc:Fallback>
   </mc:AlternateContent>
 </p:sld>
 </file>
 
 <file path=ppt/slides/slide3.xml><?xml version="1.0" encoding="utf-8"?>
-<p:sld xmlns:a="http://schemas.openxmlformats.org/drawingml/2006/main" xmlns:r="http://schemas.openxmlformats.org/officeDocument/2006/relationships" xmlns:p="http://schemas.openxmlformats.org/presentationml/2006/main" xmlns:m="http://schemas.openxmlformats.org/officeDocument/2006/math" xmlns:w="http://schemas.openxmlformats.org/wordprocessingml/2006/main" xmlns:mc="http://schemas.openxmlformats.org/markup-compatibility/2006" showMasterPhAnim="0" showMasterSp="1" show="1">
-  <p:cSld name="">
+<p:sld xmlns:a="http://schemas.openxmlformats.org/drawingml/2006/main" xmlns:r="http://schemas.openxmlformats.org/officeDocument/2006/relationships" xmlns:p="http://schemas.openxmlformats.org/presentationml/2006/main" showMasterPhAnim="0">
+  <p:cSld>
     <p:spTree>
       <p:nvGrpSpPr>
         <p:cNvPr id="1" name=""/>
@@ -4224,8 +4202,10 @@
           <p:nvPr/>
         </p:nvPicPr>
         <p:blipFill rotWithShape="1">
-          <a:blip r:embed="rId3"/>
-          <a:stretch/>
+          <a:blip r:embed="rId1"/>
+          <a:stretch>
+            <a:fillRect/>
+          </a:stretch>
         </p:blipFill>
         <p:spPr bwMode="auto">
           <a:xfrm>
@@ -4246,8 +4226,10 @@
           <p:nvPr/>
         </p:nvPicPr>
         <p:blipFill rotWithShape="1">
-          <a:blip r:embed="rId4"/>
-          <a:stretch/>
+          <a:blip r:embed="rId2"/>
+          <a:stretch>
+            <a:fillRect/>
+          </a:stretch>
         </p:blipFill>
         <p:spPr bwMode="auto">
           <a:xfrm>
@@ -4265,19 +4247,19 @@
     <a:masterClrMapping/>
   </p:clrMapOvr>
   <mc:AlternateContent xmlns:mc="http://schemas.openxmlformats.org/markup-compatibility/2006">
-    <mc:Choice xmlns:p159="http://schemas.microsoft.com/office/powerpoint/2015/09/main" xmlns:p14="http://schemas.microsoft.com/office/powerpoint/2010/main" Requires="p159">
-      <p:transition p14:dur="500" advClick="1"/>
+    <mc:Choice xmlns:p14="http://schemas.microsoft.com/office/powerpoint/2010/main" Requires="p14">
+      <p:transition p14:dur="500"/>
     </mc:Choice>
     <mc:Fallback>
-      <p:transition advClick="1"/>
+      <p:transition/>
     </mc:Fallback>
   </mc:AlternateContent>
 </p:sld>
 </file>
 
 <file path=ppt/slides/slide4.xml><?xml version="1.0" encoding="utf-8"?>
-<p:sld xmlns:a="http://schemas.openxmlformats.org/drawingml/2006/main" xmlns:r="http://schemas.openxmlformats.org/officeDocument/2006/relationships" xmlns:p="http://schemas.openxmlformats.org/presentationml/2006/main" xmlns:m="http://schemas.openxmlformats.org/officeDocument/2006/math" xmlns:w="http://schemas.openxmlformats.org/wordprocessingml/2006/main" xmlns:mc="http://schemas.openxmlformats.org/markup-compatibility/2006" showMasterPhAnim="0" showMasterSp="1" show="1">
-  <p:cSld name="">
+<p:sld xmlns:a="http://schemas.openxmlformats.org/drawingml/2006/main" xmlns:r="http://schemas.openxmlformats.org/officeDocument/2006/relationships" xmlns:p="http://schemas.openxmlformats.org/presentationml/2006/main" showMasterPhAnim="0">
+  <p:cSld>
     <p:spTree>
       <p:nvGrpSpPr>
         <p:cNvPr id="1" name=""/>
@@ -4332,8 +4314,10 @@
           <p:nvPr/>
         </p:nvPicPr>
         <p:blipFill rotWithShape="1">
-          <a:blip r:embed="rId3"/>
-          <a:stretch/>
+          <a:blip r:embed="rId1"/>
+          <a:stretch>
+            <a:fillRect/>
+          </a:stretch>
         </p:blipFill>
         <p:spPr bwMode="auto">
           <a:xfrm>
@@ -4354,8 +4338,10 @@
           <p:nvPr/>
         </p:nvPicPr>
         <p:blipFill rotWithShape="1">
-          <a:blip r:embed="rId4"/>
-          <a:stretch/>
+          <a:blip r:embed="rId2"/>
+          <a:stretch>
+            <a:fillRect/>
+          </a:stretch>
         </p:blipFill>
         <p:spPr bwMode="auto">
           <a:xfrm>
@@ -4373,19 +4359,19 @@
     <a:masterClrMapping/>
   </p:clrMapOvr>
   <mc:AlternateContent xmlns:mc="http://schemas.openxmlformats.org/markup-compatibility/2006">
-    <mc:Choice xmlns:p159="http://schemas.microsoft.com/office/powerpoint/2015/09/main" xmlns:p14="http://schemas.microsoft.com/office/powerpoint/2010/main" Requires="p159">
-      <p:transition p14:dur="500" advClick="1"/>
+    <mc:Choice xmlns:p14="http://schemas.microsoft.com/office/powerpoint/2010/main" Requires="p14">
+      <p:transition p14:dur="500"/>
     </mc:Choice>
     <mc:Fallback>
-      <p:transition advClick="1"/>
+      <p:transition/>
     </mc:Fallback>
   </mc:AlternateContent>
 </p:sld>
 </file>
 
 <file path=ppt/slides/slide5.xml><?xml version="1.0" encoding="utf-8"?>
-<p:sld xmlns:a="http://schemas.openxmlformats.org/drawingml/2006/main" xmlns:r="http://schemas.openxmlformats.org/officeDocument/2006/relationships" xmlns:p="http://schemas.openxmlformats.org/presentationml/2006/main" xmlns:m="http://schemas.openxmlformats.org/officeDocument/2006/math" xmlns:w="http://schemas.openxmlformats.org/wordprocessingml/2006/main" xmlns:mc="http://schemas.openxmlformats.org/markup-compatibility/2006" showMasterPhAnim="0" showMasterSp="1" show="1">
-  <p:cSld name="">
+<p:sld xmlns:a="http://schemas.openxmlformats.org/drawingml/2006/main" xmlns:r="http://schemas.openxmlformats.org/officeDocument/2006/relationships" xmlns:p="http://schemas.openxmlformats.org/presentationml/2006/main" showMasterPhAnim="0">
+  <p:cSld>
     <p:spTree>
       <p:nvGrpSpPr>
         <p:cNvPr id="1" name=""/>
@@ -4409,11 +4395,13 @@
           <p:nvPr/>
         </p:nvPicPr>
         <p:blipFill rotWithShape="1">
-          <a:blip r:embed="rId3"/>
-          <a:stretch/>
+          <a:blip r:embed="rId1"/>
+          <a:stretch>
+            <a:fillRect/>
+          </a:stretch>
         </p:blipFill>
         <p:spPr bwMode="auto">
-          <a:xfrm flipH="0" flipV="0">
+          <a:xfrm>
             <a:off x="614362" y="85725"/>
             <a:ext cx="12168187" cy="6858000"/>
           </a:xfrm>
@@ -4428,19 +4416,19 @@
     <a:masterClrMapping/>
   </p:clrMapOvr>
   <mc:AlternateContent xmlns:mc="http://schemas.openxmlformats.org/markup-compatibility/2006">
-    <mc:Choice xmlns:p159="http://schemas.microsoft.com/office/powerpoint/2015/09/main" xmlns:p14="http://schemas.microsoft.com/office/powerpoint/2010/main" Requires="p159">
-      <p:transition p14:dur="500" advClick="1"/>
+    <mc:Choice xmlns:p14="http://schemas.microsoft.com/office/powerpoint/2010/main" Requires="p14">
+      <p:transition p14:dur="500"/>
     </mc:Choice>
     <mc:Fallback>
-      <p:transition advClick="1"/>
+      <p:transition/>
     </mc:Fallback>
   </mc:AlternateContent>
 </p:sld>
 </file>
 
 <file path=ppt/slides/slide6.xml><?xml version="1.0" encoding="utf-8"?>
-<p:sld xmlns:a="http://schemas.openxmlformats.org/drawingml/2006/main" xmlns:r="http://schemas.openxmlformats.org/officeDocument/2006/relationships" xmlns:p="http://schemas.openxmlformats.org/presentationml/2006/main" xmlns:m="http://schemas.openxmlformats.org/officeDocument/2006/math" xmlns:w="http://schemas.openxmlformats.org/wordprocessingml/2006/main" xmlns:mc="http://schemas.openxmlformats.org/markup-compatibility/2006" showMasterPhAnim="0" showMasterSp="1" show="1">
-  <p:cSld name="">
+<p:sld xmlns:a="http://schemas.openxmlformats.org/drawingml/2006/main" xmlns:r="http://schemas.openxmlformats.org/officeDocument/2006/relationships" xmlns:p="http://schemas.openxmlformats.org/presentationml/2006/main" showMasterPhAnim="0">
+  <p:cSld>
     <p:spTree>
       <p:nvGrpSpPr>
         <p:cNvPr id="1" name=""/>
@@ -4464,11 +4452,13 @@
           <p:nvPr/>
         </p:nvPicPr>
         <p:blipFill rotWithShape="1">
-          <a:blip r:embed="rId3"/>
-          <a:stretch/>
+          <a:blip r:embed="rId1"/>
+          <a:stretch>
+            <a:fillRect/>
+          </a:stretch>
         </p:blipFill>
         <p:spPr bwMode="auto">
-          <a:xfrm flipH="0" flipV="0">
+          <a:xfrm>
             <a:off x="2058147" y="-26420"/>
             <a:ext cx="9886201" cy="6796541"/>
           </a:xfrm>
@@ -4483,18 +4473,18 @@
     <a:masterClrMapping/>
   </p:clrMapOvr>
   <mc:AlternateContent xmlns:mc="http://schemas.openxmlformats.org/markup-compatibility/2006">
-    <mc:Choice xmlns:p159="http://schemas.microsoft.com/office/powerpoint/2015/09/main" xmlns:p14="http://schemas.microsoft.com/office/powerpoint/2010/main" Requires="p159">
-      <p:transition p14:dur="500" advClick="1"/>
+    <mc:Choice xmlns:p14="http://schemas.microsoft.com/office/powerpoint/2010/main" Requires="p14">
+      <p:transition p14:dur="500"/>
     </mc:Choice>
     <mc:Fallback>
-      <p:transition advClick="1"/>
+      <p:transition/>
     </mc:Fallback>
   </mc:AlternateContent>
 </p:sld>
 </file>
 
 <file path=ppt/theme/theme1.xml><?xml version="1.0" encoding="utf-8"?>
-<a:theme xmlns:a="http://schemas.openxmlformats.org/drawingml/2006/main" xmlns:r="http://schemas.openxmlformats.org/officeDocument/2006/relationships" xmlns:p="http://schemas.openxmlformats.org/presentationml/2006/main" name="Office Theme">
+<a:theme xmlns:a="http://schemas.openxmlformats.org/drawingml/2006/main" name="Office Theme">
   <a:themeElements>
     <a:clrScheme name="Office">
       <a:dk1>
@@ -4684,12 +4674,16 @@
       </a:bgFillStyleLst>
     </a:fmtScheme>
   </a:themeElements>
-  <a:objectDefaults/>
+  <a:extLst>
+    <a:ext uri="{05A4C25C-085E-4340-85A3-A5531E510DB2}">
+      <thm15:themeFamily xmlns:thm15="http://schemas.microsoft.com/office/thememl/2012/main" name="Office Theme" id="{62F939B6-93AF-4DB8-9C6B-D6C7DFDC589F}" vid="{4A3C46E8-61CC-4603-A589-7422A47A8E4A}"/>
+    </a:ext>
+  </a:extLst>
 </a:theme>
 </file>
 
 <file path=ppt/theme/theme2.xml><?xml version="1.0" encoding="utf-8"?>
-<a:theme xmlns:a="http://schemas.openxmlformats.org/drawingml/2006/main" xmlns:r="http://schemas.openxmlformats.org/officeDocument/2006/relationships" xmlns:p="http://schemas.openxmlformats.org/presentationml/2006/main" name="Office Theme">
+<a:theme xmlns:a="http://schemas.openxmlformats.org/drawingml/2006/main" name="Office Theme">
   <a:themeElements>
     <a:clrScheme name="Office">
       <a:dk1>
@@ -4879,6 +4873,10 @@
       </a:bgFillStyleLst>
     </a:fmtScheme>
   </a:themeElements>
-  <a:objectDefaults/>
+  <a:extLst>
+    <a:ext uri="{05A4C25C-085E-4340-85A3-A5531E510DB2}">
+      <thm15:themeFamily xmlns:thm15="http://schemas.microsoft.com/office/thememl/2012/main" name="Office Theme" id="{62F939B6-93AF-4DB8-9C6B-D6C7DFDC589F}" vid="{4A3C46E8-61CC-4603-A589-7422A47A8E4A}"/>
+    </a:ext>
+  </a:extLst>
 </a:theme>
 </file>